--- a/MonadLens演示 · 透视链.pptx
+++ b/MonadLens演示 · 透视链.pptx
@@ -1,24 +1,25 @@
 
 <file path=ppt/presentation.xml><?xml version="1.0" encoding="utf-8"?>
-<p:presentation xmlns:a="http://schemas.openxmlformats.org/drawingml/2006/main" xmlns:r="http://schemas.openxmlformats.org/officeDocument/2006/relationships" xmlns:p="http://schemas.openxmlformats.org/presentationml/2006/main" autoCompressPictures="0">
+<p:presentation xmlns:a="http://schemas.openxmlformats.org/drawingml/2006/main" xmlns:r="http://schemas.openxmlformats.org/officeDocument/2006/relationships" xmlns:p="http://schemas.openxmlformats.org/presentationml/2006/main" saveSubsetFonts="1" autoCompressPictures="0">
   <p:sldMasterIdLst>
     <p:sldMasterId id="2147483648" r:id="rId1"/>
   </p:sldMasterIdLst>
   <p:sldIdLst>
-    <p:sldId id="256" r:id="rId3"/>
-    <p:sldId id="257" r:id="rId4"/>
-    <p:sldId id="258" r:id="rId5"/>
-    <p:sldId id="259" r:id="rId6"/>
-    <p:sldId id="260" r:id="rId7"/>
-    <p:sldId id="261" r:id="rId8"/>
-    <p:sldId id="262" r:id="rId9"/>
-    <p:sldId id="263" r:id="rId10"/>
-    <p:sldId id="264" r:id="rId11"/>
-    <p:sldId id="265" r:id="rId12"/>
-    <p:sldId id="266" r:id="rId13"/>
-    <p:sldId id="267" r:id="rId14"/>
+    <p:sldId id="256" r:id="rId7"/>
+    <p:sldId id="257" r:id="rId8"/>
+    <p:sldId id="258" r:id="rId9"/>
+    <p:sldId id="259" r:id="rId10"/>
+    <p:sldId id="260" r:id="rId11"/>
+    <p:sldId id="261" r:id="rId12"/>
+    <p:sldId id="262" r:id="rId13"/>
+    <p:sldId id="263" r:id="rId14"/>
+    <p:sldId id="264" r:id="rId15"/>
+    <p:sldId id="265" r:id="rId16"/>
+    <p:sldId id="266" r:id="rId17"/>
+    <p:sldId id="267" r:id="rId18"/>
+    <p:sldId id="268" r:id="rId19"/>
   </p:sldIdLst>
-  <p:sldSz cx="12191365" cy="6858000" type="screen4x3"/>
+  <p:sldSz cx="12191695" cy="6858000" type="screen4x3"/>
   <p:notesSz cx="6858000" cy="9144000"/>
   <p:defaultTextStyle>
     <a:defPPr>
@@ -115,22 +116,6 @@
       </a:defRPr>
     </a:lvl9pPr>
   </p:defaultTextStyle>
-  <p:extLst>
-    <p:ext uri="{EFAFB233-063F-42B5-8137-9DF3F51BA10A}">
-      <p15:sldGuideLst xmlns:p15="http://schemas.microsoft.com/office/powerpoint/2012/main">
-        <p15:guide id="1" orient="horz" pos="2160" userDrawn="1">
-          <p15:clr>
-            <a:srgbClr val="A4A3A4"/>
-          </p15:clr>
-        </p15:guide>
-        <p15:guide id="2" pos="2880" userDrawn="1">
-          <p15:clr>
-            <a:srgbClr val="A4A3A4"/>
-          </p15:clr>
-        </p15:guide>
-      </p15:sldGuideLst>
-    </p:ext>
-  </p:extLst>
 </p:presentation>
 </file>
 
@@ -315,6 +300,7 @@
           <a:p>
             <a:fld id="{5BCAD085-E8A6-8845-BD4E-CB4CCA059FC4}" type="datetimeFigureOut">
               <a:rPr lang="en-US" smtClean="0"/>
+              <a:t>1/27/13</a:t>
             </a:fld>
             <a:endParaRPr lang="en-US"/>
           </a:p>
@@ -356,12 +342,18 @@
           <a:p>
             <a:fld id="{C1FF6DA9-008F-8B48-92A6-B652298478BF}" type="slidenum">
               <a:rPr lang="en-US" smtClean="0"/>
+              <a:t>‹#›</a:t>
             </a:fld>
             <a:endParaRPr lang="en-US"/>
           </a:p>
         </p:txBody>
       </p:sp>
     </p:spTree>
+    <p:extLst>
+      <p:ext uri="{BB962C8B-B14F-4D97-AF65-F5344CB8AC3E}">
+        <p14:creationId xmlns:p14="http://schemas.microsoft.com/office/powerpoint/2010/main" val="3168075583"/>
+      </p:ext>
+    </p:extLst>
   </p:cSld>
   <p:clrMapOvr>
     <a:masterClrMapping/>
@@ -429,7 +421,6 @@
               <a:rPr lang="en-US" smtClean="0"/>
               <a:t>Click to edit Master text styles</a:t>
             </a:r>
-            <a:endParaRPr lang="en-US" smtClean="0"/>
           </a:p>
           <a:p>
             <a:pPr lvl="1"/>
@@ -437,7 +428,6 @@
               <a:rPr lang="en-US" smtClean="0"/>
               <a:t>Second level</a:t>
             </a:r>
-            <a:endParaRPr lang="en-US" smtClean="0"/>
           </a:p>
           <a:p>
             <a:pPr lvl="2"/>
@@ -445,7 +435,6 @@
               <a:rPr lang="en-US" smtClean="0"/>
               <a:t>Third level</a:t>
             </a:r>
-            <a:endParaRPr lang="en-US" smtClean="0"/>
           </a:p>
           <a:p>
             <a:pPr lvl="3"/>
@@ -453,7 +442,6 @@
               <a:rPr lang="en-US" smtClean="0"/>
               <a:t>Fourth level</a:t>
             </a:r>
-            <a:endParaRPr lang="en-US" smtClean="0"/>
           </a:p>
           <a:p>
             <a:pPr lvl="4"/>
@@ -482,6 +470,7 @@
           <a:p>
             <a:fld id="{5BCAD085-E8A6-8845-BD4E-CB4CCA059FC4}" type="datetimeFigureOut">
               <a:rPr lang="en-US" smtClean="0"/>
+              <a:t>1/27/13</a:t>
             </a:fld>
             <a:endParaRPr lang="en-US"/>
           </a:p>
@@ -523,12 +512,18 @@
           <a:p>
             <a:fld id="{C1FF6DA9-008F-8B48-92A6-B652298478BF}" type="slidenum">
               <a:rPr lang="en-US" smtClean="0"/>
+              <a:t>‹#›</a:t>
             </a:fld>
             <a:endParaRPr lang="en-US"/>
           </a:p>
         </p:txBody>
       </p:sp>
     </p:spTree>
+    <p:extLst>
+      <p:ext uri="{BB962C8B-B14F-4D97-AF65-F5344CB8AC3E}">
+        <p14:creationId xmlns:p14="http://schemas.microsoft.com/office/powerpoint/2010/main" val="2910927964"/>
+      </p:ext>
+    </p:extLst>
   </p:cSld>
   <p:clrMapOvr>
     <a:masterClrMapping/>
@@ -606,7 +601,6 @@
               <a:rPr lang="en-US" smtClean="0"/>
               <a:t>Click to edit Master text styles</a:t>
             </a:r>
-            <a:endParaRPr lang="en-US" smtClean="0"/>
           </a:p>
           <a:p>
             <a:pPr lvl="1"/>
@@ -614,7 +608,6 @@
               <a:rPr lang="en-US" smtClean="0"/>
               <a:t>Second level</a:t>
             </a:r>
-            <a:endParaRPr lang="en-US" smtClean="0"/>
           </a:p>
           <a:p>
             <a:pPr lvl="2"/>
@@ -622,7 +615,6 @@
               <a:rPr lang="en-US" smtClean="0"/>
               <a:t>Third level</a:t>
             </a:r>
-            <a:endParaRPr lang="en-US" smtClean="0"/>
           </a:p>
           <a:p>
             <a:pPr lvl="3"/>
@@ -630,7 +622,6 @@
               <a:rPr lang="en-US" smtClean="0"/>
               <a:t>Fourth level</a:t>
             </a:r>
-            <a:endParaRPr lang="en-US" smtClean="0"/>
           </a:p>
           <a:p>
             <a:pPr lvl="4"/>
@@ -659,6 +650,7 @@
           <a:p>
             <a:fld id="{5BCAD085-E8A6-8845-BD4E-CB4CCA059FC4}" type="datetimeFigureOut">
               <a:rPr lang="en-US" smtClean="0"/>
+              <a:t>1/27/13</a:t>
             </a:fld>
             <a:endParaRPr lang="en-US"/>
           </a:p>
@@ -700,12 +692,18 @@
           <a:p>
             <a:fld id="{C1FF6DA9-008F-8B48-92A6-B652298478BF}" type="slidenum">
               <a:rPr lang="en-US" smtClean="0"/>
+              <a:t>‹#›</a:t>
             </a:fld>
             <a:endParaRPr lang="en-US"/>
           </a:p>
         </p:txBody>
       </p:sp>
     </p:spTree>
+    <p:extLst>
+      <p:ext uri="{BB962C8B-B14F-4D97-AF65-F5344CB8AC3E}">
+        <p14:creationId xmlns:p14="http://schemas.microsoft.com/office/powerpoint/2010/main" val="3612223792"/>
+      </p:ext>
+    </p:extLst>
   </p:cSld>
   <p:clrMapOvr>
     <a:masterClrMapping/>
@@ -773,7 +771,6 @@
               <a:rPr lang="en-US" smtClean="0"/>
               <a:t>Click to edit Master text styles</a:t>
             </a:r>
-            <a:endParaRPr lang="en-US" smtClean="0"/>
           </a:p>
           <a:p>
             <a:pPr lvl="1"/>
@@ -781,7 +778,6 @@
               <a:rPr lang="en-US" smtClean="0"/>
               <a:t>Second level</a:t>
             </a:r>
-            <a:endParaRPr lang="en-US" smtClean="0"/>
           </a:p>
           <a:p>
             <a:pPr lvl="2"/>
@@ -789,7 +785,6 @@
               <a:rPr lang="en-US" smtClean="0"/>
               <a:t>Third level</a:t>
             </a:r>
-            <a:endParaRPr lang="en-US" smtClean="0"/>
           </a:p>
           <a:p>
             <a:pPr lvl="3"/>
@@ -797,7 +792,6 @@
               <a:rPr lang="en-US" smtClean="0"/>
               <a:t>Fourth level</a:t>
             </a:r>
-            <a:endParaRPr lang="en-US" smtClean="0"/>
           </a:p>
           <a:p>
             <a:pPr lvl="4"/>
@@ -826,6 +820,7 @@
           <a:p>
             <a:fld id="{5BCAD085-E8A6-8845-BD4E-CB4CCA059FC4}" type="datetimeFigureOut">
               <a:rPr lang="en-US" smtClean="0"/>
+              <a:t>1/27/13</a:t>
             </a:fld>
             <a:endParaRPr lang="en-US"/>
           </a:p>
@@ -867,12 +862,18 @@
           <a:p>
             <a:fld id="{C1FF6DA9-008F-8B48-92A6-B652298478BF}" type="slidenum">
               <a:rPr lang="en-US" smtClean="0"/>
+              <a:t>‹#›</a:t>
             </a:fld>
             <a:endParaRPr lang="en-US"/>
           </a:p>
         </p:txBody>
       </p:sp>
     </p:spTree>
+    <p:extLst>
+      <p:ext uri="{BB962C8B-B14F-4D97-AF65-F5344CB8AC3E}">
+        <p14:creationId xmlns:p14="http://schemas.microsoft.com/office/powerpoint/2010/main" val="2614314258"/>
+      </p:ext>
+    </p:extLst>
   </p:cSld>
   <p:clrMapOvr>
     <a:masterClrMapping/>
@@ -1045,7 +1046,6 @@
               <a:rPr lang="en-US" smtClean="0"/>
               <a:t>Click to edit Master text styles</a:t>
             </a:r>
-            <a:endParaRPr lang="en-US" smtClean="0"/>
           </a:p>
         </p:txBody>
       </p:sp>
@@ -1066,6 +1066,7 @@
           <a:p>
             <a:fld id="{5BCAD085-E8A6-8845-BD4E-CB4CCA059FC4}" type="datetimeFigureOut">
               <a:rPr lang="en-US" smtClean="0"/>
+              <a:t>1/27/13</a:t>
             </a:fld>
             <a:endParaRPr lang="en-US"/>
           </a:p>
@@ -1107,12 +1108,18 @@
           <a:p>
             <a:fld id="{C1FF6DA9-008F-8B48-92A6-B652298478BF}" type="slidenum">
               <a:rPr lang="en-US" smtClean="0"/>
+              <a:t>‹#›</a:t>
             </a:fld>
             <a:endParaRPr lang="en-US"/>
           </a:p>
         </p:txBody>
       </p:sp>
     </p:spTree>
+    <p:extLst>
+      <p:ext uri="{BB962C8B-B14F-4D97-AF65-F5344CB8AC3E}">
+        <p14:creationId xmlns:p14="http://schemas.microsoft.com/office/powerpoint/2010/main" val="960648375"/>
+      </p:ext>
+    </p:extLst>
   </p:cSld>
   <p:clrMapOvr>
     <a:masterClrMapping/>
@@ -1213,7 +1220,6 @@
               <a:rPr lang="en-US" smtClean="0"/>
               <a:t>Click to edit Master text styles</a:t>
             </a:r>
-            <a:endParaRPr lang="en-US" smtClean="0"/>
           </a:p>
           <a:p>
             <a:pPr lvl="1"/>
@@ -1221,7 +1227,6 @@
               <a:rPr lang="en-US" smtClean="0"/>
               <a:t>Second level</a:t>
             </a:r>
-            <a:endParaRPr lang="en-US" smtClean="0"/>
           </a:p>
           <a:p>
             <a:pPr lvl="2"/>
@@ -1229,7 +1234,6 @@
               <a:rPr lang="en-US" smtClean="0"/>
               <a:t>Third level</a:t>
             </a:r>
-            <a:endParaRPr lang="en-US" smtClean="0"/>
           </a:p>
           <a:p>
             <a:pPr lvl="3"/>
@@ -1237,7 +1241,6 @@
               <a:rPr lang="en-US" smtClean="0"/>
               <a:t>Fourth level</a:t>
             </a:r>
-            <a:endParaRPr lang="en-US" smtClean="0"/>
           </a:p>
           <a:p>
             <a:pPr lvl="4"/>
@@ -1302,7 +1305,6 @@
               <a:rPr lang="en-US" smtClean="0"/>
               <a:t>Click to edit Master text styles</a:t>
             </a:r>
-            <a:endParaRPr lang="en-US" smtClean="0"/>
           </a:p>
           <a:p>
             <a:pPr lvl="1"/>
@@ -1310,7 +1312,6 @@
               <a:rPr lang="en-US" smtClean="0"/>
               <a:t>Second level</a:t>
             </a:r>
-            <a:endParaRPr lang="en-US" smtClean="0"/>
           </a:p>
           <a:p>
             <a:pPr lvl="2"/>
@@ -1318,7 +1319,6 @@
               <a:rPr lang="en-US" smtClean="0"/>
               <a:t>Third level</a:t>
             </a:r>
-            <a:endParaRPr lang="en-US" smtClean="0"/>
           </a:p>
           <a:p>
             <a:pPr lvl="3"/>
@@ -1326,7 +1326,6 @@
               <a:rPr lang="en-US" smtClean="0"/>
               <a:t>Fourth level</a:t>
             </a:r>
-            <a:endParaRPr lang="en-US" smtClean="0"/>
           </a:p>
           <a:p>
             <a:pPr lvl="4"/>
@@ -1355,6 +1354,7 @@
           <a:p>
             <a:fld id="{5BCAD085-E8A6-8845-BD4E-CB4CCA059FC4}" type="datetimeFigureOut">
               <a:rPr lang="en-US" smtClean="0"/>
+              <a:t>1/27/13</a:t>
             </a:fld>
             <a:endParaRPr lang="en-US"/>
           </a:p>
@@ -1396,12 +1396,18 @@
           <a:p>
             <a:fld id="{C1FF6DA9-008F-8B48-92A6-B652298478BF}" type="slidenum">
               <a:rPr lang="en-US" smtClean="0"/>
+              <a:t>‹#›</a:t>
             </a:fld>
             <a:endParaRPr lang="en-US"/>
           </a:p>
         </p:txBody>
       </p:sp>
     </p:spTree>
+    <p:extLst>
+      <p:ext uri="{BB962C8B-B14F-4D97-AF65-F5344CB8AC3E}">
+        <p14:creationId xmlns:p14="http://schemas.microsoft.com/office/powerpoint/2010/main" val="2782244947"/>
+      </p:ext>
+    </p:extLst>
   </p:cSld>
   <p:clrMapOvr>
     <a:masterClrMapping/>
@@ -1515,7 +1521,6 @@
               <a:rPr lang="en-US" smtClean="0"/>
               <a:t>Click to edit Master text styles</a:t>
             </a:r>
-            <a:endParaRPr lang="en-US" smtClean="0"/>
           </a:p>
         </p:txBody>
       </p:sp>
@@ -1572,7 +1577,6 @@
               <a:rPr lang="en-US" smtClean="0"/>
               <a:t>Click to edit Master text styles</a:t>
             </a:r>
-            <a:endParaRPr lang="en-US" smtClean="0"/>
           </a:p>
           <a:p>
             <a:pPr lvl="1"/>
@@ -1580,7 +1584,6 @@
               <a:rPr lang="en-US" smtClean="0"/>
               <a:t>Second level</a:t>
             </a:r>
-            <a:endParaRPr lang="en-US" smtClean="0"/>
           </a:p>
           <a:p>
             <a:pPr lvl="2"/>
@@ -1588,7 +1591,6 @@
               <a:rPr lang="en-US" smtClean="0"/>
               <a:t>Third level</a:t>
             </a:r>
-            <a:endParaRPr lang="en-US" smtClean="0"/>
           </a:p>
           <a:p>
             <a:pPr lvl="3"/>
@@ -1596,7 +1598,6 @@
               <a:rPr lang="en-US" smtClean="0"/>
               <a:t>Fourth level</a:t>
             </a:r>
-            <a:endParaRPr lang="en-US" smtClean="0"/>
           </a:p>
           <a:p>
             <a:pPr lvl="4"/>
@@ -1670,7 +1671,6 @@
               <a:rPr lang="en-US" smtClean="0"/>
               <a:t>Click to edit Master text styles</a:t>
             </a:r>
-            <a:endParaRPr lang="en-US" smtClean="0"/>
           </a:p>
         </p:txBody>
       </p:sp>
@@ -1727,7 +1727,6 @@
               <a:rPr lang="en-US" smtClean="0"/>
               <a:t>Click to edit Master text styles</a:t>
             </a:r>
-            <a:endParaRPr lang="en-US" smtClean="0"/>
           </a:p>
           <a:p>
             <a:pPr lvl="1"/>
@@ -1735,7 +1734,6 @@
               <a:rPr lang="en-US" smtClean="0"/>
               <a:t>Second level</a:t>
             </a:r>
-            <a:endParaRPr lang="en-US" smtClean="0"/>
           </a:p>
           <a:p>
             <a:pPr lvl="2"/>
@@ -1743,7 +1741,6 @@
               <a:rPr lang="en-US" smtClean="0"/>
               <a:t>Third level</a:t>
             </a:r>
-            <a:endParaRPr lang="en-US" smtClean="0"/>
           </a:p>
           <a:p>
             <a:pPr lvl="3"/>
@@ -1751,7 +1748,6 @@
               <a:rPr lang="en-US" smtClean="0"/>
               <a:t>Fourth level</a:t>
             </a:r>
-            <a:endParaRPr lang="en-US" smtClean="0"/>
           </a:p>
           <a:p>
             <a:pPr lvl="4"/>
@@ -1780,6 +1776,7 @@
           <a:p>
             <a:fld id="{5BCAD085-E8A6-8845-BD4E-CB4CCA059FC4}" type="datetimeFigureOut">
               <a:rPr lang="en-US" smtClean="0"/>
+              <a:t>1/27/13</a:t>
             </a:fld>
             <a:endParaRPr lang="en-US"/>
           </a:p>
@@ -1821,12 +1818,18 @@
           <a:p>
             <a:fld id="{C1FF6DA9-008F-8B48-92A6-B652298478BF}" type="slidenum">
               <a:rPr lang="en-US" smtClean="0"/>
+              <a:t>‹#›</a:t>
             </a:fld>
             <a:endParaRPr lang="en-US"/>
           </a:p>
         </p:txBody>
       </p:sp>
     </p:spTree>
+    <p:extLst>
+      <p:ext uri="{BB962C8B-B14F-4D97-AF65-F5344CB8AC3E}">
+        <p14:creationId xmlns:p14="http://schemas.microsoft.com/office/powerpoint/2010/main" val="990158736"/>
+      </p:ext>
+    </p:extLst>
   </p:cSld>
   <p:clrMapOvr>
     <a:masterClrMapping/>
@@ -1891,6 +1894,7 @@
           <a:p>
             <a:fld id="{5BCAD085-E8A6-8845-BD4E-CB4CCA059FC4}" type="datetimeFigureOut">
               <a:rPr lang="en-US" smtClean="0"/>
+              <a:t>1/27/13</a:t>
             </a:fld>
             <a:endParaRPr lang="en-US"/>
           </a:p>
@@ -1932,12 +1936,18 @@
           <a:p>
             <a:fld id="{C1FF6DA9-008F-8B48-92A6-B652298478BF}" type="slidenum">
               <a:rPr lang="en-US" smtClean="0"/>
+              <a:t>‹#›</a:t>
             </a:fld>
             <a:endParaRPr lang="en-US"/>
           </a:p>
         </p:txBody>
       </p:sp>
     </p:spTree>
+    <p:extLst>
+      <p:ext uri="{BB962C8B-B14F-4D97-AF65-F5344CB8AC3E}">
+        <p14:creationId xmlns:p14="http://schemas.microsoft.com/office/powerpoint/2010/main" val="727027711"/>
+      </p:ext>
+    </p:extLst>
   </p:cSld>
   <p:clrMapOvr>
     <a:masterClrMapping/>
@@ -1979,6 +1989,7 @@
           <a:p>
             <a:fld id="{5BCAD085-E8A6-8845-BD4E-CB4CCA059FC4}" type="datetimeFigureOut">
               <a:rPr lang="en-US" smtClean="0"/>
+              <a:t>1/27/13</a:t>
             </a:fld>
             <a:endParaRPr lang="en-US"/>
           </a:p>
@@ -2020,12 +2031,18 @@
           <a:p>
             <a:fld id="{C1FF6DA9-008F-8B48-92A6-B652298478BF}" type="slidenum">
               <a:rPr lang="en-US" smtClean="0"/>
+              <a:t>‹#›</a:t>
             </a:fld>
             <a:endParaRPr lang="en-US"/>
           </a:p>
         </p:txBody>
       </p:sp>
     </p:spTree>
+    <p:extLst>
+      <p:ext uri="{BB962C8B-B14F-4D97-AF65-F5344CB8AC3E}">
+        <p14:creationId xmlns:p14="http://schemas.microsoft.com/office/powerpoint/2010/main" val="1212999818"/>
+      </p:ext>
+    </p:extLst>
   </p:cSld>
   <p:clrMapOvr>
     <a:masterClrMapping/>
@@ -2135,7 +2152,6 @@
               <a:rPr lang="en-US" smtClean="0"/>
               <a:t>Click to edit Master text styles</a:t>
             </a:r>
-            <a:endParaRPr lang="en-US" smtClean="0"/>
           </a:p>
           <a:p>
             <a:pPr lvl="1"/>
@@ -2143,7 +2159,6 @@
               <a:rPr lang="en-US" smtClean="0"/>
               <a:t>Second level</a:t>
             </a:r>
-            <a:endParaRPr lang="en-US" smtClean="0"/>
           </a:p>
           <a:p>
             <a:pPr lvl="2"/>
@@ -2151,7 +2166,6 @@
               <a:rPr lang="en-US" smtClean="0"/>
               <a:t>Third level</a:t>
             </a:r>
-            <a:endParaRPr lang="en-US" smtClean="0"/>
           </a:p>
           <a:p>
             <a:pPr lvl="3"/>
@@ -2159,7 +2173,6 @@
               <a:rPr lang="en-US" smtClean="0"/>
               <a:t>Fourth level</a:t>
             </a:r>
-            <a:endParaRPr lang="en-US" smtClean="0"/>
           </a:p>
           <a:p>
             <a:pPr lvl="4"/>
@@ -2233,7 +2246,6 @@
               <a:rPr lang="en-US" smtClean="0"/>
               <a:t>Click to edit Master text styles</a:t>
             </a:r>
-            <a:endParaRPr lang="en-US" smtClean="0"/>
           </a:p>
         </p:txBody>
       </p:sp>
@@ -2254,6 +2266,7 @@
           <a:p>
             <a:fld id="{5BCAD085-E8A6-8845-BD4E-CB4CCA059FC4}" type="datetimeFigureOut">
               <a:rPr lang="en-US" smtClean="0"/>
+              <a:t>1/27/13</a:t>
             </a:fld>
             <a:endParaRPr lang="en-US"/>
           </a:p>
@@ -2295,12 +2308,18 @@
           <a:p>
             <a:fld id="{C1FF6DA9-008F-8B48-92A6-B652298478BF}" type="slidenum">
               <a:rPr lang="en-US" smtClean="0"/>
+              <a:t>‹#›</a:t>
             </a:fld>
             <a:endParaRPr lang="en-US"/>
           </a:p>
         </p:txBody>
       </p:sp>
     </p:spTree>
+    <p:extLst>
+      <p:ext uri="{BB962C8B-B14F-4D97-AF65-F5344CB8AC3E}">
+        <p14:creationId xmlns:p14="http://schemas.microsoft.com/office/powerpoint/2010/main" val="1840726560"/>
+      </p:ext>
+    </p:extLst>
   </p:cSld>
   <p:clrMapOvr>
     <a:masterClrMapping/>
@@ -2480,7 +2499,6 @@
               <a:rPr lang="en-US" smtClean="0"/>
               <a:t>Click to edit Master text styles</a:t>
             </a:r>
-            <a:endParaRPr lang="en-US" smtClean="0"/>
           </a:p>
         </p:txBody>
       </p:sp>
@@ -2501,6 +2519,7 @@
           <a:p>
             <a:fld id="{5BCAD085-E8A6-8845-BD4E-CB4CCA059FC4}" type="datetimeFigureOut">
               <a:rPr lang="en-US" smtClean="0"/>
+              <a:t>1/27/13</a:t>
             </a:fld>
             <a:endParaRPr lang="en-US"/>
           </a:p>
@@ -2542,12 +2561,18 @@
           <a:p>
             <a:fld id="{C1FF6DA9-008F-8B48-92A6-B652298478BF}" type="slidenum">
               <a:rPr lang="en-US" smtClean="0"/>
+              <a:t>‹#›</a:t>
             </a:fld>
             <a:endParaRPr lang="en-US"/>
           </a:p>
         </p:txBody>
       </p:sp>
     </p:spTree>
+    <p:extLst>
+      <p:ext uri="{BB962C8B-B14F-4D97-AF65-F5344CB8AC3E}">
+        <p14:creationId xmlns:p14="http://schemas.microsoft.com/office/powerpoint/2010/main" val="3889236939"/>
+      </p:ext>
+    </p:extLst>
   </p:cSld>
   <p:clrMapOvr>
     <a:masterClrMapping/>
@@ -2640,7 +2665,6 @@
               <a:rPr lang="en-US" smtClean="0"/>
               <a:t>Click to edit Master text styles</a:t>
             </a:r>
-            <a:endParaRPr lang="en-US" smtClean="0"/>
           </a:p>
           <a:p>
             <a:pPr lvl="1"/>
@@ -2648,7 +2672,6 @@
               <a:rPr lang="en-US" smtClean="0"/>
               <a:t>Second level</a:t>
             </a:r>
-            <a:endParaRPr lang="en-US" smtClean="0"/>
           </a:p>
           <a:p>
             <a:pPr lvl="2"/>
@@ -2656,7 +2679,6 @@
               <a:rPr lang="en-US" smtClean="0"/>
               <a:t>Third level</a:t>
             </a:r>
-            <a:endParaRPr lang="en-US" smtClean="0"/>
           </a:p>
           <a:p>
             <a:pPr lvl="3"/>
@@ -2664,7 +2686,6 @@
               <a:rPr lang="en-US" smtClean="0"/>
               <a:t>Fourth level</a:t>
             </a:r>
-            <a:endParaRPr lang="en-US" smtClean="0"/>
           </a:p>
           <a:p>
             <a:pPr lvl="4"/>
@@ -2711,6 +2732,7 @@
           <a:p>
             <a:fld id="{5BCAD085-E8A6-8845-BD4E-CB4CCA059FC4}" type="datetimeFigureOut">
               <a:rPr lang="en-US" smtClean="0"/>
+              <a:t>1/27/13</a:t>
             </a:fld>
             <a:endParaRPr lang="en-US"/>
           </a:p>
@@ -2788,12 +2810,18 @@
           <a:p>
             <a:fld id="{C1FF6DA9-008F-8B48-92A6-B652298478BF}" type="slidenum">
               <a:rPr lang="en-US" smtClean="0"/>
+              <a:t>‹#›</a:t>
             </a:fld>
             <a:endParaRPr lang="en-US"/>
           </a:p>
         </p:txBody>
       </p:sp>
     </p:spTree>
+    <p:extLst>
+      <p:ext uri="{BB962C8B-B14F-4D97-AF65-F5344CB8AC3E}">
+        <p14:creationId xmlns:p14="http://schemas.microsoft.com/office/powerpoint/2010/main" val="2209977519"/>
+      </p:ext>
+    </p:extLst>
   </p:cSld>
   <p:clrMap bg1="lt1" tx1="dk1" bg2="lt2" tx2="dk2" accent1="accent1" accent2="accent2" accent3="accent3" accent4="accent4" accent5="accent5" accent6="accent6" hlink="hlink" folHlink="folHlink"/>
   <p:sldLayoutIdLst>
@@ -2831,7 +2859,7 @@
         <a:spcBef>
           <a:spcPct val="20000"/>
         </a:spcBef>
-        <a:buFont typeface="Arial" panose="020B0604020202020204"/>
+        <a:buFont typeface="Arial"/>
         <a:buChar char="•"/>
         <a:defRPr sz="3200" kern="1200">
           <a:solidFill>
@@ -2846,7 +2874,7 @@
         <a:spcBef>
           <a:spcPct val="20000"/>
         </a:spcBef>
-        <a:buFont typeface="Arial" panose="020B0604020202020204"/>
+        <a:buFont typeface="Arial"/>
         <a:buChar char="–"/>
         <a:defRPr sz="2800" kern="1200">
           <a:solidFill>
@@ -2861,7 +2889,7 @@
         <a:spcBef>
           <a:spcPct val="20000"/>
         </a:spcBef>
-        <a:buFont typeface="Arial" panose="020B0604020202020204"/>
+        <a:buFont typeface="Arial"/>
         <a:buChar char="•"/>
         <a:defRPr sz="2400" kern="1200">
           <a:solidFill>
@@ -2876,7 +2904,7 @@
         <a:spcBef>
           <a:spcPct val="20000"/>
         </a:spcBef>
-        <a:buFont typeface="Arial" panose="020B0604020202020204"/>
+        <a:buFont typeface="Arial"/>
         <a:buChar char="–"/>
         <a:defRPr sz="2000" kern="1200">
           <a:solidFill>
@@ -2891,7 +2919,7 @@
         <a:spcBef>
           <a:spcPct val="20000"/>
         </a:spcBef>
-        <a:buFont typeface="Arial" panose="020B0604020202020204"/>
+        <a:buFont typeface="Arial"/>
         <a:buChar char="»"/>
         <a:defRPr sz="2000" kern="1200">
           <a:solidFill>
@@ -2906,7 +2934,7 @@
         <a:spcBef>
           <a:spcPct val="20000"/>
         </a:spcBef>
-        <a:buFont typeface="Arial" panose="020B0604020202020204"/>
+        <a:buFont typeface="Arial"/>
         <a:buChar char="•"/>
         <a:defRPr sz="2000" kern="1200">
           <a:solidFill>
@@ -2921,7 +2949,7 @@
         <a:spcBef>
           <a:spcPct val="20000"/>
         </a:spcBef>
-        <a:buFont typeface="Arial" panose="020B0604020202020204"/>
+        <a:buFont typeface="Arial"/>
         <a:buChar char="•"/>
         <a:defRPr sz="2000" kern="1200">
           <a:solidFill>
@@ -2936,7 +2964,7 @@
         <a:spcBef>
           <a:spcPct val="20000"/>
         </a:spcBef>
-        <a:buFont typeface="Arial" panose="020B0604020202020204"/>
+        <a:buFont typeface="Arial"/>
         <a:buChar char="•"/>
         <a:defRPr sz="2000" kern="1200">
           <a:solidFill>
@@ -2951,7 +2979,7 @@
         <a:spcBef>
           <a:spcPct val="20000"/>
         </a:spcBef>
-        <a:buFont typeface="Arial" panose="020B0604020202020204"/>
+        <a:buFont typeface="Arial"/>
         <a:buChar char="•"/>
         <a:defRPr sz="2000" kern="1200">
           <a:solidFill>
@@ -3063,7 +3091,7 @@
 </file>
 
 <file path=ppt/slides/slide1.xml><?xml version="1.0" encoding="utf-8"?>
-<p:sld xmlns:a="http://schemas.openxmlformats.org/drawingml/2006/main" xmlns:r="http://schemas.openxmlformats.org/officeDocument/2006/relationships" xmlns:p="http://schemas.openxmlformats.org/presentationml/2006/main">
+<p:sld xmlns:a="http://schemas.openxmlformats.org/drawingml/2006/main" xmlns:p="http://schemas.openxmlformats.org/presentationml/2006/main" xmlns:r="http://schemas.openxmlformats.org/officeDocument/2006/relationships">
   <p:cSld>
     <p:spTree>
       <p:nvGrpSpPr>
@@ -3171,15 +3199,15 @@
         <p:spPr>
           <a:xfrm>
             <a:off x="822960" y="1874519"/>
-            <a:ext cx="10515600" cy="1050925"/>
-          </a:xfrm>
-          <a:prstGeom prst="rect">
-            <a:avLst/>
-          </a:prstGeom>
-          <a:noFill/>
-        </p:spPr>
-        <p:txBody>
-          <a:bodyPr wrap="square" lIns="36576" tIns="18288" rIns="36576" bIns="18288" anchor="t">
+            <a:ext cx="10515600" cy="1188720"/>
+          </a:xfrm>
+          <a:prstGeom prst="rect">
+            <a:avLst/>
+          </a:prstGeom>
+          <a:noFill/>
+        </p:spPr>
+        <p:txBody>
+          <a:bodyPr wrap="square" anchor="t" lIns="36576" rIns="36576" tIns="18288" bIns="18288">
             <a:spAutoFit/>
           </a:bodyPr>
           <a:lstStyle/>
@@ -3190,34 +3218,10 @@
                 <a:solidFill>
                   <a:srgbClr val="FFFFFF"/>
                 </a:solidFill>
-                <a:latin typeface="微软雅黑" panose="020B0503020204020204" charset="-122"/>
+                <a:latin typeface="Microsoft YaHei"/>
               </a:rPr>
               <a:t>MonadLens</a:t>
             </a:r>
-            <a:r>
-              <a:rPr lang="en-US" sz="6600" b="1">
-                <a:solidFill>
-                  <a:srgbClr val="FFFFFF"/>
-                </a:solidFill>
-                <a:latin typeface="微软雅黑" panose="020B0503020204020204" charset="-122"/>
-              </a:rPr>
-              <a:t> </a:t>
-            </a:r>
-            <a:r>
-              <a:rPr lang="zh-CN" altLang="en-US" sz="6600" b="1">
-                <a:solidFill>
-                  <a:srgbClr val="FFFFFF"/>
-                </a:solidFill>
-                <a:latin typeface="微软雅黑" panose="020B0503020204020204" charset="-122"/>
-              </a:rPr>
-              <a:t>· 透视链</a:t>
-            </a:r>
-            <a:endParaRPr lang="zh-CN" altLang="en-US" sz="6600" b="1">
-              <a:solidFill>
-                <a:srgbClr val="FFFFFF"/>
-              </a:solidFill>
-              <a:latin typeface="微软雅黑" panose="020B0503020204020204" charset="-122"/>
-            </a:endParaRPr>
           </a:p>
         </p:txBody>
       </p:sp>
@@ -3238,7 +3242,7 @@
           <a:noFill/>
         </p:spPr>
         <p:txBody>
-          <a:bodyPr wrap="square" lIns="36576" tIns="18288" rIns="36576" bIns="18288" anchor="t">
+          <a:bodyPr wrap="square" anchor="t" lIns="36576" rIns="36576" tIns="18288" bIns="18288">
             <a:spAutoFit/>
           </a:bodyPr>
           <a:lstStyle/>
@@ -3249,16 +3253,10 @@
                 <a:solidFill>
                   <a:srgbClr val="8B5CF6"/>
                 </a:solidFill>
-                <a:latin typeface="微软雅黑" panose="020B0503020204020204" charset="-122"/>
+                <a:latin typeface="Microsoft YaHei"/>
               </a:rPr>
               <a:t>透视链 · 看清网络，看清后果</a:t>
             </a:r>
-            <a:endParaRPr sz="3000" b="1">
-              <a:solidFill>
-                <a:srgbClr val="8B5CF6"/>
-              </a:solidFill>
-              <a:latin typeface="微软雅黑" panose="020B0503020204020204" charset="-122"/>
-            </a:endParaRPr>
           </a:p>
         </p:txBody>
       </p:sp>
@@ -3279,7 +3277,7 @@
           <a:noFill/>
         </p:spPr>
         <p:txBody>
-          <a:bodyPr wrap="square" lIns="36576" tIns="18288" rIns="36576" bIns="18288" anchor="t">
+          <a:bodyPr wrap="square" anchor="t" lIns="36576" rIns="36576" tIns="18288" bIns="18288">
             <a:spAutoFit/>
           </a:bodyPr>
           <a:lstStyle/>
@@ -3290,16 +3288,10 @@
                 <a:solidFill>
                   <a:srgbClr val="9CA3B8"/>
                 </a:solidFill>
-                <a:latin typeface="微软雅黑" panose="020B0503020204020204" charset="-122"/>
+                <a:latin typeface="Microsoft YaHei"/>
               </a:rPr>
               <a:t>在签名之前，先看清一笔交易到底会做什么</a:t>
             </a:r>
-            <a:endParaRPr sz="1800" b="0">
-              <a:solidFill>
-                <a:srgbClr val="9CA3B8"/>
-              </a:solidFill>
-              <a:latin typeface="微软雅黑" panose="020B0503020204020204" charset="-122"/>
-            </a:endParaRPr>
           </a:p>
         </p:txBody>
       </p:sp>
@@ -3366,7 +3358,7 @@
           <a:noFill/>
         </p:spPr>
         <p:txBody>
-          <a:bodyPr wrap="square" lIns="36576" tIns="18288" rIns="36576" bIns="18288" anchor="ctr">
+          <a:bodyPr wrap="square" anchor="ctr" lIns="36576" rIns="36576" tIns="18288" bIns="18288">
             <a:spAutoFit/>
           </a:bodyPr>
           <a:lstStyle/>
@@ -3377,16 +3369,10 @@
                 <a:solidFill>
                   <a:srgbClr val="E9E9F2"/>
                 </a:solidFill>
-                <a:latin typeface="微软雅黑" panose="020B0503020204020204" charset="-122"/>
-              </a:rPr>
-              <a:t>LXDAO × Monad 黑客松  ·  2026</a:t>
-            </a:r>
-            <a:endParaRPr sz="1500" b="0">
-              <a:solidFill>
-                <a:srgbClr val="E9E9F2"/>
-              </a:solidFill>
-              <a:latin typeface="微软雅黑" panose="020B0503020204020204" charset="-122"/>
-            </a:endParaRPr>
+                <a:latin typeface="Microsoft YaHei"/>
+              </a:rPr>
+              <a:t>Monad Metropolis 黑客松 · Track 04 · 2026</a:t>
+            </a:r>
           </a:p>
         </p:txBody>
       </p:sp>
@@ -3399,7 +3385,7 @@
 </file>
 
 <file path=ppt/slides/slide10.xml><?xml version="1.0" encoding="utf-8"?>
-<p:sld xmlns:a="http://schemas.openxmlformats.org/drawingml/2006/main" xmlns:r="http://schemas.openxmlformats.org/officeDocument/2006/relationships" xmlns:p="http://schemas.openxmlformats.org/presentationml/2006/main">
+<p:sld xmlns:a="http://schemas.openxmlformats.org/drawingml/2006/main" xmlns:p="http://schemas.openxmlformats.org/presentationml/2006/main" xmlns:r="http://schemas.openxmlformats.org/officeDocument/2006/relationships">
   <p:cSld>
     <p:spTree>
       <p:nvGrpSpPr>
@@ -3469,7 +3455,7 @@
           <a:noFill/>
         </p:spPr>
         <p:txBody>
-          <a:bodyPr wrap="square" lIns="36576" tIns="18288" rIns="36576" bIns="18288" anchor="t">
+          <a:bodyPr wrap="square" anchor="t" lIns="36576" rIns="36576" tIns="18288" bIns="18288">
             <a:spAutoFit/>
           </a:bodyPr>
           <a:lstStyle/>
@@ -3480,16 +3466,10 @@
                 <a:solidFill>
                   <a:srgbClr val="8B5CF6"/>
                 </a:solidFill>
-                <a:latin typeface="微软雅黑" panose="020B0503020204020204" charset="-122"/>
-              </a:rPr>
-              <a:t>技术栈</a:t>
-            </a:r>
-            <a:endParaRPr sz="1300" b="1">
-              <a:solidFill>
-                <a:srgbClr val="8B5CF6"/>
-              </a:solidFill>
-              <a:latin typeface="微软雅黑" panose="020B0503020204020204" charset="-122"/>
-            </a:endParaRPr>
+                <a:latin typeface="Microsoft YaHei"/>
+              </a:rPr>
+              <a:t>端到端演示</a:t>
+            </a:r>
           </a:p>
         </p:txBody>
       </p:sp>
@@ -3510,7 +3490,7 @@
           <a:noFill/>
         </p:spPr>
         <p:txBody>
-          <a:bodyPr wrap="square" lIns="36576" tIns="18288" rIns="36576" bIns="18288" anchor="t">
+          <a:bodyPr wrap="square" anchor="t" lIns="36576" rIns="36576" tIns="18288" bIns="18288">
             <a:spAutoFit/>
           </a:bodyPr>
           <a:lstStyle/>
@@ -3521,16 +3501,10 @@
                 <a:solidFill>
                   <a:srgbClr val="FFFFFF"/>
                 </a:solidFill>
-                <a:latin typeface="微软雅黑" panose="020B0503020204020204" charset="-122"/>
-              </a:rPr>
-              <a:t>现代、稳健、可演示</a:t>
-            </a:r>
-            <a:endParaRPr sz="3000" b="1">
-              <a:solidFill>
-                <a:srgbClr val="FFFFFF"/>
-              </a:solidFill>
-              <a:latin typeface="微软雅黑" panose="020B0503020204020204" charset="-122"/>
-            </a:endParaRPr>
+                <a:latin typeface="Microsoft YaHei"/>
+              </a:rPr>
+              <a:t>一条完整的可信交易闭环</a:t>
+            </a:r>
           </a:p>
         </p:txBody>
       </p:sp>
@@ -3542,8 +3516,8 @@
         </p:nvSpPr>
         <p:spPr>
           <a:xfrm>
-            <a:off x="548640" y="1828800"/>
-            <a:ext cx="3520440" cy="3291840"/>
+            <a:off x="548640" y="2011680"/>
+            <a:ext cx="1755648" cy="1280160"/>
           </a:xfrm>
           <a:prstGeom prst="roundRect">
             <a:avLst>
@@ -3582,16 +3556,55 @@
       </p:sp>
       <p:sp>
         <p:nvSpPr>
-          <p:cNvPr id="6" name="Rectangle 5"/>
+          <p:cNvPr id="6" name="TextBox 5"/>
+          <p:cNvSpPr txBox="1"/>
+          <p:nvPr/>
+        </p:nvSpPr>
+        <p:spPr>
+          <a:xfrm>
+            <a:off x="548640" y="2103120"/>
+            <a:ext cx="1755648" cy="1097280"/>
+          </a:xfrm>
+          <a:prstGeom prst="rect">
+            <a:avLst/>
+          </a:prstGeom>
+          <a:noFill/>
+        </p:spPr>
+        <p:txBody>
+          <a:bodyPr wrap="square" anchor="ctr" lIns="36576" rIns="36576" tIns="18288" bIns="18288">
+            <a:spAutoFit/>
+          </a:bodyPr>
+          <a:lstStyle/>
+          <a:p>
+            <a:pPr algn="ctr">
+              <a:lnSpc>
+                <a:spcPct val="115000"/>
+              </a:lnSpc>
+            </a:pPr>
+            <a:r>
+              <a:rPr sz="1500" b="1">
+                <a:solidFill>
+                  <a:srgbClr val="FFFFFF"/>
+                </a:solidFill>
+                <a:latin typeface="Microsoft YaHei"/>
+              </a:rPr>
+              <a:t>① 连钱包</a:t>
+            </a:r>
+          </a:p>
+        </p:txBody>
+      </p:sp>
+      <p:sp>
+        <p:nvSpPr>
+          <p:cNvPr id="7" name="Chevron 6"/>
           <p:cNvSpPr/>
           <p:nvPr/>
         </p:nvSpPr>
         <p:spPr>
           <a:xfrm>
-            <a:off x="548640" y="1828800"/>
-            <a:ext cx="82296" cy="3291840"/>
-          </a:xfrm>
-          <a:prstGeom prst="rect">
+            <a:off x="2286000" y="2423160"/>
+            <a:ext cx="146304" cy="457200"/>
+          </a:xfrm>
+          <a:prstGeom prst="chevron">
             <a:avLst/>
           </a:prstGeom>
           <a:solidFill>
@@ -3600,7 +3613,6 @@
           <a:ln>
             <a:noFill/>
           </a:ln>
-          <a:effectLst/>
         </p:spPr>
         <p:style>
           <a:lnRef idx="1">
@@ -3626,166 +3638,14 @@
       </p:sp>
       <p:sp>
         <p:nvSpPr>
-          <p:cNvPr id="7" name="TextBox 6"/>
-          <p:cNvSpPr txBox="1"/>
-          <p:nvPr/>
-        </p:nvSpPr>
-        <p:spPr>
-          <a:xfrm>
-            <a:off x="786384" y="1956816"/>
-            <a:ext cx="3136392" cy="457200"/>
-          </a:xfrm>
-          <a:prstGeom prst="rect">
-            <a:avLst/>
-          </a:prstGeom>
-          <a:noFill/>
-        </p:spPr>
-        <p:txBody>
-          <a:bodyPr wrap="square" lIns="36576" tIns="18288" rIns="36576" bIns="18288" anchor="t">
-            <a:spAutoFit/>
-          </a:bodyPr>
-          <a:lstStyle/>
-          <a:p>
-            <a:pPr algn="l"/>
-            <a:r>
-              <a:rPr sz="1900" b="1">
-                <a:solidFill>
-                  <a:srgbClr val="FFFFFF"/>
-                </a:solidFill>
-                <a:latin typeface="微软雅黑" panose="020B0503020204020204" charset="-122"/>
-              </a:rPr>
-              <a:t>前端 / 框架</a:t>
-            </a:r>
-            <a:endParaRPr sz="1900" b="1">
-              <a:solidFill>
-                <a:srgbClr val="FFFFFF"/>
-              </a:solidFill>
-              <a:latin typeface="微软雅黑" panose="020B0503020204020204" charset="-122"/>
-            </a:endParaRPr>
-          </a:p>
-        </p:txBody>
-      </p:sp>
-      <p:sp>
-        <p:nvSpPr>
-          <p:cNvPr id="8" name="TextBox 7"/>
-          <p:cNvSpPr txBox="1"/>
-          <p:nvPr/>
-        </p:nvSpPr>
-        <p:spPr>
-          <a:xfrm>
-            <a:off x="786384" y="2487168"/>
-            <a:ext cx="3063240" cy="2468880"/>
-          </a:xfrm>
-          <a:prstGeom prst="rect">
-            <a:avLst/>
-          </a:prstGeom>
-          <a:noFill/>
-        </p:spPr>
-        <p:txBody>
-          <a:bodyPr wrap="square" lIns="36576" tIns="18288" rIns="36576" bIns="18288" anchor="t">
-            <a:spAutoFit/>
-          </a:bodyPr>
-          <a:lstStyle/>
-          <a:p>
-            <a:pPr algn="l">
-              <a:spcAft>
-                <a:spcPts val="1200"/>
-              </a:spcAft>
-            </a:pPr>
-            <a:r>
-              <a:rPr sz="1700" b="0">
-                <a:solidFill>
-                  <a:srgbClr val="E9E9F2"/>
-                </a:solidFill>
-                <a:latin typeface="微软雅黑" panose="020B0503020204020204" charset="-122"/>
-              </a:rPr>
-              <a:t>•  Next.js 16</a:t>
-            </a:r>
-            <a:endParaRPr sz="1700" b="0">
-              <a:solidFill>
-                <a:srgbClr val="E9E9F2"/>
-              </a:solidFill>
-              <a:latin typeface="微软雅黑" panose="020B0503020204020204" charset="-122"/>
-            </a:endParaRPr>
-          </a:p>
-          <a:p>
-            <a:pPr algn="l">
-              <a:spcAft>
-                <a:spcPts val="1200"/>
-              </a:spcAft>
-            </a:pPr>
-            <a:r>
-              <a:rPr sz="1700" b="0">
-                <a:solidFill>
-                  <a:srgbClr val="E9E9F2"/>
-                </a:solidFill>
-                <a:latin typeface="微软雅黑" panose="020B0503020204020204" charset="-122"/>
-              </a:rPr>
-              <a:t>•  React 19</a:t>
-            </a:r>
-            <a:endParaRPr sz="1700" b="0">
-              <a:solidFill>
-                <a:srgbClr val="E9E9F2"/>
-              </a:solidFill>
-              <a:latin typeface="微软雅黑" panose="020B0503020204020204" charset="-122"/>
-            </a:endParaRPr>
-          </a:p>
-          <a:p>
-            <a:pPr algn="l">
-              <a:spcAft>
-                <a:spcPts val="1200"/>
-              </a:spcAft>
-            </a:pPr>
-            <a:r>
-              <a:rPr sz="1700" b="0">
-                <a:solidFill>
-                  <a:srgbClr val="E9E9F2"/>
-                </a:solidFill>
-                <a:latin typeface="微软雅黑" panose="020B0503020204020204" charset="-122"/>
-              </a:rPr>
-              <a:t>•  Tailwind v4</a:t>
-            </a:r>
-            <a:endParaRPr sz="1700" b="0">
-              <a:solidFill>
-                <a:srgbClr val="E9E9F2"/>
-              </a:solidFill>
-              <a:latin typeface="微软雅黑" panose="020B0503020204020204" charset="-122"/>
-            </a:endParaRPr>
-          </a:p>
-          <a:p>
-            <a:pPr algn="l">
-              <a:spcAft>
-                <a:spcPts val="1200"/>
-              </a:spcAft>
-            </a:pPr>
-            <a:r>
-              <a:rPr sz="1700" b="0">
-                <a:solidFill>
-                  <a:srgbClr val="E9E9F2"/>
-                </a:solidFill>
-                <a:latin typeface="微软雅黑" panose="020B0503020204020204" charset="-122"/>
-              </a:rPr>
-              <a:t>•  TypeScript</a:t>
-            </a:r>
-            <a:endParaRPr sz="1700" b="0">
-              <a:solidFill>
-                <a:srgbClr val="E9E9F2"/>
-              </a:solidFill>
-              <a:latin typeface="微软雅黑" panose="020B0503020204020204" charset="-122"/>
-            </a:endParaRPr>
-          </a:p>
-        </p:txBody>
-      </p:sp>
-      <p:sp>
-        <p:nvSpPr>
-          <p:cNvPr id="9" name="Rounded Rectangle 8"/>
+          <p:cNvPr id="8" name="Rounded Rectangle 7"/>
           <p:cNvSpPr/>
           <p:nvPr/>
         </p:nvSpPr>
         <p:spPr>
           <a:xfrm>
-            <a:off x="4315968" y="1828800"/>
-            <a:ext cx="3520440" cy="3291840"/>
+            <a:off x="2414016" y="2011680"/>
+            <a:ext cx="1755648" cy="1280160"/>
           </a:xfrm>
           <a:prstGeom prst="roundRect">
             <a:avLst>
@@ -3824,14 +3684,613 @@
       </p:sp>
       <p:sp>
         <p:nvSpPr>
-          <p:cNvPr id="10" name="Rectangle 9"/>
+          <p:cNvPr id="9" name="TextBox 8"/>
+          <p:cNvSpPr txBox="1"/>
+          <p:nvPr/>
+        </p:nvSpPr>
+        <p:spPr>
+          <a:xfrm>
+            <a:off x="2414016" y="2103120"/>
+            <a:ext cx="1755648" cy="1097280"/>
+          </a:xfrm>
+          <a:prstGeom prst="rect">
+            <a:avLst/>
+          </a:prstGeom>
+          <a:noFill/>
+        </p:spPr>
+        <p:txBody>
+          <a:bodyPr wrap="square" anchor="ctr" lIns="36576" rIns="36576" tIns="18288" bIns="18288">
+            <a:spAutoFit/>
+          </a:bodyPr>
+          <a:lstStyle/>
+          <a:p>
+            <a:pPr algn="ctr">
+              <a:lnSpc>
+                <a:spcPct val="115000"/>
+              </a:lnSpc>
+            </a:pPr>
+            <a:r>
+              <a:rPr sz="1500" b="1">
+                <a:solidFill>
+                  <a:srgbClr val="FFFFFF"/>
+                </a:solidFill>
+                <a:latin typeface="Microsoft YaHei"/>
+              </a:rPr>
+              <a:t>② Agent 对话</a:t>
+            </a:r>
+          </a:p>
+        </p:txBody>
+      </p:sp>
+      <p:sp>
+        <p:nvSpPr>
+          <p:cNvPr id="10" name="Chevron 9"/>
           <p:cNvSpPr/>
           <p:nvPr/>
         </p:nvSpPr>
         <p:spPr>
           <a:xfrm>
-            <a:off x="4315968" y="1828800"/>
-            <a:ext cx="82296" cy="3291840"/>
+            <a:off x="4151376" y="2423160"/>
+            <a:ext cx="146304" cy="457200"/>
+          </a:xfrm>
+          <a:prstGeom prst="chevron">
+            <a:avLst/>
+          </a:prstGeom>
+          <a:solidFill>
+            <a:srgbClr val="8B5CF6"/>
+          </a:solidFill>
+          <a:ln>
+            <a:noFill/>
+          </a:ln>
+        </p:spPr>
+        <p:style>
+          <a:lnRef idx="1">
+            <a:schemeClr val="accent1"/>
+          </a:lnRef>
+          <a:fillRef idx="3">
+            <a:schemeClr val="accent1"/>
+          </a:fillRef>
+          <a:effectRef idx="2">
+            <a:schemeClr val="accent1"/>
+          </a:effectRef>
+          <a:fontRef idx="minor">
+            <a:schemeClr val="lt1"/>
+          </a:fontRef>
+        </p:style>
+        <p:txBody>
+          <a:bodyPr rtlCol="0" anchor="ctr"/>
+          <a:lstStyle/>
+          <a:p>
+            <a:pPr algn="ctr"/>
+          </a:p>
+        </p:txBody>
+      </p:sp>
+      <p:sp>
+        <p:nvSpPr>
+          <p:cNvPr id="11" name="Rounded Rectangle 10"/>
+          <p:cNvSpPr/>
+          <p:nvPr/>
+        </p:nvSpPr>
+        <p:spPr>
+          <a:xfrm>
+            <a:off x="4279392" y="2011680"/>
+            <a:ext cx="1755648" cy="1280160"/>
+          </a:xfrm>
+          <a:prstGeom prst="roundRect">
+            <a:avLst>
+              <a:gd name="adj" fmla="val 10000"/>
+            </a:avLst>
+          </a:prstGeom>
+          <a:solidFill>
+            <a:srgbClr val="221E42"/>
+          </a:solidFill>
+          <a:ln>
+            <a:noFill/>
+          </a:ln>
+          <a:effectLst/>
+        </p:spPr>
+        <p:style>
+          <a:lnRef idx="1">
+            <a:schemeClr val="accent1"/>
+          </a:lnRef>
+          <a:fillRef idx="3">
+            <a:schemeClr val="accent1"/>
+          </a:fillRef>
+          <a:effectRef idx="2">
+            <a:schemeClr val="accent1"/>
+          </a:effectRef>
+          <a:fontRef idx="minor">
+            <a:schemeClr val="lt1"/>
+          </a:fontRef>
+        </p:style>
+        <p:txBody>
+          <a:bodyPr rtlCol="0" anchor="ctr"/>
+          <a:lstStyle/>
+          <a:p>
+            <a:pPr algn="ctr"/>
+          </a:p>
+        </p:txBody>
+      </p:sp>
+      <p:sp>
+        <p:nvSpPr>
+          <p:cNvPr id="12" name="TextBox 11"/>
+          <p:cNvSpPr txBox="1"/>
+          <p:nvPr/>
+        </p:nvSpPr>
+        <p:spPr>
+          <a:xfrm>
+            <a:off x="4279392" y="2103120"/>
+            <a:ext cx="1755648" cy="1097280"/>
+          </a:xfrm>
+          <a:prstGeom prst="rect">
+            <a:avLst/>
+          </a:prstGeom>
+          <a:noFill/>
+        </p:spPr>
+        <p:txBody>
+          <a:bodyPr wrap="square" anchor="ctr" lIns="36576" rIns="36576" tIns="18288" bIns="18288">
+            <a:spAutoFit/>
+          </a:bodyPr>
+          <a:lstStyle/>
+          <a:p>
+            <a:pPr algn="ctr">
+              <a:lnSpc>
+                <a:spcPct val="115000"/>
+              </a:lnSpc>
+            </a:pPr>
+            <a:r>
+              <a:rPr sz="1500" b="1">
+                <a:solidFill>
+                  <a:srgbClr val="FFFFFF"/>
+                </a:solidFill>
+                <a:latin typeface="Microsoft YaHei"/>
+              </a:rPr>
+              <a:t>③ Moss 模拟预览</a:t>
+            </a:r>
+          </a:p>
+        </p:txBody>
+      </p:sp>
+      <p:sp>
+        <p:nvSpPr>
+          <p:cNvPr id="13" name="Chevron 12"/>
+          <p:cNvSpPr/>
+          <p:nvPr/>
+        </p:nvSpPr>
+        <p:spPr>
+          <a:xfrm>
+            <a:off x="6016752" y="2423160"/>
+            <a:ext cx="146304" cy="457200"/>
+          </a:xfrm>
+          <a:prstGeom prst="chevron">
+            <a:avLst/>
+          </a:prstGeom>
+          <a:solidFill>
+            <a:srgbClr val="8B5CF6"/>
+          </a:solidFill>
+          <a:ln>
+            <a:noFill/>
+          </a:ln>
+        </p:spPr>
+        <p:style>
+          <a:lnRef idx="1">
+            <a:schemeClr val="accent1"/>
+          </a:lnRef>
+          <a:fillRef idx="3">
+            <a:schemeClr val="accent1"/>
+          </a:fillRef>
+          <a:effectRef idx="2">
+            <a:schemeClr val="accent1"/>
+          </a:effectRef>
+          <a:fontRef idx="minor">
+            <a:schemeClr val="lt1"/>
+          </a:fontRef>
+        </p:style>
+        <p:txBody>
+          <a:bodyPr rtlCol="0" anchor="ctr"/>
+          <a:lstStyle/>
+          <a:p>
+            <a:pPr algn="ctr"/>
+          </a:p>
+        </p:txBody>
+      </p:sp>
+      <p:sp>
+        <p:nvSpPr>
+          <p:cNvPr id="14" name="Rounded Rectangle 13"/>
+          <p:cNvSpPr/>
+          <p:nvPr/>
+        </p:nvSpPr>
+        <p:spPr>
+          <a:xfrm>
+            <a:off x="6144768" y="2011680"/>
+            <a:ext cx="1755648" cy="1280160"/>
+          </a:xfrm>
+          <a:prstGeom prst="roundRect">
+            <a:avLst>
+              <a:gd name="adj" fmla="val 10000"/>
+            </a:avLst>
+          </a:prstGeom>
+          <a:solidFill>
+            <a:srgbClr val="221E42"/>
+          </a:solidFill>
+          <a:ln>
+            <a:noFill/>
+          </a:ln>
+          <a:effectLst/>
+        </p:spPr>
+        <p:style>
+          <a:lnRef idx="1">
+            <a:schemeClr val="accent1"/>
+          </a:lnRef>
+          <a:fillRef idx="3">
+            <a:schemeClr val="accent1"/>
+          </a:fillRef>
+          <a:effectRef idx="2">
+            <a:schemeClr val="accent1"/>
+          </a:effectRef>
+          <a:fontRef idx="minor">
+            <a:schemeClr val="lt1"/>
+          </a:fontRef>
+        </p:style>
+        <p:txBody>
+          <a:bodyPr rtlCol="0" anchor="ctr"/>
+          <a:lstStyle/>
+          <a:p>
+            <a:pPr algn="ctr"/>
+          </a:p>
+        </p:txBody>
+      </p:sp>
+      <p:sp>
+        <p:nvSpPr>
+          <p:cNvPr id="15" name="TextBox 14"/>
+          <p:cNvSpPr txBox="1"/>
+          <p:nvPr/>
+        </p:nvSpPr>
+        <p:spPr>
+          <a:xfrm>
+            <a:off x="6144768" y="2103120"/>
+            <a:ext cx="1755648" cy="1097280"/>
+          </a:xfrm>
+          <a:prstGeom prst="rect">
+            <a:avLst/>
+          </a:prstGeom>
+          <a:noFill/>
+        </p:spPr>
+        <p:txBody>
+          <a:bodyPr wrap="square" anchor="ctr" lIns="36576" rIns="36576" tIns="18288" bIns="18288">
+            <a:spAutoFit/>
+          </a:bodyPr>
+          <a:lstStyle/>
+          <a:p>
+            <a:pPr algn="ctr">
+              <a:lnSpc>
+                <a:spcPct val="115000"/>
+              </a:lnSpc>
+            </a:pPr>
+            <a:r>
+              <a:rPr sz="1500" b="1">
+                <a:solidFill>
+                  <a:srgbClr val="FFFFFF"/>
+                </a:solidFill>
+                <a:latin typeface="Microsoft YaHei"/>
+              </a:rPr>
+              <a:t>④ 用户确认</a:t>
+            </a:r>
+          </a:p>
+        </p:txBody>
+      </p:sp>
+      <p:sp>
+        <p:nvSpPr>
+          <p:cNvPr id="16" name="Chevron 15"/>
+          <p:cNvSpPr/>
+          <p:nvPr/>
+        </p:nvSpPr>
+        <p:spPr>
+          <a:xfrm>
+            <a:off x="7882128" y="2423160"/>
+            <a:ext cx="146304" cy="457200"/>
+          </a:xfrm>
+          <a:prstGeom prst="chevron">
+            <a:avLst/>
+          </a:prstGeom>
+          <a:solidFill>
+            <a:srgbClr val="8B5CF6"/>
+          </a:solidFill>
+          <a:ln>
+            <a:noFill/>
+          </a:ln>
+        </p:spPr>
+        <p:style>
+          <a:lnRef idx="1">
+            <a:schemeClr val="accent1"/>
+          </a:lnRef>
+          <a:fillRef idx="3">
+            <a:schemeClr val="accent1"/>
+          </a:fillRef>
+          <a:effectRef idx="2">
+            <a:schemeClr val="accent1"/>
+          </a:effectRef>
+          <a:fontRef idx="minor">
+            <a:schemeClr val="lt1"/>
+          </a:fontRef>
+        </p:style>
+        <p:txBody>
+          <a:bodyPr rtlCol="0" anchor="ctr"/>
+          <a:lstStyle/>
+          <a:p>
+            <a:pPr algn="ctr"/>
+          </a:p>
+        </p:txBody>
+      </p:sp>
+      <p:sp>
+        <p:nvSpPr>
+          <p:cNvPr id="17" name="Rounded Rectangle 16"/>
+          <p:cNvSpPr/>
+          <p:nvPr/>
+        </p:nvSpPr>
+        <p:spPr>
+          <a:xfrm>
+            <a:off x="8010144" y="2011680"/>
+            <a:ext cx="1755648" cy="1280160"/>
+          </a:xfrm>
+          <a:prstGeom prst="roundRect">
+            <a:avLst>
+              <a:gd name="adj" fmla="val 10000"/>
+            </a:avLst>
+          </a:prstGeom>
+          <a:solidFill>
+            <a:srgbClr val="221E42"/>
+          </a:solidFill>
+          <a:ln>
+            <a:noFill/>
+          </a:ln>
+          <a:effectLst/>
+        </p:spPr>
+        <p:style>
+          <a:lnRef idx="1">
+            <a:schemeClr val="accent1"/>
+          </a:lnRef>
+          <a:fillRef idx="3">
+            <a:schemeClr val="accent1"/>
+          </a:fillRef>
+          <a:effectRef idx="2">
+            <a:schemeClr val="accent1"/>
+          </a:effectRef>
+          <a:fontRef idx="minor">
+            <a:schemeClr val="lt1"/>
+          </a:fontRef>
+        </p:style>
+        <p:txBody>
+          <a:bodyPr rtlCol="0" anchor="ctr"/>
+          <a:lstStyle/>
+          <a:p>
+            <a:pPr algn="ctr"/>
+          </a:p>
+        </p:txBody>
+      </p:sp>
+      <p:sp>
+        <p:nvSpPr>
+          <p:cNvPr id="18" name="TextBox 17"/>
+          <p:cNvSpPr txBox="1"/>
+          <p:nvPr/>
+        </p:nvSpPr>
+        <p:spPr>
+          <a:xfrm>
+            <a:off x="8010144" y="2103120"/>
+            <a:ext cx="1755648" cy="1097280"/>
+          </a:xfrm>
+          <a:prstGeom prst="rect">
+            <a:avLst/>
+          </a:prstGeom>
+          <a:noFill/>
+        </p:spPr>
+        <p:txBody>
+          <a:bodyPr wrap="square" anchor="ctr" lIns="36576" rIns="36576" tIns="18288" bIns="18288">
+            <a:spAutoFit/>
+          </a:bodyPr>
+          <a:lstStyle/>
+          <a:p>
+            <a:pPr algn="ctr">
+              <a:lnSpc>
+                <a:spcPct val="115000"/>
+              </a:lnSpc>
+            </a:pPr>
+            <a:r>
+              <a:rPr sz="1500" b="1">
+                <a:solidFill>
+                  <a:srgbClr val="FFFFFF"/>
+                </a:solidFill>
+                <a:latin typeface="Microsoft YaHei"/>
+              </a:rPr>
+              <a:t>⑤ 签名广播</a:t>
+            </a:r>
+          </a:p>
+        </p:txBody>
+      </p:sp>
+      <p:sp>
+        <p:nvSpPr>
+          <p:cNvPr id="19" name="Chevron 18"/>
+          <p:cNvSpPr/>
+          <p:nvPr/>
+        </p:nvSpPr>
+        <p:spPr>
+          <a:xfrm>
+            <a:off x="9747504" y="2423160"/>
+            <a:ext cx="146304" cy="457200"/>
+          </a:xfrm>
+          <a:prstGeom prst="chevron">
+            <a:avLst/>
+          </a:prstGeom>
+          <a:solidFill>
+            <a:srgbClr val="8B5CF6"/>
+          </a:solidFill>
+          <a:ln>
+            <a:noFill/>
+          </a:ln>
+        </p:spPr>
+        <p:style>
+          <a:lnRef idx="1">
+            <a:schemeClr val="accent1"/>
+          </a:lnRef>
+          <a:fillRef idx="3">
+            <a:schemeClr val="accent1"/>
+          </a:fillRef>
+          <a:effectRef idx="2">
+            <a:schemeClr val="accent1"/>
+          </a:effectRef>
+          <a:fontRef idx="minor">
+            <a:schemeClr val="lt1"/>
+          </a:fontRef>
+        </p:style>
+        <p:txBody>
+          <a:bodyPr rtlCol="0" anchor="ctr"/>
+          <a:lstStyle/>
+          <a:p>
+            <a:pPr algn="ctr"/>
+          </a:p>
+        </p:txBody>
+      </p:sp>
+      <p:sp>
+        <p:nvSpPr>
+          <p:cNvPr id="20" name="Rounded Rectangle 19"/>
+          <p:cNvSpPr/>
+          <p:nvPr/>
+        </p:nvSpPr>
+        <p:spPr>
+          <a:xfrm>
+            <a:off x="9875520" y="2011680"/>
+            <a:ext cx="1755648" cy="1280160"/>
+          </a:xfrm>
+          <a:prstGeom prst="roundRect">
+            <a:avLst>
+              <a:gd name="adj" fmla="val 10000"/>
+            </a:avLst>
+          </a:prstGeom>
+          <a:solidFill>
+            <a:srgbClr val="221E42"/>
+          </a:solidFill>
+          <a:ln>
+            <a:noFill/>
+          </a:ln>
+          <a:effectLst/>
+        </p:spPr>
+        <p:style>
+          <a:lnRef idx="1">
+            <a:schemeClr val="accent1"/>
+          </a:lnRef>
+          <a:fillRef idx="3">
+            <a:schemeClr val="accent1"/>
+          </a:fillRef>
+          <a:effectRef idx="2">
+            <a:schemeClr val="accent1"/>
+          </a:effectRef>
+          <a:fontRef idx="minor">
+            <a:schemeClr val="lt1"/>
+          </a:fontRef>
+        </p:style>
+        <p:txBody>
+          <a:bodyPr rtlCol="0" anchor="ctr"/>
+          <a:lstStyle/>
+          <a:p>
+            <a:pPr algn="ctr"/>
+          </a:p>
+        </p:txBody>
+      </p:sp>
+      <p:sp>
+        <p:nvSpPr>
+          <p:cNvPr id="21" name="TextBox 20"/>
+          <p:cNvSpPr txBox="1"/>
+          <p:nvPr/>
+        </p:nvSpPr>
+        <p:spPr>
+          <a:xfrm>
+            <a:off x="9875520" y="2103120"/>
+            <a:ext cx="1755648" cy="1097280"/>
+          </a:xfrm>
+          <a:prstGeom prst="rect">
+            <a:avLst/>
+          </a:prstGeom>
+          <a:noFill/>
+        </p:spPr>
+        <p:txBody>
+          <a:bodyPr wrap="square" anchor="ctr" lIns="36576" rIns="36576" tIns="18288" bIns="18288">
+            <a:spAutoFit/>
+          </a:bodyPr>
+          <a:lstStyle/>
+          <a:p>
+            <a:pPr algn="ctr">
+              <a:lnSpc>
+                <a:spcPct val="115000"/>
+              </a:lnSpc>
+            </a:pPr>
+            <a:r>
+              <a:rPr sz="1500" b="1">
+                <a:solidFill>
+                  <a:srgbClr val="FFFFFF"/>
+                </a:solidFill>
+                <a:latin typeface="Microsoft YaHei"/>
+              </a:rPr>
+              <a:t>⑥ 链上验证</a:t>
+            </a:r>
+          </a:p>
+        </p:txBody>
+      </p:sp>
+      <p:sp>
+        <p:nvSpPr>
+          <p:cNvPr id="22" name="Rounded Rectangle 21"/>
+          <p:cNvSpPr/>
+          <p:nvPr/>
+        </p:nvSpPr>
+        <p:spPr>
+          <a:xfrm>
+            <a:off x="548640" y="3749039"/>
+            <a:ext cx="11064240" cy="2011680"/>
+          </a:xfrm>
+          <a:prstGeom prst="roundRect">
+            <a:avLst>
+              <a:gd name="adj" fmla="val 10000"/>
+            </a:avLst>
+          </a:prstGeom>
+          <a:solidFill>
+            <a:srgbClr val="221E42"/>
+          </a:solidFill>
+          <a:ln w="15875">
+            <a:solidFill>
+              <a:srgbClr val="22D3EE"/>
+            </a:solidFill>
+          </a:ln>
+          <a:effectLst/>
+        </p:spPr>
+        <p:style>
+          <a:lnRef idx="1">
+            <a:schemeClr val="accent1"/>
+          </a:lnRef>
+          <a:fillRef idx="3">
+            <a:schemeClr val="accent1"/>
+          </a:fillRef>
+          <a:effectRef idx="2">
+            <a:schemeClr val="accent1"/>
+          </a:effectRef>
+          <a:fontRef idx="minor">
+            <a:schemeClr val="lt1"/>
+          </a:fontRef>
+        </p:style>
+        <p:txBody>
+          <a:bodyPr rtlCol="0" anchor="ctr"/>
+          <a:lstStyle/>
+          <a:p>
+            <a:pPr algn="ctr"/>
+          </a:p>
+        </p:txBody>
+      </p:sp>
+      <p:sp>
+        <p:nvSpPr>
+          <p:cNvPr id="23" name="Rectangle 22"/>
+          <p:cNvSpPr/>
+          <p:nvPr/>
+        </p:nvSpPr>
+        <p:spPr>
+          <a:xfrm>
+            <a:off x="548640" y="3749039"/>
+            <a:ext cx="82296" cy="2011680"/>
           </a:xfrm>
           <a:prstGeom prst="rect">
             <a:avLst/>
@@ -3868,401 +4327,81 @@
       </p:sp>
       <p:sp>
         <p:nvSpPr>
-          <p:cNvPr id="11" name="TextBox 10"/>
-          <p:cNvSpPr txBox="1"/>
-          <p:nvPr/>
-        </p:nvSpPr>
-        <p:spPr>
-          <a:xfrm>
-            <a:off x="4553712" y="1956816"/>
-            <a:ext cx="3136392" cy="457200"/>
-          </a:xfrm>
-          <a:prstGeom prst="rect">
-            <a:avLst/>
-          </a:prstGeom>
-          <a:noFill/>
-        </p:spPr>
-        <p:txBody>
-          <a:bodyPr wrap="square" lIns="36576" tIns="18288" rIns="36576" bIns="18288" anchor="t">
+          <p:cNvPr id="24" name="TextBox 23"/>
+          <p:cNvSpPr txBox="1"/>
+          <p:nvPr/>
+        </p:nvSpPr>
+        <p:spPr>
+          <a:xfrm>
+            <a:off x="822960" y="3931920"/>
+            <a:ext cx="10515600" cy="548640"/>
+          </a:xfrm>
+          <a:prstGeom prst="rect">
+            <a:avLst/>
+          </a:prstGeom>
+          <a:noFill/>
+        </p:spPr>
+        <p:txBody>
+          <a:bodyPr wrap="square" anchor="t" lIns="36576" rIns="36576" tIns="18288" bIns="18288">
             <a:spAutoFit/>
           </a:bodyPr>
           <a:lstStyle/>
           <a:p>
             <a:pPr algn="l"/>
             <a:r>
-              <a:rPr sz="1900" b="1">
-                <a:solidFill>
-                  <a:srgbClr val="FFFFFF"/>
-                </a:solidFill>
-                <a:latin typeface="微软雅黑" panose="020B0503020204020204" charset="-122"/>
-              </a:rPr>
-              <a:t>链上 / 钱包</a:t>
-            </a:r>
-            <a:endParaRPr sz="1900" b="1">
-              <a:solidFill>
-                <a:srgbClr val="FFFFFF"/>
-              </a:solidFill>
-              <a:latin typeface="微软雅黑" panose="020B0503020204020204" charset="-122"/>
-            </a:endParaRPr>
-          </a:p>
-        </p:txBody>
-      </p:sp>
-      <p:sp>
-        <p:nvSpPr>
-          <p:cNvPr id="12" name="TextBox 11"/>
-          <p:cNvSpPr txBox="1"/>
-          <p:nvPr/>
-        </p:nvSpPr>
-        <p:spPr>
-          <a:xfrm>
-            <a:off x="4553712" y="2487168"/>
-            <a:ext cx="3063240" cy="2468880"/>
-          </a:xfrm>
-          <a:prstGeom prst="rect">
-            <a:avLst/>
-          </a:prstGeom>
-          <a:noFill/>
-        </p:spPr>
-        <p:txBody>
-          <a:bodyPr wrap="square" lIns="36576" tIns="18288" rIns="36576" bIns="18288" anchor="t">
+              <a:rPr sz="1800" b="1">
+                <a:solidFill>
+                  <a:srgbClr val="22D3EE"/>
+                </a:solidFill>
+                <a:latin typeface="Microsoft YaHei"/>
+              </a:rPr>
+              <a:t>✅ 已实测：在 Monad 测试网真实签名并上链成功</a:t>
+            </a:r>
+          </a:p>
+        </p:txBody>
+      </p:sp>
+      <p:sp>
+        <p:nvSpPr>
+          <p:cNvPr id="25" name="TextBox 24"/>
+          <p:cNvSpPr txBox="1"/>
+          <p:nvPr/>
+        </p:nvSpPr>
+        <p:spPr>
+          <a:xfrm>
+            <a:off x="822960" y="4572000"/>
+            <a:ext cx="10515600" cy="1005840"/>
+          </a:xfrm>
+          <a:prstGeom prst="rect">
+            <a:avLst/>
+          </a:prstGeom>
+          <a:noFill/>
+        </p:spPr>
+        <p:txBody>
+          <a:bodyPr wrap="square" anchor="t" lIns="36576" rIns="36576" tIns="18288" bIns="18288">
             <a:spAutoFit/>
           </a:bodyPr>
           <a:lstStyle/>
           <a:p>
             <a:pPr algn="l">
-              <a:spcAft>
-                <a:spcPts val="1200"/>
-              </a:spcAft>
+              <a:lnSpc>
+                <a:spcPct val="130000"/>
+              </a:lnSpc>
             </a:pPr>
             <a:r>
-              <a:rPr sz="1700" b="0">
-                <a:solidFill>
-                  <a:srgbClr val="E9E9F2"/>
-                </a:solidFill>
-                <a:latin typeface="微软雅黑" panose="020B0503020204020204" charset="-122"/>
-              </a:rPr>
-              <a:t>•  wagmi v3</a:t>
-            </a:r>
-            <a:endParaRPr sz="1700" b="0">
-              <a:solidFill>
-                <a:srgbClr val="E9E9F2"/>
-              </a:solidFill>
-              <a:latin typeface="微软雅黑" panose="020B0503020204020204" charset="-122"/>
-            </a:endParaRPr>
-          </a:p>
-          <a:p>
-            <a:pPr algn="l">
-              <a:spcAft>
-                <a:spcPts val="1200"/>
-              </a:spcAft>
-            </a:pPr>
-            <a:r>
-              <a:rPr sz="1700" b="0">
-                <a:solidFill>
-                  <a:srgbClr val="E9E9F2"/>
-                </a:solidFill>
-                <a:latin typeface="微软雅黑" panose="020B0503020204020204" charset="-122"/>
-              </a:rPr>
-              <a:t>•  viem v2</a:t>
-            </a:r>
-            <a:endParaRPr sz="1700" b="0">
-              <a:solidFill>
-                <a:srgbClr val="E9E9F2"/>
-              </a:solidFill>
-              <a:latin typeface="微软雅黑" panose="020B0503020204020204" charset="-122"/>
-            </a:endParaRPr>
-          </a:p>
-          <a:p>
-            <a:pPr algn="l">
-              <a:spcAft>
-                <a:spcPts val="1200"/>
-              </a:spcAft>
-            </a:pPr>
-            <a:r>
-              <a:rPr sz="1700" b="0">
-                <a:solidFill>
-                  <a:srgbClr val="E9E9F2"/>
-                </a:solidFill>
-                <a:latin typeface="微软雅黑" panose="020B0503020204020204" charset="-122"/>
-              </a:rPr>
-              <a:t>•  zustand</a:t>
-            </a:r>
-            <a:endParaRPr sz="1700" b="0">
-              <a:solidFill>
-                <a:srgbClr val="E9E9F2"/>
-              </a:solidFill>
-              <a:latin typeface="微软雅黑" panose="020B0503020204020204" charset="-122"/>
-            </a:endParaRPr>
-          </a:p>
-          <a:p>
-            <a:pPr algn="l">
-              <a:spcAft>
-                <a:spcPts val="1200"/>
-              </a:spcAft>
-            </a:pPr>
-            <a:r>
-              <a:rPr sz="1700" b="0">
-                <a:solidFill>
-                  <a:srgbClr val="E9E9F2"/>
-                </a:solidFill>
-                <a:latin typeface="微软雅黑" panose="020B0503020204020204" charset="-122"/>
-              </a:rPr>
-              <a:t>•  Moss SDK</a:t>
-            </a:r>
-            <a:endParaRPr sz="1700" b="0">
-              <a:solidFill>
-                <a:srgbClr val="E9E9F2"/>
-              </a:solidFill>
-              <a:latin typeface="微软雅黑" panose="020B0503020204020204" charset="-122"/>
-            </a:endParaRPr>
-          </a:p>
-        </p:txBody>
-      </p:sp>
-      <p:sp>
-        <p:nvSpPr>
-          <p:cNvPr id="13" name="Rounded Rectangle 12"/>
-          <p:cNvSpPr/>
-          <p:nvPr/>
-        </p:nvSpPr>
-        <p:spPr>
-          <a:xfrm>
-            <a:off x="8083296" y="1828800"/>
-            <a:ext cx="3520440" cy="3291840"/>
-          </a:xfrm>
-          <a:prstGeom prst="roundRect">
-            <a:avLst>
-              <a:gd name="adj" fmla="val 10000"/>
-            </a:avLst>
-          </a:prstGeom>
-          <a:solidFill>
-            <a:srgbClr val="221E42"/>
-          </a:solidFill>
-          <a:ln>
-            <a:noFill/>
-          </a:ln>
-          <a:effectLst/>
-        </p:spPr>
-        <p:style>
-          <a:lnRef idx="1">
-            <a:schemeClr val="accent1"/>
-          </a:lnRef>
-          <a:fillRef idx="3">
-            <a:schemeClr val="accent1"/>
-          </a:fillRef>
-          <a:effectRef idx="2">
-            <a:schemeClr val="accent1"/>
-          </a:effectRef>
-          <a:fontRef idx="minor">
-            <a:schemeClr val="lt1"/>
-          </a:fontRef>
-        </p:style>
-        <p:txBody>
-          <a:bodyPr rtlCol="0" anchor="ctr"/>
-          <a:lstStyle/>
-          <a:p>
-            <a:pPr algn="ctr"/>
-          </a:p>
-        </p:txBody>
-      </p:sp>
-      <p:sp>
-        <p:nvSpPr>
-          <p:cNvPr id="14" name="Rectangle 13"/>
-          <p:cNvSpPr/>
-          <p:nvPr/>
-        </p:nvSpPr>
-        <p:spPr>
-          <a:xfrm>
-            <a:off x="8083296" y="1828800"/>
-            <a:ext cx="82296" cy="3291840"/>
-          </a:xfrm>
-          <a:prstGeom prst="rect">
-            <a:avLst/>
-          </a:prstGeom>
-          <a:solidFill>
-            <a:srgbClr val="F59E0B"/>
-          </a:solidFill>
-          <a:ln>
-            <a:noFill/>
-          </a:ln>
-          <a:effectLst/>
-        </p:spPr>
-        <p:style>
-          <a:lnRef idx="1">
-            <a:schemeClr val="accent1"/>
-          </a:lnRef>
-          <a:fillRef idx="3">
-            <a:schemeClr val="accent1"/>
-          </a:fillRef>
-          <a:effectRef idx="2">
-            <a:schemeClr val="accent1"/>
-          </a:effectRef>
-          <a:fontRef idx="minor">
-            <a:schemeClr val="lt1"/>
-          </a:fontRef>
-        </p:style>
-        <p:txBody>
-          <a:bodyPr rtlCol="0" anchor="ctr"/>
-          <a:lstStyle/>
-          <a:p>
-            <a:pPr algn="ctr"/>
-          </a:p>
-        </p:txBody>
-      </p:sp>
-      <p:sp>
-        <p:nvSpPr>
-          <p:cNvPr id="15" name="TextBox 14"/>
-          <p:cNvSpPr txBox="1"/>
-          <p:nvPr/>
-        </p:nvSpPr>
-        <p:spPr>
-          <a:xfrm>
-            <a:off x="8321040" y="1956816"/>
-            <a:ext cx="3136392" cy="457200"/>
-          </a:xfrm>
-          <a:prstGeom prst="rect">
-            <a:avLst/>
-          </a:prstGeom>
-          <a:noFill/>
-        </p:spPr>
-        <p:txBody>
-          <a:bodyPr wrap="square" lIns="36576" tIns="18288" rIns="36576" bIns="18288" anchor="t">
-            <a:spAutoFit/>
-          </a:bodyPr>
-          <a:lstStyle/>
-          <a:p>
-            <a:pPr algn="l"/>
-            <a:r>
-              <a:rPr sz="1900" b="1">
-                <a:solidFill>
-                  <a:srgbClr val="FFFFFF"/>
-                </a:solidFill>
-                <a:latin typeface="微软雅黑" panose="020B0503020204020204" charset="-122"/>
-              </a:rPr>
-              <a:t>AI / 可视化</a:t>
-            </a:r>
-            <a:endParaRPr sz="1900" b="1">
-              <a:solidFill>
-                <a:srgbClr val="FFFFFF"/>
-              </a:solidFill>
-              <a:latin typeface="微软雅黑" panose="020B0503020204020204" charset="-122"/>
-            </a:endParaRPr>
-          </a:p>
-        </p:txBody>
-      </p:sp>
-      <p:sp>
-        <p:nvSpPr>
-          <p:cNvPr id="16" name="TextBox 15"/>
-          <p:cNvSpPr txBox="1"/>
-          <p:nvPr/>
-        </p:nvSpPr>
-        <p:spPr>
-          <a:xfrm>
-            <a:off x="8321040" y="2487168"/>
-            <a:ext cx="3063240" cy="2468880"/>
-          </a:xfrm>
-          <a:prstGeom prst="rect">
-            <a:avLst/>
-          </a:prstGeom>
-          <a:noFill/>
-        </p:spPr>
-        <p:txBody>
-          <a:bodyPr wrap="square" lIns="36576" tIns="18288" rIns="36576" bIns="18288" anchor="t">
-            <a:spAutoFit/>
-          </a:bodyPr>
-          <a:lstStyle/>
-          <a:p>
-            <a:pPr algn="l">
-              <a:spcAft>
-                <a:spcPts val="1200"/>
-              </a:spcAft>
-            </a:pPr>
-            <a:r>
-              <a:rPr sz="1700" b="0">
-                <a:solidFill>
-                  <a:srgbClr val="E9E9F2"/>
-                </a:solidFill>
-                <a:latin typeface="微软雅黑" panose="020B0503020204020204" charset="-122"/>
-              </a:rPr>
-              <a:t>•  DeepSeek LLM</a:t>
-            </a:r>
-            <a:endParaRPr sz="1700" b="0">
-              <a:solidFill>
-                <a:srgbClr val="E9E9F2"/>
-              </a:solidFill>
-              <a:latin typeface="微软雅黑" panose="020B0503020204020204" charset="-122"/>
-            </a:endParaRPr>
-          </a:p>
-          <a:p>
-            <a:pPr algn="l">
-              <a:spcAft>
-                <a:spcPts val="1200"/>
-              </a:spcAft>
-            </a:pPr>
-            <a:r>
-              <a:rPr sz="1700" b="0">
-                <a:solidFill>
-                  <a:srgbClr val="E9E9F2"/>
-                </a:solidFill>
-                <a:latin typeface="微软雅黑" panose="020B0503020204020204" charset="-122"/>
-              </a:rPr>
-              <a:t>•  规则引擎</a:t>
-            </a:r>
-            <a:endParaRPr sz="1700" b="0">
-              <a:solidFill>
-                <a:srgbClr val="E9E9F2"/>
-              </a:solidFill>
-              <a:latin typeface="微软雅黑" panose="020B0503020204020204" charset="-122"/>
-            </a:endParaRPr>
-          </a:p>
-          <a:p>
-            <a:pPr algn="l">
-              <a:spcAft>
-                <a:spcPts val="1200"/>
-              </a:spcAft>
-            </a:pPr>
-            <a:r>
-              <a:rPr sz="1700" b="0">
-                <a:solidFill>
-                  <a:srgbClr val="E9E9F2"/>
-                </a:solidFill>
-                <a:latin typeface="微软雅黑" panose="020B0503020204020204" charset="-122"/>
-              </a:rPr>
-              <a:t>•  recharts</a:t>
-            </a:r>
-            <a:endParaRPr sz="1700" b="0">
-              <a:solidFill>
-                <a:srgbClr val="E9E9F2"/>
-              </a:solidFill>
-              <a:latin typeface="微软雅黑" panose="020B0503020204020204" charset="-122"/>
-            </a:endParaRPr>
-          </a:p>
-          <a:p>
-            <a:pPr algn="l">
-              <a:spcAft>
-                <a:spcPts val="1200"/>
-              </a:spcAft>
-            </a:pPr>
-            <a:r>
-              <a:rPr sz="1700" b="0">
-                <a:solidFill>
-                  <a:srgbClr val="E9E9F2"/>
-                </a:solidFill>
-                <a:latin typeface="微软雅黑" panose="020B0503020204020204" charset="-122"/>
-              </a:rPr>
-              <a:t>•  debug_traceCall</a:t>
-            </a:r>
-            <a:endParaRPr sz="1700" b="0">
-              <a:solidFill>
-                <a:srgbClr val="E9E9F2"/>
-              </a:solidFill>
-              <a:latin typeface="微软雅黑" panose="020B0503020204020204" charset="-122"/>
-            </a:endParaRPr>
-          </a:p>
-        </p:txBody>
-      </p:sp>
-      <p:sp>
-        <p:nvSpPr>
-          <p:cNvPr id="17" name="TextBox 16"/>
+              <a:rPr sz="1500" b="0">
+                <a:solidFill>
+                  <a:srgbClr val="9CA3B8"/>
+                </a:solidFill>
+                <a:latin typeface="Microsoft YaHei"/>
+              </a:rPr>
+              <a:t>交易哈希已在 MonadScan 验证通过 —— 模拟、签名、广播、验证全链路跑通，不是 Demo 截图，是真上链。</a:t>
+            </a:r>
+          </a:p>
+        </p:txBody>
+      </p:sp>
+      <p:sp>
+        <p:nvSpPr>
+          <p:cNvPr id="26" name="TextBox 25"/>
           <p:cNvSpPr txBox="1"/>
           <p:nvPr/>
         </p:nvSpPr>
@@ -4277,7 +4416,7 @@
           <a:noFill/>
         </p:spPr>
         <p:txBody>
-          <a:bodyPr wrap="square" lIns="36576" tIns="18288" rIns="36576" bIns="18288" anchor="t">
+          <a:bodyPr wrap="square" anchor="t" lIns="36576" rIns="36576" tIns="18288" bIns="18288">
             <a:spAutoFit/>
           </a:bodyPr>
           <a:lstStyle/>
@@ -4288,22 +4427,16 @@
                 <a:solidFill>
                   <a:srgbClr val="9CA3B8"/>
                 </a:solidFill>
-                <a:latin typeface="微软雅黑" panose="020B0503020204020204" charset="-122"/>
+                <a:latin typeface="Microsoft YaHei"/>
               </a:rPr>
               <a:t>MonadLens · 看清网络，看清后果</a:t>
             </a:r>
-            <a:endParaRPr sz="1000" b="0">
-              <a:solidFill>
-                <a:srgbClr val="9CA3B8"/>
-              </a:solidFill>
-              <a:latin typeface="微软雅黑" panose="020B0503020204020204" charset="-122"/>
-            </a:endParaRPr>
-          </a:p>
-        </p:txBody>
-      </p:sp>
-      <p:sp>
-        <p:nvSpPr>
-          <p:cNvPr id="18" name="TextBox 17"/>
+          </a:p>
+        </p:txBody>
+      </p:sp>
+      <p:sp>
+        <p:nvSpPr>
+          <p:cNvPr id="27" name="TextBox 26"/>
           <p:cNvSpPr txBox="1"/>
           <p:nvPr/>
         </p:nvSpPr>
@@ -4318,7 +4451,7 @@
           <a:noFill/>
         </p:spPr>
         <p:txBody>
-          <a:bodyPr wrap="square" lIns="36576" tIns="18288" rIns="36576" bIns="18288" anchor="t">
+          <a:bodyPr wrap="square" anchor="t" lIns="36576" rIns="36576" tIns="18288" bIns="18288">
             <a:spAutoFit/>
           </a:bodyPr>
           <a:lstStyle/>
@@ -4329,16 +4462,10 @@
                 <a:solidFill>
                   <a:srgbClr val="9CA3B8"/>
                 </a:solidFill>
-                <a:latin typeface="微软雅黑" panose="020B0503020204020204" charset="-122"/>
+                <a:latin typeface="Microsoft YaHei"/>
               </a:rPr>
               <a:t>10</a:t>
             </a:r>
-            <a:endParaRPr sz="1000" b="0">
-              <a:solidFill>
-                <a:srgbClr val="9CA3B8"/>
-              </a:solidFill>
-              <a:latin typeface="微软雅黑" panose="020B0503020204020204" charset="-122"/>
-            </a:endParaRPr>
           </a:p>
         </p:txBody>
       </p:sp>
@@ -4351,7 +4478,7 @@
 </file>
 
 <file path=ppt/slides/slide11.xml><?xml version="1.0" encoding="utf-8"?>
-<p:sld xmlns:a="http://schemas.openxmlformats.org/drawingml/2006/main" xmlns:r="http://schemas.openxmlformats.org/officeDocument/2006/relationships" xmlns:p="http://schemas.openxmlformats.org/presentationml/2006/main">
+<p:sld xmlns:a="http://schemas.openxmlformats.org/drawingml/2006/main" xmlns:p="http://schemas.openxmlformats.org/presentationml/2006/main" xmlns:r="http://schemas.openxmlformats.org/officeDocument/2006/relationships">
   <p:cSld>
     <p:spTree>
       <p:nvGrpSpPr>
@@ -4421,7 +4548,7 @@
           <a:noFill/>
         </p:spPr>
         <p:txBody>
-          <a:bodyPr wrap="square" lIns="36576" tIns="18288" rIns="36576" bIns="18288" anchor="t">
+          <a:bodyPr wrap="square" anchor="t" lIns="36576" rIns="36576" tIns="18288" bIns="18288">
             <a:spAutoFit/>
           </a:bodyPr>
           <a:lstStyle/>
@@ -4432,16 +4559,10 @@
                 <a:solidFill>
                   <a:srgbClr val="8B5CF6"/>
                 </a:solidFill>
-                <a:latin typeface="微软雅黑" panose="020B0503020204020204" charset="-122"/>
-              </a:rPr>
-              <a:t>如何体验</a:t>
-            </a:r>
-            <a:endParaRPr sz="1300" b="1">
-              <a:solidFill>
-                <a:srgbClr val="8B5CF6"/>
-              </a:solidFill>
-              <a:latin typeface="微软雅黑" panose="020B0503020204020204" charset="-122"/>
-            </a:endParaRPr>
+                <a:latin typeface="Microsoft YaHei"/>
+              </a:rPr>
+              <a:t>技术栈</a:t>
+            </a:r>
           </a:p>
         </p:txBody>
       </p:sp>
@@ -4462,7 +4583,7 @@
           <a:noFill/>
         </p:spPr>
         <p:txBody>
-          <a:bodyPr wrap="square" lIns="36576" tIns="18288" rIns="36576" bIns="18288" anchor="t">
+          <a:bodyPr wrap="square" anchor="t" lIns="36576" rIns="36576" tIns="18288" bIns="18288">
             <a:spAutoFit/>
           </a:bodyPr>
           <a:lstStyle/>
@@ -4473,16 +4594,10 @@
                 <a:solidFill>
                   <a:srgbClr val="FFFFFF"/>
                 </a:solidFill>
-                <a:latin typeface="微软雅黑" panose="020B0503020204020204" charset="-122"/>
-              </a:rPr>
-              <a:t>3 步跑通演示（测试网 · 免费）</a:t>
-            </a:r>
-            <a:endParaRPr sz="3000" b="1">
-              <a:solidFill>
-                <a:srgbClr val="FFFFFF"/>
-              </a:solidFill>
-              <a:latin typeface="微软雅黑" panose="020B0503020204020204" charset="-122"/>
-            </a:endParaRPr>
+                <a:latin typeface="Microsoft YaHei"/>
+              </a:rPr>
+              <a:t>现代、稳健、可演示</a:t>
+            </a:r>
           </a:p>
         </p:txBody>
       </p:sp>
@@ -4495,7 +4610,7 @@
         <p:spPr>
           <a:xfrm>
             <a:off x="548640" y="1828800"/>
-            <a:ext cx="11064240" cy="1325880"/>
+            <a:ext cx="3520440" cy="3291840"/>
           </a:xfrm>
           <a:prstGeom prst="roundRect">
             <a:avLst>
@@ -4534,24 +4649,25 @@
       </p:sp>
       <p:sp>
         <p:nvSpPr>
-          <p:cNvPr id="6" name="Oval 5"/>
+          <p:cNvPr id="6" name="Rectangle 5"/>
           <p:cNvSpPr/>
           <p:nvPr/>
         </p:nvSpPr>
         <p:spPr>
           <a:xfrm>
-            <a:off x="777240" y="2121408"/>
-            <a:ext cx="731520" cy="731520"/>
-          </a:xfrm>
-          <a:prstGeom prst="ellipse">
+            <a:off x="548640" y="1828800"/>
+            <a:ext cx="82296" cy="3291840"/>
+          </a:xfrm>
+          <a:prstGeom prst="rect">
             <a:avLst/>
           </a:prstGeom>
           <a:solidFill>
-            <a:srgbClr val="22D3EE"/>
+            <a:srgbClr val="8B5CF6"/>
           </a:solidFill>
           <a:ln>
             <a:noFill/>
           </a:ln>
+          <a:effectLst/>
         </p:spPr>
         <p:style>
           <a:lnRef idx="1">
@@ -4583,36 +4699,30 @@
         </p:nvSpPr>
         <p:spPr>
           <a:xfrm>
-            <a:off x="777240" y="2121408"/>
-            <a:ext cx="731520" cy="731520"/>
-          </a:xfrm>
-          <a:prstGeom prst="rect">
-            <a:avLst/>
-          </a:prstGeom>
-          <a:noFill/>
-        </p:spPr>
-        <p:txBody>
-          <a:bodyPr wrap="square" lIns="36576" tIns="18288" rIns="36576" bIns="18288" anchor="ctr">
-            <a:spAutoFit/>
-          </a:bodyPr>
-          <a:lstStyle/>
-          <a:p>
-            <a:pPr algn="ctr"/>
-            <a:r>
-              <a:rPr sz="3000" b="1">
+            <a:off x="786384" y="1956816"/>
+            <a:ext cx="3136392" cy="457200"/>
+          </a:xfrm>
+          <a:prstGeom prst="rect">
+            <a:avLst/>
+          </a:prstGeom>
+          <a:noFill/>
+        </p:spPr>
+        <p:txBody>
+          <a:bodyPr wrap="square" anchor="t" lIns="36576" rIns="36576" tIns="18288" bIns="18288">
+            <a:spAutoFit/>
+          </a:bodyPr>
+          <a:lstStyle/>
+          <a:p>
+            <a:pPr algn="l"/>
+            <a:r>
+              <a:rPr sz="1900" b="1">
                 <a:solidFill>
                   <a:srgbClr val="FFFFFF"/>
                 </a:solidFill>
-                <a:latin typeface="微软雅黑" panose="020B0503020204020204" charset="-122"/>
-              </a:rPr>
-              <a:t>1</a:t>
-            </a:r>
-            <a:endParaRPr sz="3000" b="1">
-              <a:solidFill>
-                <a:srgbClr val="FFFFFF"/>
-              </a:solidFill>
-              <a:latin typeface="微软雅黑" panose="020B0503020204020204" charset="-122"/>
-            </a:endParaRPr>
+                <a:latin typeface="Microsoft YaHei"/>
+              </a:rPr>
+              <a:t>前端 / 框架</a:t>
+            </a:r>
           </a:p>
         </p:txBody>
       </p:sp>
@@ -4624,90 +4734,95 @@
         </p:nvSpPr>
         <p:spPr>
           <a:xfrm>
-            <a:off x="1783080" y="1993392"/>
-            <a:ext cx="9509760" cy="457200"/>
-          </a:xfrm>
-          <a:prstGeom prst="rect">
-            <a:avLst/>
-          </a:prstGeom>
-          <a:noFill/>
-        </p:spPr>
-        <p:txBody>
-          <a:bodyPr wrap="square" lIns="36576" tIns="18288" rIns="36576" bIns="18288" anchor="t">
-            <a:spAutoFit/>
-          </a:bodyPr>
-          <a:lstStyle/>
-          <a:p>
-            <a:pPr algn="l"/>
-            <a:r>
-              <a:rPr sz="1900" b="1">
-                <a:solidFill>
-                  <a:srgbClr val="FFFFFF"/>
-                </a:solidFill>
-                <a:latin typeface="微软雅黑" panose="020B0503020204020204" charset="-122"/>
-              </a:rPr>
-              <a:t>连钱包 + 一键加网</a:t>
-            </a:r>
-            <a:endParaRPr sz="1900" b="1">
-              <a:solidFill>
-                <a:srgbClr val="FFFFFF"/>
-              </a:solidFill>
-              <a:latin typeface="微软雅黑" panose="020B0503020204020204" charset="-122"/>
-            </a:endParaRPr>
-          </a:p>
-        </p:txBody>
-      </p:sp>
-      <p:sp>
-        <p:nvSpPr>
-          <p:cNvPr id="9" name="TextBox 8"/>
-          <p:cNvSpPr txBox="1"/>
-          <p:nvPr/>
-        </p:nvSpPr>
-        <p:spPr>
-          <a:xfrm>
-            <a:off x="1783080" y="2487168"/>
-            <a:ext cx="9509760" cy="548640"/>
-          </a:xfrm>
-          <a:prstGeom prst="rect">
-            <a:avLst/>
-          </a:prstGeom>
-          <a:noFill/>
-        </p:spPr>
-        <p:txBody>
-          <a:bodyPr wrap="square" lIns="36576" tIns="18288" rIns="36576" bIns="18288" anchor="t">
-            <a:spAutoFit/>
-          </a:bodyPr>
-          <a:lstStyle/>
-          <a:p>
-            <a:pPr algn="l"/>
-            <a:r>
-              <a:rPr sz="1400" b="0">
-                <a:solidFill>
-                  <a:srgbClr val="9CA3B8"/>
-                </a:solidFill>
-                <a:latin typeface="微软雅黑" panose="020B0503020204020204" charset="-122"/>
-              </a:rPr>
-              <a:t>连接 MetaMask/OKX，点「添加网络」自动灌入 Monad 测试网。</a:t>
-            </a:r>
-            <a:endParaRPr sz="1400" b="0">
-              <a:solidFill>
-                <a:srgbClr val="9CA3B8"/>
-              </a:solidFill>
-              <a:latin typeface="微软雅黑" panose="020B0503020204020204" charset="-122"/>
-            </a:endParaRPr>
-          </a:p>
-        </p:txBody>
-      </p:sp>
-      <p:sp>
-        <p:nvSpPr>
-          <p:cNvPr id="10" name="Rounded Rectangle 9"/>
+            <a:off x="786384" y="2487168"/>
+            <a:ext cx="3063240" cy="2468880"/>
+          </a:xfrm>
+          <a:prstGeom prst="rect">
+            <a:avLst/>
+          </a:prstGeom>
+          <a:noFill/>
+        </p:spPr>
+        <p:txBody>
+          <a:bodyPr wrap="square" anchor="t" lIns="36576" rIns="36576" tIns="18288" bIns="18288">
+            <a:spAutoFit/>
+          </a:bodyPr>
+          <a:lstStyle/>
+          <a:p>
+            <a:pPr algn="l">
+              <a:spcAft>
+                <a:spcPts val="1200"/>
+              </a:spcAft>
+            </a:pPr>
+            <a:r>
+              <a:rPr sz="1700" b="0">
+                <a:solidFill>
+                  <a:srgbClr val="E9E9F2"/>
+                </a:solidFill>
+                <a:latin typeface="Microsoft YaHei"/>
+              </a:rPr>
+              <a:t>•  Next.js 16</a:t>
+            </a:r>
+          </a:p>
+          <a:p>
+            <a:pPr algn="l">
+              <a:spcAft>
+                <a:spcPts val="1200"/>
+              </a:spcAft>
+            </a:pPr>
+            <a:r>
+              <a:rPr sz="1700" b="0">
+                <a:solidFill>
+                  <a:srgbClr val="E9E9F2"/>
+                </a:solidFill>
+                <a:latin typeface="Microsoft YaHei"/>
+              </a:rPr>
+              <a:t>•  React 19</a:t>
+            </a:r>
+          </a:p>
+          <a:p>
+            <a:pPr algn="l">
+              <a:spcAft>
+                <a:spcPts val="1200"/>
+              </a:spcAft>
+            </a:pPr>
+            <a:r>
+              <a:rPr sz="1700" b="0">
+                <a:solidFill>
+                  <a:srgbClr val="E9E9F2"/>
+                </a:solidFill>
+                <a:latin typeface="Microsoft YaHei"/>
+              </a:rPr>
+              <a:t>•  Tailwind v4</a:t>
+            </a:r>
+          </a:p>
+          <a:p>
+            <a:pPr algn="l">
+              <a:spcAft>
+                <a:spcPts val="1200"/>
+              </a:spcAft>
+            </a:pPr>
+            <a:r>
+              <a:rPr sz="1700" b="0">
+                <a:solidFill>
+                  <a:srgbClr val="E9E9F2"/>
+                </a:solidFill>
+                <a:latin typeface="Microsoft YaHei"/>
+              </a:rPr>
+              <a:t>•  TypeScript</a:t>
+            </a:r>
+          </a:p>
+        </p:txBody>
+      </p:sp>
+      <p:sp>
+        <p:nvSpPr>
+          <p:cNvPr id="9" name="Rounded Rectangle 8"/>
           <p:cNvSpPr/>
           <p:nvPr/>
         </p:nvSpPr>
         <p:spPr>
           <a:xfrm>
-            <a:off x="548640" y="3337560"/>
-            <a:ext cx="11064240" cy="1325880"/>
+            <a:off x="4315968" y="1828800"/>
+            <a:ext cx="3520440" cy="3291840"/>
           </a:xfrm>
           <a:prstGeom prst="roundRect">
             <a:avLst>
@@ -4746,24 +4861,25 @@
       </p:sp>
       <p:sp>
         <p:nvSpPr>
-          <p:cNvPr id="11" name="Oval 10"/>
+          <p:cNvPr id="10" name="Rectangle 9"/>
           <p:cNvSpPr/>
           <p:nvPr/>
         </p:nvSpPr>
         <p:spPr>
           <a:xfrm>
-            <a:off x="777240" y="3630168"/>
-            <a:ext cx="731520" cy="731520"/>
-          </a:xfrm>
-          <a:prstGeom prst="ellipse">
+            <a:off x="4315968" y="1828800"/>
+            <a:ext cx="82296" cy="3291840"/>
+          </a:xfrm>
+          <a:prstGeom prst="rect">
             <a:avLst/>
           </a:prstGeom>
           <a:solidFill>
-            <a:srgbClr val="8B5CF6"/>
+            <a:srgbClr val="22D3EE"/>
           </a:solidFill>
           <a:ln>
             <a:noFill/>
           </a:ln>
+          <a:effectLst/>
         </p:spPr>
         <p:style>
           <a:lnRef idx="1">
@@ -4789,137 +4905,136 @@
       </p:sp>
       <p:sp>
         <p:nvSpPr>
+          <p:cNvPr id="11" name="TextBox 10"/>
+          <p:cNvSpPr txBox="1"/>
+          <p:nvPr/>
+        </p:nvSpPr>
+        <p:spPr>
+          <a:xfrm>
+            <a:off x="4553712" y="1956816"/>
+            <a:ext cx="3136392" cy="457200"/>
+          </a:xfrm>
+          <a:prstGeom prst="rect">
+            <a:avLst/>
+          </a:prstGeom>
+          <a:noFill/>
+        </p:spPr>
+        <p:txBody>
+          <a:bodyPr wrap="square" anchor="t" lIns="36576" rIns="36576" tIns="18288" bIns="18288">
+            <a:spAutoFit/>
+          </a:bodyPr>
+          <a:lstStyle/>
+          <a:p>
+            <a:pPr algn="l"/>
+            <a:r>
+              <a:rPr sz="1900" b="1">
+                <a:solidFill>
+                  <a:srgbClr val="FFFFFF"/>
+                </a:solidFill>
+                <a:latin typeface="Microsoft YaHei"/>
+              </a:rPr>
+              <a:t>链上 / 钱包</a:t>
+            </a:r>
+          </a:p>
+        </p:txBody>
+      </p:sp>
+      <p:sp>
+        <p:nvSpPr>
           <p:cNvPr id="12" name="TextBox 11"/>
           <p:cNvSpPr txBox="1"/>
           <p:nvPr/>
         </p:nvSpPr>
         <p:spPr>
           <a:xfrm>
-            <a:off x="777240" y="3630168"/>
-            <a:ext cx="731520" cy="731520"/>
-          </a:xfrm>
-          <a:prstGeom prst="rect">
-            <a:avLst/>
-          </a:prstGeom>
-          <a:noFill/>
-        </p:spPr>
-        <p:txBody>
-          <a:bodyPr wrap="square" lIns="36576" tIns="18288" rIns="36576" bIns="18288" anchor="ctr">
-            <a:spAutoFit/>
-          </a:bodyPr>
-          <a:lstStyle/>
-          <a:p>
-            <a:pPr algn="ctr"/>
-            <a:r>
-              <a:rPr sz="3000" b="1">
-                <a:solidFill>
-                  <a:srgbClr val="FFFFFF"/>
-                </a:solidFill>
-                <a:latin typeface="微软雅黑" panose="020B0503020204020204" charset="-122"/>
-              </a:rPr>
-              <a:t>2</a:t>
-            </a:r>
-            <a:endParaRPr sz="3000" b="1">
-              <a:solidFill>
-                <a:srgbClr val="FFFFFF"/>
-              </a:solidFill>
-              <a:latin typeface="微软雅黑" panose="020B0503020204020204" charset="-122"/>
-            </a:endParaRPr>
-          </a:p>
-        </p:txBody>
-      </p:sp>
-      <p:sp>
-        <p:nvSpPr>
-          <p:cNvPr id="13" name="TextBox 12"/>
-          <p:cNvSpPr txBox="1"/>
-          <p:nvPr/>
-        </p:nvSpPr>
-        <p:spPr>
-          <a:xfrm>
-            <a:off x="1783080" y="3502152"/>
-            <a:ext cx="9509760" cy="457200"/>
-          </a:xfrm>
-          <a:prstGeom prst="rect">
-            <a:avLst/>
-          </a:prstGeom>
-          <a:noFill/>
-        </p:spPr>
-        <p:txBody>
-          <a:bodyPr wrap="square" lIns="36576" tIns="18288" rIns="36576" bIns="18288" anchor="t">
-            <a:spAutoFit/>
-          </a:bodyPr>
-          <a:lstStyle/>
-          <a:p>
-            <a:pPr algn="l"/>
-            <a:r>
-              <a:rPr sz="1900" b="1">
-                <a:solidFill>
-                  <a:srgbClr val="FFFFFF"/>
-                </a:solidFill>
-                <a:latin typeface="微软雅黑" panose="020B0503020204020204" charset="-122"/>
-              </a:rPr>
-              <a:t>领免费测试币</a:t>
-            </a:r>
-            <a:endParaRPr sz="1900" b="1">
-              <a:solidFill>
-                <a:srgbClr val="FFFFFF"/>
-              </a:solidFill>
-              <a:latin typeface="微软雅黑" panose="020B0503020204020204" charset="-122"/>
-            </a:endParaRPr>
-          </a:p>
-        </p:txBody>
-      </p:sp>
-      <p:sp>
-        <p:nvSpPr>
-          <p:cNvPr id="14" name="TextBox 13"/>
-          <p:cNvSpPr txBox="1"/>
-          <p:nvPr/>
-        </p:nvSpPr>
-        <p:spPr>
-          <a:xfrm>
-            <a:off x="1783080" y="3995928"/>
-            <a:ext cx="9509760" cy="548640"/>
-          </a:xfrm>
-          <a:prstGeom prst="rect">
-            <a:avLst/>
-          </a:prstGeom>
-          <a:noFill/>
-        </p:spPr>
-        <p:txBody>
-          <a:bodyPr wrap="square" lIns="36576" tIns="18288" rIns="36576" bIns="18288" anchor="t">
-            <a:spAutoFit/>
-          </a:bodyPr>
-          <a:lstStyle/>
-          <a:p>
-            <a:pPr algn="l"/>
-            <a:r>
-              <a:rPr sz="1400" b="0">
-                <a:solidFill>
-                  <a:srgbClr val="9CA3B8"/>
-                </a:solidFill>
-                <a:latin typeface="微软雅黑" panose="020B0503020204020204" charset="-122"/>
-              </a:rPr>
-              <a:t>打开 faucet.monad.xyz，领取免费测试 MON（无真实价值）。</a:t>
-            </a:r>
-            <a:endParaRPr sz="1400" b="0">
-              <a:solidFill>
-                <a:srgbClr val="9CA3B8"/>
-              </a:solidFill>
-              <a:latin typeface="微软雅黑" panose="020B0503020204020204" charset="-122"/>
-            </a:endParaRPr>
-          </a:p>
-        </p:txBody>
-      </p:sp>
-      <p:sp>
-        <p:nvSpPr>
-          <p:cNvPr id="15" name="Rounded Rectangle 14"/>
+            <a:off x="4553712" y="2487168"/>
+            <a:ext cx="3063240" cy="2468880"/>
+          </a:xfrm>
+          <a:prstGeom prst="rect">
+            <a:avLst/>
+          </a:prstGeom>
+          <a:noFill/>
+        </p:spPr>
+        <p:txBody>
+          <a:bodyPr wrap="square" anchor="t" lIns="36576" rIns="36576" tIns="18288" bIns="18288">
+            <a:spAutoFit/>
+          </a:bodyPr>
+          <a:lstStyle/>
+          <a:p>
+            <a:pPr algn="l">
+              <a:spcAft>
+                <a:spcPts val="1200"/>
+              </a:spcAft>
+            </a:pPr>
+            <a:r>
+              <a:rPr sz="1700" b="0">
+                <a:solidFill>
+                  <a:srgbClr val="E9E9F2"/>
+                </a:solidFill>
+                <a:latin typeface="Microsoft YaHei"/>
+              </a:rPr>
+              <a:t>•  wagmi v3</a:t>
+            </a:r>
+          </a:p>
+          <a:p>
+            <a:pPr algn="l">
+              <a:spcAft>
+                <a:spcPts val="1200"/>
+              </a:spcAft>
+            </a:pPr>
+            <a:r>
+              <a:rPr sz="1700" b="0">
+                <a:solidFill>
+                  <a:srgbClr val="E9E9F2"/>
+                </a:solidFill>
+                <a:latin typeface="Microsoft YaHei"/>
+              </a:rPr>
+              <a:t>•  viem v2</a:t>
+            </a:r>
+          </a:p>
+          <a:p>
+            <a:pPr algn="l">
+              <a:spcAft>
+                <a:spcPts val="1200"/>
+              </a:spcAft>
+            </a:pPr>
+            <a:r>
+              <a:rPr sz="1700" b="0">
+                <a:solidFill>
+                  <a:srgbClr val="E9E9F2"/>
+                </a:solidFill>
+                <a:latin typeface="Microsoft YaHei"/>
+              </a:rPr>
+              <a:t>•  zustand</a:t>
+            </a:r>
+          </a:p>
+          <a:p>
+            <a:pPr algn="l">
+              <a:spcAft>
+                <a:spcPts val="1200"/>
+              </a:spcAft>
+            </a:pPr>
+            <a:r>
+              <a:rPr sz="1700" b="0">
+                <a:solidFill>
+                  <a:srgbClr val="E9E9F2"/>
+                </a:solidFill>
+                <a:latin typeface="Microsoft YaHei"/>
+              </a:rPr>
+              <a:t>•  Moss SDK</a:t>
+            </a:r>
+          </a:p>
+        </p:txBody>
+      </p:sp>
+      <p:sp>
+        <p:nvSpPr>
+          <p:cNvPr id="13" name="Rounded Rectangle 12"/>
           <p:cNvSpPr/>
           <p:nvPr/>
         </p:nvSpPr>
         <p:spPr>
           <a:xfrm>
-            <a:off x="548640" y="4846320"/>
-            <a:ext cx="11064240" cy="1325880"/>
+            <a:off x="8083296" y="1828800"/>
+            <a:ext cx="3520440" cy="3291840"/>
           </a:xfrm>
           <a:prstGeom prst="roundRect">
             <a:avLst>
@@ -4958,16 +5073,16 @@
       </p:sp>
       <p:sp>
         <p:nvSpPr>
-          <p:cNvPr id="16" name="Oval 15"/>
+          <p:cNvPr id="14" name="Rectangle 13"/>
           <p:cNvSpPr/>
           <p:nvPr/>
         </p:nvSpPr>
         <p:spPr>
           <a:xfrm>
-            <a:off x="777240" y="5138928"/>
-            <a:ext cx="731520" cy="731520"/>
-          </a:xfrm>
-          <a:prstGeom prst="ellipse">
+            <a:off x="8083296" y="1828800"/>
+            <a:ext cx="82296" cy="3291840"/>
+          </a:xfrm>
+          <a:prstGeom prst="rect">
             <a:avLst/>
           </a:prstGeom>
           <a:solidFill>
@@ -4976,6 +5091,7 @@
           <a:ln>
             <a:noFill/>
           </a:ln>
+          <a:effectLst/>
         </p:spPr>
         <p:style>
           <a:lnRef idx="1">
@@ -5001,8 +5117,766 @@
       </p:sp>
       <p:sp>
         <p:nvSpPr>
+          <p:cNvPr id="15" name="TextBox 14"/>
+          <p:cNvSpPr txBox="1"/>
+          <p:nvPr/>
+        </p:nvSpPr>
+        <p:spPr>
+          <a:xfrm>
+            <a:off x="8321040" y="1956816"/>
+            <a:ext cx="3136392" cy="457200"/>
+          </a:xfrm>
+          <a:prstGeom prst="rect">
+            <a:avLst/>
+          </a:prstGeom>
+          <a:noFill/>
+        </p:spPr>
+        <p:txBody>
+          <a:bodyPr wrap="square" anchor="t" lIns="36576" rIns="36576" tIns="18288" bIns="18288">
+            <a:spAutoFit/>
+          </a:bodyPr>
+          <a:lstStyle/>
+          <a:p>
+            <a:pPr algn="l"/>
+            <a:r>
+              <a:rPr sz="1900" b="1">
+                <a:solidFill>
+                  <a:srgbClr val="FFFFFF"/>
+                </a:solidFill>
+                <a:latin typeface="Microsoft YaHei"/>
+              </a:rPr>
+              <a:t>AI / 可视化</a:t>
+            </a:r>
+          </a:p>
+        </p:txBody>
+      </p:sp>
+      <p:sp>
+        <p:nvSpPr>
+          <p:cNvPr id="16" name="TextBox 15"/>
+          <p:cNvSpPr txBox="1"/>
+          <p:nvPr/>
+        </p:nvSpPr>
+        <p:spPr>
+          <a:xfrm>
+            <a:off x="8321040" y="2487168"/>
+            <a:ext cx="3063240" cy="2468880"/>
+          </a:xfrm>
+          <a:prstGeom prst="rect">
+            <a:avLst/>
+          </a:prstGeom>
+          <a:noFill/>
+        </p:spPr>
+        <p:txBody>
+          <a:bodyPr wrap="square" anchor="t" lIns="36576" rIns="36576" tIns="18288" bIns="18288">
+            <a:spAutoFit/>
+          </a:bodyPr>
+          <a:lstStyle/>
+          <a:p>
+            <a:pPr algn="l">
+              <a:spcAft>
+                <a:spcPts val="1200"/>
+              </a:spcAft>
+            </a:pPr>
+            <a:r>
+              <a:rPr sz="1700" b="0">
+                <a:solidFill>
+                  <a:srgbClr val="E9E9F2"/>
+                </a:solidFill>
+                <a:latin typeface="Microsoft YaHei"/>
+              </a:rPr>
+              <a:t>•  LLM（OpenAI 兼容）</a:t>
+            </a:r>
+          </a:p>
+          <a:p>
+            <a:pPr algn="l">
+              <a:spcAft>
+                <a:spcPts val="1200"/>
+              </a:spcAft>
+            </a:pPr>
+            <a:r>
+              <a:rPr sz="1700" b="0">
+                <a:solidFill>
+                  <a:srgbClr val="E9E9F2"/>
+                </a:solidFill>
+                <a:latin typeface="Microsoft YaHei"/>
+              </a:rPr>
+              <a:t>•  规则引擎</a:t>
+            </a:r>
+          </a:p>
+          <a:p>
+            <a:pPr algn="l">
+              <a:spcAft>
+                <a:spcPts val="1200"/>
+              </a:spcAft>
+            </a:pPr>
+            <a:r>
+              <a:rPr sz="1700" b="0">
+                <a:solidFill>
+                  <a:srgbClr val="E9E9F2"/>
+                </a:solidFill>
+                <a:latin typeface="Microsoft YaHei"/>
+              </a:rPr>
+              <a:t>•  recharts</a:t>
+            </a:r>
+          </a:p>
+          <a:p>
+            <a:pPr algn="l">
+              <a:spcAft>
+                <a:spcPts val="1200"/>
+              </a:spcAft>
+            </a:pPr>
+            <a:r>
+              <a:rPr sz="1700" b="0">
+                <a:solidFill>
+                  <a:srgbClr val="E9E9F2"/>
+                </a:solidFill>
+                <a:latin typeface="Microsoft YaHei"/>
+              </a:rPr>
+              <a:t>•  debug_traceCall</a:t>
+            </a:r>
+          </a:p>
+        </p:txBody>
+      </p:sp>
+      <p:sp>
+        <p:nvSpPr>
           <p:cNvPr id="17" name="TextBox 16"/>
           <p:cNvSpPr txBox="1"/>
+          <p:nvPr/>
+        </p:nvSpPr>
+        <p:spPr>
+          <a:xfrm>
+            <a:off x="548640" y="6419088"/>
+            <a:ext cx="7315200" cy="274320"/>
+          </a:xfrm>
+          <a:prstGeom prst="rect">
+            <a:avLst/>
+          </a:prstGeom>
+          <a:noFill/>
+        </p:spPr>
+        <p:txBody>
+          <a:bodyPr wrap="square" anchor="t" lIns="36576" rIns="36576" tIns="18288" bIns="18288">
+            <a:spAutoFit/>
+          </a:bodyPr>
+          <a:lstStyle/>
+          <a:p>
+            <a:pPr algn="l"/>
+            <a:r>
+              <a:rPr sz="1000" b="0">
+                <a:solidFill>
+                  <a:srgbClr val="9CA3B8"/>
+                </a:solidFill>
+                <a:latin typeface="Microsoft YaHei"/>
+              </a:rPr>
+              <a:t>MonadLens · 看清网络，看清后果</a:t>
+            </a:r>
+          </a:p>
+        </p:txBody>
+      </p:sp>
+      <p:sp>
+        <p:nvSpPr>
+          <p:cNvPr id="18" name="TextBox 17"/>
+          <p:cNvSpPr txBox="1"/>
+          <p:nvPr/>
+        </p:nvSpPr>
+        <p:spPr>
+          <a:xfrm>
+            <a:off x="10881360" y="6419088"/>
+            <a:ext cx="822960" cy="274320"/>
+          </a:xfrm>
+          <a:prstGeom prst="rect">
+            <a:avLst/>
+          </a:prstGeom>
+          <a:noFill/>
+        </p:spPr>
+        <p:txBody>
+          <a:bodyPr wrap="square" anchor="t" lIns="36576" rIns="36576" tIns="18288" bIns="18288">
+            <a:spAutoFit/>
+          </a:bodyPr>
+          <a:lstStyle/>
+          <a:p>
+            <a:pPr algn="r"/>
+            <a:r>
+              <a:rPr sz="1000" b="0">
+                <a:solidFill>
+                  <a:srgbClr val="9CA3B8"/>
+                </a:solidFill>
+                <a:latin typeface="Microsoft YaHei"/>
+              </a:rPr>
+              <a:t>11</a:t>
+            </a:r>
+          </a:p>
+        </p:txBody>
+      </p:sp>
+    </p:spTree>
+  </p:cSld>
+  <p:clrMapOvr>
+    <a:masterClrMapping/>
+  </p:clrMapOvr>
+</p:sld>
+</file>
+
+<file path=ppt/slides/slide12.xml><?xml version="1.0" encoding="utf-8"?>
+<p:sld xmlns:a="http://schemas.openxmlformats.org/drawingml/2006/main" xmlns:p="http://schemas.openxmlformats.org/presentationml/2006/main" xmlns:r="http://schemas.openxmlformats.org/officeDocument/2006/relationships">
+  <p:cSld>
+    <p:spTree>
+      <p:nvGrpSpPr>
+        <p:cNvPr id="1" name=""/>
+        <p:cNvGrpSpPr/>
+        <p:nvPr/>
+      </p:nvGrpSpPr>
+      <p:grpSpPr/>
+      <p:sp>
+        <p:nvSpPr>
+          <p:cNvPr id="2" name="Rectangle 1"/>
+          <p:cNvSpPr/>
+          <p:nvPr/>
+        </p:nvSpPr>
+        <p:spPr>
+          <a:xfrm>
+            <a:off x="0" y="0"/>
+            <a:ext cx="12191695" cy="6858000"/>
+          </a:xfrm>
+          <a:prstGeom prst="rect">
+            <a:avLst/>
+          </a:prstGeom>
+          <a:solidFill>
+            <a:srgbClr val="121026"/>
+          </a:solidFill>
+          <a:ln>
+            <a:noFill/>
+          </a:ln>
+          <a:effectLst/>
+        </p:spPr>
+        <p:style>
+          <a:lnRef idx="1">
+            <a:schemeClr val="accent1"/>
+          </a:lnRef>
+          <a:fillRef idx="3">
+            <a:schemeClr val="accent1"/>
+          </a:fillRef>
+          <a:effectRef idx="2">
+            <a:schemeClr val="accent1"/>
+          </a:effectRef>
+          <a:fontRef idx="minor">
+            <a:schemeClr val="lt1"/>
+          </a:fontRef>
+        </p:style>
+        <p:txBody>
+          <a:bodyPr rtlCol="0" anchor="ctr"/>
+          <a:lstStyle/>
+          <a:p>
+            <a:pPr algn="ctr"/>
+          </a:p>
+        </p:txBody>
+      </p:sp>
+      <p:sp>
+        <p:nvSpPr>
+          <p:cNvPr id="3" name="TextBox 2"/>
+          <p:cNvSpPr txBox="1"/>
+          <p:nvPr/>
+        </p:nvSpPr>
+        <p:spPr>
+          <a:xfrm>
+            <a:off x="548640" y="384048"/>
+            <a:ext cx="10972800" cy="329184"/>
+          </a:xfrm>
+          <a:prstGeom prst="rect">
+            <a:avLst/>
+          </a:prstGeom>
+          <a:noFill/>
+        </p:spPr>
+        <p:txBody>
+          <a:bodyPr wrap="square" anchor="t" lIns="36576" rIns="36576" tIns="18288" bIns="18288">
+            <a:spAutoFit/>
+          </a:bodyPr>
+          <a:lstStyle/>
+          <a:p>
+            <a:pPr algn="l"/>
+            <a:r>
+              <a:rPr sz="1300" b="1">
+                <a:solidFill>
+                  <a:srgbClr val="8B5CF6"/>
+                </a:solidFill>
+                <a:latin typeface="Microsoft YaHei"/>
+              </a:rPr>
+              <a:t>如何体验</a:t>
+            </a:r>
+          </a:p>
+        </p:txBody>
+      </p:sp>
+      <p:sp>
+        <p:nvSpPr>
+          <p:cNvPr id="4" name="TextBox 3"/>
+          <p:cNvSpPr txBox="1"/>
+          <p:nvPr/>
+        </p:nvSpPr>
+        <p:spPr>
+          <a:xfrm>
+            <a:off x="548640" y="713232"/>
+            <a:ext cx="11064240" cy="777240"/>
+          </a:xfrm>
+          <a:prstGeom prst="rect">
+            <a:avLst/>
+          </a:prstGeom>
+          <a:noFill/>
+        </p:spPr>
+        <p:txBody>
+          <a:bodyPr wrap="square" anchor="t" lIns="36576" rIns="36576" tIns="18288" bIns="18288">
+            <a:spAutoFit/>
+          </a:bodyPr>
+          <a:lstStyle/>
+          <a:p>
+            <a:pPr algn="l"/>
+            <a:r>
+              <a:rPr sz="3000" b="1">
+                <a:solidFill>
+                  <a:srgbClr val="FFFFFF"/>
+                </a:solidFill>
+                <a:latin typeface="Microsoft YaHei"/>
+              </a:rPr>
+              <a:t>3 步跑通演示（测试网 · 免费）</a:t>
+            </a:r>
+          </a:p>
+        </p:txBody>
+      </p:sp>
+      <p:sp>
+        <p:nvSpPr>
+          <p:cNvPr id="5" name="Rounded Rectangle 4"/>
+          <p:cNvSpPr/>
+          <p:nvPr/>
+        </p:nvSpPr>
+        <p:spPr>
+          <a:xfrm>
+            <a:off x="548640" y="1828800"/>
+            <a:ext cx="11064240" cy="1325880"/>
+          </a:xfrm>
+          <a:prstGeom prst="roundRect">
+            <a:avLst>
+              <a:gd name="adj" fmla="val 10000"/>
+            </a:avLst>
+          </a:prstGeom>
+          <a:solidFill>
+            <a:srgbClr val="221E42"/>
+          </a:solidFill>
+          <a:ln>
+            <a:noFill/>
+          </a:ln>
+          <a:effectLst/>
+        </p:spPr>
+        <p:style>
+          <a:lnRef idx="1">
+            <a:schemeClr val="accent1"/>
+          </a:lnRef>
+          <a:fillRef idx="3">
+            <a:schemeClr val="accent1"/>
+          </a:fillRef>
+          <a:effectRef idx="2">
+            <a:schemeClr val="accent1"/>
+          </a:effectRef>
+          <a:fontRef idx="minor">
+            <a:schemeClr val="lt1"/>
+          </a:fontRef>
+        </p:style>
+        <p:txBody>
+          <a:bodyPr rtlCol="0" anchor="ctr"/>
+          <a:lstStyle/>
+          <a:p>
+            <a:pPr algn="ctr"/>
+          </a:p>
+        </p:txBody>
+      </p:sp>
+      <p:sp>
+        <p:nvSpPr>
+          <p:cNvPr id="6" name="Oval 5"/>
+          <p:cNvSpPr/>
+          <p:nvPr/>
+        </p:nvSpPr>
+        <p:spPr>
+          <a:xfrm>
+            <a:off x="777240" y="2121408"/>
+            <a:ext cx="731520" cy="731520"/>
+          </a:xfrm>
+          <a:prstGeom prst="ellipse">
+            <a:avLst/>
+          </a:prstGeom>
+          <a:solidFill>
+            <a:srgbClr val="22D3EE"/>
+          </a:solidFill>
+          <a:ln>
+            <a:noFill/>
+          </a:ln>
+        </p:spPr>
+        <p:style>
+          <a:lnRef idx="1">
+            <a:schemeClr val="accent1"/>
+          </a:lnRef>
+          <a:fillRef idx="3">
+            <a:schemeClr val="accent1"/>
+          </a:fillRef>
+          <a:effectRef idx="2">
+            <a:schemeClr val="accent1"/>
+          </a:effectRef>
+          <a:fontRef idx="minor">
+            <a:schemeClr val="lt1"/>
+          </a:fontRef>
+        </p:style>
+        <p:txBody>
+          <a:bodyPr rtlCol="0" anchor="ctr"/>
+          <a:lstStyle/>
+          <a:p>
+            <a:pPr algn="ctr"/>
+          </a:p>
+        </p:txBody>
+      </p:sp>
+      <p:sp>
+        <p:nvSpPr>
+          <p:cNvPr id="7" name="TextBox 6"/>
+          <p:cNvSpPr txBox="1"/>
+          <p:nvPr/>
+        </p:nvSpPr>
+        <p:spPr>
+          <a:xfrm>
+            <a:off x="777240" y="2121408"/>
+            <a:ext cx="731520" cy="731520"/>
+          </a:xfrm>
+          <a:prstGeom prst="rect">
+            <a:avLst/>
+          </a:prstGeom>
+          <a:noFill/>
+        </p:spPr>
+        <p:txBody>
+          <a:bodyPr wrap="square" anchor="ctr" lIns="36576" rIns="36576" tIns="18288" bIns="18288">
+            <a:spAutoFit/>
+          </a:bodyPr>
+          <a:lstStyle/>
+          <a:p>
+            <a:pPr algn="ctr"/>
+            <a:r>
+              <a:rPr sz="3000" b="1">
+                <a:solidFill>
+                  <a:srgbClr val="FFFFFF"/>
+                </a:solidFill>
+                <a:latin typeface="Microsoft YaHei"/>
+              </a:rPr>
+              <a:t>1</a:t>
+            </a:r>
+          </a:p>
+        </p:txBody>
+      </p:sp>
+      <p:sp>
+        <p:nvSpPr>
+          <p:cNvPr id="8" name="TextBox 7"/>
+          <p:cNvSpPr txBox="1"/>
+          <p:nvPr/>
+        </p:nvSpPr>
+        <p:spPr>
+          <a:xfrm>
+            <a:off x="1783080" y="1993392"/>
+            <a:ext cx="9509760" cy="457200"/>
+          </a:xfrm>
+          <a:prstGeom prst="rect">
+            <a:avLst/>
+          </a:prstGeom>
+          <a:noFill/>
+        </p:spPr>
+        <p:txBody>
+          <a:bodyPr wrap="square" anchor="t" lIns="36576" rIns="36576" tIns="18288" bIns="18288">
+            <a:spAutoFit/>
+          </a:bodyPr>
+          <a:lstStyle/>
+          <a:p>
+            <a:pPr algn="l"/>
+            <a:r>
+              <a:rPr sz="1900" b="1">
+                <a:solidFill>
+                  <a:srgbClr val="FFFFFF"/>
+                </a:solidFill>
+                <a:latin typeface="Microsoft YaHei"/>
+              </a:rPr>
+              <a:t>连钱包 + 一键加网</a:t>
+            </a:r>
+          </a:p>
+        </p:txBody>
+      </p:sp>
+      <p:sp>
+        <p:nvSpPr>
+          <p:cNvPr id="9" name="TextBox 8"/>
+          <p:cNvSpPr txBox="1"/>
+          <p:nvPr/>
+        </p:nvSpPr>
+        <p:spPr>
+          <a:xfrm>
+            <a:off x="1783080" y="2487168"/>
+            <a:ext cx="9509760" cy="548640"/>
+          </a:xfrm>
+          <a:prstGeom prst="rect">
+            <a:avLst/>
+          </a:prstGeom>
+          <a:noFill/>
+        </p:spPr>
+        <p:txBody>
+          <a:bodyPr wrap="square" anchor="t" lIns="36576" rIns="36576" tIns="18288" bIns="18288">
+            <a:spAutoFit/>
+          </a:bodyPr>
+          <a:lstStyle/>
+          <a:p>
+            <a:pPr algn="l"/>
+            <a:r>
+              <a:rPr sz="1400" b="0">
+                <a:solidFill>
+                  <a:srgbClr val="9CA3B8"/>
+                </a:solidFill>
+                <a:latin typeface="Microsoft YaHei"/>
+              </a:rPr>
+              <a:t>连接 MetaMask/OKX，点「添加网络」自动灌入 Monad 测试网。</a:t>
+            </a:r>
+          </a:p>
+        </p:txBody>
+      </p:sp>
+      <p:sp>
+        <p:nvSpPr>
+          <p:cNvPr id="10" name="Rounded Rectangle 9"/>
+          <p:cNvSpPr/>
+          <p:nvPr/>
+        </p:nvSpPr>
+        <p:spPr>
+          <a:xfrm>
+            <a:off x="548640" y="3337560"/>
+            <a:ext cx="11064240" cy="1325880"/>
+          </a:xfrm>
+          <a:prstGeom prst="roundRect">
+            <a:avLst>
+              <a:gd name="adj" fmla="val 10000"/>
+            </a:avLst>
+          </a:prstGeom>
+          <a:solidFill>
+            <a:srgbClr val="221E42"/>
+          </a:solidFill>
+          <a:ln>
+            <a:noFill/>
+          </a:ln>
+          <a:effectLst/>
+        </p:spPr>
+        <p:style>
+          <a:lnRef idx="1">
+            <a:schemeClr val="accent1"/>
+          </a:lnRef>
+          <a:fillRef idx="3">
+            <a:schemeClr val="accent1"/>
+          </a:fillRef>
+          <a:effectRef idx="2">
+            <a:schemeClr val="accent1"/>
+          </a:effectRef>
+          <a:fontRef idx="minor">
+            <a:schemeClr val="lt1"/>
+          </a:fontRef>
+        </p:style>
+        <p:txBody>
+          <a:bodyPr rtlCol="0" anchor="ctr"/>
+          <a:lstStyle/>
+          <a:p>
+            <a:pPr algn="ctr"/>
+          </a:p>
+        </p:txBody>
+      </p:sp>
+      <p:sp>
+        <p:nvSpPr>
+          <p:cNvPr id="11" name="Oval 10"/>
+          <p:cNvSpPr/>
+          <p:nvPr/>
+        </p:nvSpPr>
+        <p:spPr>
+          <a:xfrm>
+            <a:off x="777240" y="3630168"/>
+            <a:ext cx="731520" cy="731520"/>
+          </a:xfrm>
+          <a:prstGeom prst="ellipse">
+            <a:avLst/>
+          </a:prstGeom>
+          <a:solidFill>
+            <a:srgbClr val="8B5CF6"/>
+          </a:solidFill>
+          <a:ln>
+            <a:noFill/>
+          </a:ln>
+        </p:spPr>
+        <p:style>
+          <a:lnRef idx="1">
+            <a:schemeClr val="accent1"/>
+          </a:lnRef>
+          <a:fillRef idx="3">
+            <a:schemeClr val="accent1"/>
+          </a:fillRef>
+          <a:effectRef idx="2">
+            <a:schemeClr val="accent1"/>
+          </a:effectRef>
+          <a:fontRef idx="minor">
+            <a:schemeClr val="lt1"/>
+          </a:fontRef>
+        </p:style>
+        <p:txBody>
+          <a:bodyPr rtlCol="0" anchor="ctr"/>
+          <a:lstStyle/>
+          <a:p>
+            <a:pPr algn="ctr"/>
+          </a:p>
+        </p:txBody>
+      </p:sp>
+      <p:sp>
+        <p:nvSpPr>
+          <p:cNvPr id="12" name="TextBox 11"/>
+          <p:cNvSpPr txBox="1"/>
+          <p:nvPr/>
+        </p:nvSpPr>
+        <p:spPr>
+          <a:xfrm>
+            <a:off x="777240" y="3630168"/>
+            <a:ext cx="731520" cy="731520"/>
+          </a:xfrm>
+          <a:prstGeom prst="rect">
+            <a:avLst/>
+          </a:prstGeom>
+          <a:noFill/>
+        </p:spPr>
+        <p:txBody>
+          <a:bodyPr wrap="square" anchor="ctr" lIns="36576" rIns="36576" tIns="18288" bIns="18288">
+            <a:spAutoFit/>
+          </a:bodyPr>
+          <a:lstStyle/>
+          <a:p>
+            <a:pPr algn="ctr"/>
+            <a:r>
+              <a:rPr sz="3000" b="1">
+                <a:solidFill>
+                  <a:srgbClr val="FFFFFF"/>
+                </a:solidFill>
+                <a:latin typeface="Microsoft YaHei"/>
+              </a:rPr>
+              <a:t>2</a:t>
+            </a:r>
+          </a:p>
+        </p:txBody>
+      </p:sp>
+      <p:sp>
+        <p:nvSpPr>
+          <p:cNvPr id="13" name="TextBox 12"/>
+          <p:cNvSpPr txBox="1"/>
+          <p:nvPr/>
+        </p:nvSpPr>
+        <p:spPr>
+          <a:xfrm>
+            <a:off x="1783080" y="3502152"/>
+            <a:ext cx="9509760" cy="457200"/>
+          </a:xfrm>
+          <a:prstGeom prst="rect">
+            <a:avLst/>
+          </a:prstGeom>
+          <a:noFill/>
+        </p:spPr>
+        <p:txBody>
+          <a:bodyPr wrap="square" anchor="t" lIns="36576" rIns="36576" tIns="18288" bIns="18288">
+            <a:spAutoFit/>
+          </a:bodyPr>
+          <a:lstStyle/>
+          <a:p>
+            <a:pPr algn="l"/>
+            <a:r>
+              <a:rPr sz="1900" b="1">
+                <a:solidFill>
+                  <a:srgbClr val="FFFFFF"/>
+                </a:solidFill>
+                <a:latin typeface="Microsoft YaHei"/>
+              </a:rPr>
+              <a:t>领免费测试币</a:t>
+            </a:r>
+          </a:p>
+        </p:txBody>
+      </p:sp>
+      <p:sp>
+        <p:nvSpPr>
+          <p:cNvPr id="14" name="TextBox 13"/>
+          <p:cNvSpPr txBox="1"/>
+          <p:nvPr/>
+        </p:nvSpPr>
+        <p:spPr>
+          <a:xfrm>
+            <a:off x="1783080" y="3995928"/>
+            <a:ext cx="9509760" cy="548640"/>
+          </a:xfrm>
+          <a:prstGeom prst="rect">
+            <a:avLst/>
+          </a:prstGeom>
+          <a:noFill/>
+        </p:spPr>
+        <p:txBody>
+          <a:bodyPr wrap="square" anchor="t" lIns="36576" rIns="36576" tIns="18288" bIns="18288">
+            <a:spAutoFit/>
+          </a:bodyPr>
+          <a:lstStyle/>
+          <a:p>
+            <a:pPr algn="l"/>
+            <a:r>
+              <a:rPr sz="1400" b="0">
+                <a:solidFill>
+                  <a:srgbClr val="9CA3B8"/>
+                </a:solidFill>
+                <a:latin typeface="Microsoft YaHei"/>
+              </a:rPr>
+              <a:t>打开 faucet.monad.xyz，领取免费测试 MON（无真实价值）。</a:t>
+            </a:r>
+          </a:p>
+        </p:txBody>
+      </p:sp>
+      <p:sp>
+        <p:nvSpPr>
+          <p:cNvPr id="15" name="Rounded Rectangle 14"/>
+          <p:cNvSpPr/>
+          <p:nvPr/>
+        </p:nvSpPr>
+        <p:spPr>
+          <a:xfrm>
+            <a:off x="548640" y="4846320"/>
+            <a:ext cx="11064240" cy="1325880"/>
+          </a:xfrm>
+          <a:prstGeom prst="roundRect">
+            <a:avLst>
+              <a:gd name="adj" fmla="val 10000"/>
+            </a:avLst>
+          </a:prstGeom>
+          <a:solidFill>
+            <a:srgbClr val="221E42"/>
+          </a:solidFill>
+          <a:ln>
+            <a:noFill/>
+          </a:ln>
+          <a:effectLst/>
+        </p:spPr>
+        <p:style>
+          <a:lnRef idx="1">
+            <a:schemeClr val="accent1"/>
+          </a:lnRef>
+          <a:fillRef idx="3">
+            <a:schemeClr val="accent1"/>
+          </a:fillRef>
+          <a:effectRef idx="2">
+            <a:schemeClr val="accent1"/>
+          </a:effectRef>
+          <a:fontRef idx="minor">
+            <a:schemeClr val="lt1"/>
+          </a:fontRef>
+        </p:style>
+        <p:txBody>
+          <a:bodyPr rtlCol="0" anchor="ctr"/>
+          <a:lstStyle/>
+          <a:p>
+            <a:pPr algn="ctr"/>
+          </a:p>
+        </p:txBody>
+      </p:sp>
+      <p:sp>
+        <p:nvSpPr>
+          <p:cNvPr id="16" name="Oval 15"/>
+          <p:cNvSpPr/>
           <p:nvPr/>
         </p:nvSpPr>
         <p:spPr>
@@ -5010,13 +5884,56 @@
             <a:off x="777240" y="5138928"/>
             <a:ext cx="731520" cy="731520"/>
           </a:xfrm>
-          <a:prstGeom prst="rect">
-            <a:avLst/>
-          </a:prstGeom>
-          <a:noFill/>
-        </p:spPr>
-        <p:txBody>
-          <a:bodyPr wrap="square" lIns="36576" tIns="18288" rIns="36576" bIns="18288" anchor="ctr">
+          <a:prstGeom prst="ellipse">
+            <a:avLst/>
+          </a:prstGeom>
+          <a:solidFill>
+            <a:srgbClr val="F59E0B"/>
+          </a:solidFill>
+          <a:ln>
+            <a:noFill/>
+          </a:ln>
+        </p:spPr>
+        <p:style>
+          <a:lnRef idx="1">
+            <a:schemeClr val="accent1"/>
+          </a:lnRef>
+          <a:fillRef idx="3">
+            <a:schemeClr val="accent1"/>
+          </a:fillRef>
+          <a:effectRef idx="2">
+            <a:schemeClr val="accent1"/>
+          </a:effectRef>
+          <a:fontRef idx="minor">
+            <a:schemeClr val="lt1"/>
+          </a:fontRef>
+        </p:style>
+        <p:txBody>
+          <a:bodyPr rtlCol="0" anchor="ctr"/>
+          <a:lstStyle/>
+          <a:p>
+            <a:pPr algn="ctr"/>
+          </a:p>
+        </p:txBody>
+      </p:sp>
+      <p:sp>
+        <p:nvSpPr>
+          <p:cNvPr id="17" name="TextBox 16"/>
+          <p:cNvSpPr txBox="1"/>
+          <p:nvPr/>
+        </p:nvSpPr>
+        <p:spPr>
+          <a:xfrm>
+            <a:off x="777240" y="5138928"/>
+            <a:ext cx="731520" cy="731520"/>
+          </a:xfrm>
+          <a:prstGeom prst="rect">
+            <a:avLst/>
+          </a:prstGeom>
+          <a:noFill/>
+        </p:spPr>
+        <p:txBody>
+          <a:bodyPr wrap="square" anchor="ctr" lIns="36576" rIns="36576" tIns="18288" bIns="18288">
             <a:spAutoFit/>
           </a:bodyPr>
           <a:lstStyle/>
@@ -5027,16 +5944,10 @@
                 <a:solidFill>
                   <a:srgbClr val="FFFFFF"/>
                 </a:solidFill>
-                <a:latin typeface="微软雅黑" panose="020B0503020204020204" charset="-122"/>
+                <a:latin typeface="Microsoft YaHei"/>
               </a:rPr>
               <a:t>3</a:t>
             </a:r>
-            <a:endParaRPr sz="3000" b="1">
-              <a:solidFill>
-                <a:srgbClr val="FFFFFF"/>
-              </a:solidFill>
-              <a:latin typeface="微软雅黑" panose="020B0503020204020204" charset="-122"/>
-            </a:endParaRPr>
           </a:p>
         </p:txBody>
       </p:sp>
@@ -5057,7 +5968,7 @@
           <a:noFill/>
         </p:spPr>
         <p:txBody>
-          <a:bodyPr wrap="square" lIns="36576" tIns="18288" rIns="36576" bIns="18288" anchor="t">
+          <a:bodyPr wrap="square" anchor="t" lIns="36576" rIns="36576" tIns="18288" bIns="18288">
             <a:spAutoFit/>
           </a:bodyPr>
           <a:lstStyle/>
@@ -5068,16 +5979,10 @@
                 <a:solidFill>
                   <a:srgbClr val="FFFFFF"/>
                 </a:solidFill>
-                <a:latin typeface="微软雅黑" panose="020B0503020204020204" charset="-122"/>
+                <a:latin typeface="Microsoft YaHei"/>
               </a:rPr>
               <a:t>对话 → 模拟 → 签名</a:t>
             </a:r>
-            <a:endParaRPr sz="1900" b="1">
-              <a:solidFill>
-                <a:srgbClr val="FFFFFF"/>
-              </a:solidFill>
-              <a:latin typeface="微软雅黑" panose="020B0503020204020204" charset="-122"/>
-            </a:endParaRPr>
           </a:p>
         </p:txBody>
       </p:sp>
@@ -5098,7 +6003,7 @@
           <a:noFill/>
         </p:spPr>
         <p:txBody>
-          <a:bodyPr wrap="square" lIns="36576" tIns="18288" rIns="36576" bIns="18288" anchor="t">
+          <a:bodyPr wrap="square" anchor="t" lIns="36576" rIns="36576" tIns="18288" bIns="18288">
             <a:spAutoFit/>
           </a:bodyPr>
           <a:lstStyle/>
@@ -5109,16 +6014,10 @@
                 <a:solidFill>
                   <a:srgbClr val="9CA3B8"/>
                 </a:solidFill>
-                <a:latin typeface="微软雅黑" panose="020B0503020204020204" charset="-122"/>
+                <a:latin typeface="Microsoft YaHei"/>
               </a:rPr>
               <a:t>点建议按钮触发模拟，看透镜预览，签名后到 MonadScan 验证。</a:t>
             </a:r>
-            <a:endParaRPr sz="1400" b="0">
-              <a:solidFill>
-                <a:srgbClr val="9CA3B8"/>
-              </a:solidFill>
-              <a:latin typeface="微软雅黑" panose="020B0503020204020204" charset="-122"/>
-            </a:endParaRPr>
           </a:p>
         </p:txBody>
       </p:sp>
@@ -5187,7 +6086,7 @@
           <a:noFill/>
         </p:spPr>
         <p:txBody>
-          <a:bodyPr wrap="square" lIns="36576" tIns="18288" rIns="36576" bIns="18288" anchor="ctr">
+          <a:bodyPr wrap="square" anchor="ctr" lIns="36576" rIns="36576" tIns="18288" bIns="18288">
             <a:spAutoFit/>
           </a:bodyPr>
           <a:lstStyle/>
@@ -5198,16 +6097,10 @@
                 <a:solidFill>
                   <a:srgbClr val="22D3EE"/>
                 </a:solidFill>
-                <a:latin typeface="微软雅黑" panose="020B0503020204020204" charset="-122"/>
+                <a:latin typeface="Microsoft YaHei"/>
               </a:rPr>
               <a:t>提示：测试网代币免费、无真实价值，可放心演示每一步。</a:t>
             </a:r>
-            <a:endParaRPr sz="1300" b="0">
-              <a:solidFill>
-                <a:srgbClr val="22D3EE"/>
-              </a:solidFill>
-              <a:latin typeface="微软雅黑" panose="020B0503020204020204" charset="-122"/>
-            </a:endParaRPr>
           </a:p>
         </p:txBody>
       </p:sp>
@@ -5228,7 +6121,7 @@
           <a:noFill/>
         </p:spPr>
         <p:txBody>
-          <a:bodyPr wrap="square" lIns="36576" tIns="18288" rIns="36576" bIns="18288" anchor="t">
+          <a:bodyPr wrap="square" anchor="t" lIns="36576" rIns="36576" tIns="18288" bIns="18288">
             <a:spAutoFit/>
           </a:bodyPr>
           <a:lstStyle/>
@@ -5239,16 +6132,10 @@
                 <a:solidFill>
                   <a:srgbClr val="9CA3B8"/>
                 </a:solidFill>
-                <a:latin typeface="微软雅黑" panose="020B0503020204020204" charset="-122"/>
+                <a:latin typeface="Microsoft YaHei"/>
               </a:rPr>
               <a:t>MonadLens · 看清网络，看清后果</a:t>
             </a:r>
-            <a:endParaRPr sz="1000" b="0">
-              <a:solidFill>
-                <a:srgbClr val="9CA3B8"/>
-              </a:solidFill>
-              <a:latin typeface="微软雅黑" panose="020B0503020204020204" charset="-122"/>
-            </a:endParaRPr>
           </a:p>
         </p:txBody>
       </p:sp>
@@ -5269,7 +6156,7 @@
           <a:noFill/>
         </p:spPr>
         <p:txBody>
-          <a:bodyPr wrap="square" lIns="36576" tIns="18288" rIns="36576" bIns="18288" anchor="t">
+          <a:bodyPr wrap="square" anchor="t" lIns="36576" rIns="36576" tIns="18288" bIns="18288">
             <a:spAutoFit/>
           </a:bodyPr>
           <a:lstStyle/>
@@ -5280,16 +6167,10 @@
                 <a:solidFill>
                   <a:srgbClr val="9CA3B8"/>
                 </a:solidFill>
-                <a:latin typeface="微软雅黑" panose="020B0503020204020204" charset="-122"/>
-              </a:rPr>
-              <a:t>11</a:t>
-            </a:r>
-            <a:endParaRPr sz="1000" b="0">
-              <a:solidFill>
-                <a:srgbClr val="9CA3B8"/>
-              </a:solidFill>
-              <a:latin typeface="微软雅黑" panose="020B0503020204020204" charset="-122"/>
-            </a:endParaRPr>
+                <a:latin typeface="Microsoft YaHei"/>
+              </a:rPr>
+              <a:t>13</a:t>
+            </a:r>
           </a:p>
         </p:txBody>
       </p:sp>
@@ -5301,8 +6182,8 @@
 </p:sld>
 </file>
 
-<file path=ppt/slides/slide12.xml><?xml version="1.0" encoding="utf-8"?>
-<p:sld xmlns:a="http://schemas.openxmlformats.org/drawingml/2006/main" xmlns:r="http://schemas.openxmlformats.org/officeDocument/2006/relationships" xmlns:p="http://schemas.openxmlformats.org/presentationml/2006/main">
+<file path=ppt/slides/slide13.xml><?xml version="1.0" encoding="utf-8"?>
+<p:sld xmlns:a="http://schemas.openxmlformats.org/drawingml/2006/main" xmlns:p="http://schemas.openxmlformats.org/presentationml/2006/main" xmlns:r="http://schemas.openxmlformats.org/officeDocument/2006/relationships">
   <p:cSld>
     <p:spTree>
       <p:nvGrpSpPr>
@@ -5418,7 +6299,7 @@
           <a:noFill/>
         </p:spPr>
         <p:txBody>
-          <a:bodyPr wrap="square" lIns="36576" tIns="18288" rIns="36576" bIns="18288" anchor="t">
+          <a:bodyPr wrap="square" anchor="t" lIns="36576" rIns="36576" tIns="18288" bIns="18288">
             <a:spAutoFit/>
           </a:bodyPr>
           <a:lstStyle/>
@@ -5429,16 +6310,10 @@
                 <a:solidFill>
                   <a:srgbClr val="FFFFFF"/>
                 </a:solidFill>
-                <a:latin typeface="微软雅黑" panose="020B0503020204020204" charset="-122"/>
+                <a:latin typeface="Microsoft YaHei"/>
               </a:rPr>
               <a:t>看清后果，才能放心签名</a:t>
             </a:r>
-            <a:endParaRPr sz="4400" b="1">
-              <a:solidFill>
-                <a:srgbClr val="FFFFFF"/>
-              </a:solidFill>
-              <a:latin typeface="微软雅黑" panose="020B0503020204020204" charset="-122"/>
-            </a:endParaRPr>
           </a:p>
         </p:txBody>
       </p:sp>
@@ -5451,15 +6326,15 @@
         <p:spPr>
           <a:xfrm>
             <a:off x="822960" y="3474720"/>
-            <a:ext cx="10515600" cy="342900"/>
-          </a:xfrm>
-          <a:prstGeom prst="rect">
-            <a:avLst/>
-          </a:prstGeom>
-          <a:noFill/>
-        </p:spPr>
-        <p:txBody>
-          <a:bodyPr wrap="square" lIns="36576" tIns="18288" rIns="36576" bIns="18288" anchor="t">
+            <a:ext cx="10515600" cy="640080"/>
+          </a:xfrm>
+          <a:prstGeom prst="rect">
+            <a:avLst/>
+          </a:prstGeom>
+          <a:noFill/>
+        </p:spPr>
+        <p:txBody>
+          <a:bodyPr wrap="square" anchor="t" lIns="36576" rIns="36576" tIns="18288" bIns="18288">
             <a:spAutoFit/>
           </a:bodyPr>
           <a:lstStyle/>
@@ -5470,34 +6345,10 @@
                 <a:solidFill>
                   <a:srgbClr val="8B5CF6"/>
                 </a:solidFill>
-                <a:latin typeface="微软雅黑" panose="020B0503020204020204" charset="-122"/>
-              </a:rPr>
-              <a:t>MonadLens </a:t>
-            </a:r>
-            <a:r>
-              <a:rPr lang="zh-CN" altLang="en-US" sz="2000" b="0">
-                <a:solidFill>
-                  <a:srgbClr val="8B5CF6"/>
-                </a:solidFill>
-                <a:latin typeface="微软雅黑" panose="020B0503020204020204" charset="-122"/>
-              </a:rPr>
-              <a:t>· 透视链</a:t>
-            </a:r>
-            <a:r>
-              <a:rPr sz="2000" b="0">
-                <a:solidFill>
-                  <a:srgbClr val="8B5CF6"/>
-                </a:solidFill>
-                <a:latin typeface="微软雅黑" panose="020B0503020204020204" charset="-122"/>
-              </a:rPr>
-              <a:t>— 让你的每一笔签名都心里有数</a:t>
-            </a:r>
-            <a:endParaRPr sz="2000" b="0">
-              <a:solidFill>
-                <a:srgbClr val="8B5CF6"/>
-              </a:solidFill>
-              <a:latin typeface="微软雅黑" panose="020B0503020204020204" charset="-122"/>
-            </a:endParaRPr>
+                <a:latin typeface="Microsoft YaHei"/>
+              </a:rPr>
+              <a:t>MonadLens — 让你的每一笔签名都心里有数</a:t>
+            </a:r>
           </a:p>
         </p:txBody>
       </p:sp>
@@ -5518,7 +6369,7 @@
           <a:noFill/>
         </p:spPr>
         <p:txBody>
-          <a:bodyPr wrap="square" lIns="36576" tIns="18288" rIns="36576" bIns="18288" anchor="t">
+          <a:bodyPr wrap="square" anchor="t" lIns="36576" rIns="36576" tIns="18288" bIns="18288">
             <a:spAutoFit/>
           </a:bodyPr>
           <a:lstStyle/>
@@ -5529,16 +6380,10 @@
                 <a:solidFill>
                   <a:srgbClr val="9CA3B8"/>
                 </a:solidFill>
-                <a:latin typeface="微软雅黑" panose="020B0503020204020204" charset="-122"/>
-              </a:rPr>
-              <a:t>致谢  LXDAO × Monad  黑客松</a:t>
-            </a:r>
-            <a:endParaRPr sz="1500" b="0">
-              <a:solidFill>
-                <a:srgbClr val="9CA3B8"/>
-              </a:solidFill>
-              <a:latin typeface="微软雅黑" panose="020B0503020204020204" charset="-122"/>
-            </a:endParaRPr>
+                <a:latin typeface="Microsoft YaHei"/>
+              </a:rPr>
+              <a:t>致谢  Monad Metropolis  黑客松</a:t>
+            </a:r>
           </a:p>
         </p:txBody>
       </p:sp>
@@ -5551,7 +6396,7 @@
 </file>
 
 <file path=ppt/slides/slide2.xml><?xml version="1.0" encoding="utf-8"?>
-<p:sld xmlns:a="http://schemas.openxmlformats.org/drawingml/2006/main" xmlns:r="http://schemas.openxmlformats.org/officeDocument/2006/relationships" xmlns:p="http://schemas.openxmlformats.org/presentationml/2006/main">
+<p:sld xmlns:a="http://schemas.openxmlformats.org/drawingml/2006/main" xmlns:p="http://schemas.openxmlformats.org/presentationml/2006/main" xmlns:r="http://schemas.openxmlformats.org/officeDocument/2006/relationships">
   <p:cSld>
     <p:spTree>
       <p:nvGrpSpPr>
@@ -5621,7 +6466,7 @@
           <a:noFill/>
         </p:spPr>
         <p:txBody>
-          <a:bodyPr wrap="square" lIns="36576" tIns="18288" rIns="36576" bIns="18288" anchor="t">
+          <a:bodyPr wrap="square" anchor="t" lIns="36576" rIns="36576" tIns="18288" bIns="18288">
             <a:spAutoFit/>
           </a:bodyPr>
           <a:lstStyle/>
@@ -5632,16 +6477,10 @@
                 <a:solidFill>
                   <a:srgbClr val="8B5CF6"/>
                 </a:solidFill>
-                <a:latin typeface="微软雅黑" panose="020B0503020204020204" charset="-122"/>
+                <a:latin typeface="Microsoft YaHei"/>
               </a:rPr>
               <a:t>问题背景</a:t>
             </a:r>
-            <a:endParaRPr sz="1300" b="1">
-              <a:solidFill>
-                <a:srgbClr val="8B5CF6"/>
-              </a:solidFill>
-              <a:latin typeface="微软雅黑" panose="020B0503020204020204" charset="-122"/>
-            </a:endParaRPr>
           </a:p>
         </p:txBody>
       </p:sp>
@@ -5662,7 +6501,7 @@
           <a:noFill/>
         </p:spPr>
         <p:txBody>
-          <a:bodyPr wrap="square" lIns="36576" tIns="18288" rIns="36576" bIns="18288" anchor="t">
+          <a:bodyPr wrap="square" anchor="t" lIns="36576" rIns="36576" tIns="18288" bIns="18288">
             <a:spAutoFit/>
           </a:bodyPr>
           <a:lstStyle/>
@@ -5673,16 +6512,10 @@
                 <a:solidFill>
                   <a:srgbClr val="FFFFFF"/>
                 </a:solidFill>
-                <a:latin typeface="微软雅黑" panose="020B0503020204020204" charset="-122"/>
+                <a:latin typeface="Microsoft YaHei"/>
               </a:rPr>
               <a:t>链上交易的「盲签」之痛</a:t>
             </a:r>
-            <a:endParaRPr sz="3000" b="1">
-              <a:solidFill>
-                <a:srgbClr val="FFFFFF"/>
-              </a:solidFill>
-              <a:latin typeface="微软雅黑" panose="020B0503020204020204" charset="-122"/>
-            </a:endParaRPr>
           </a:p>
         </p:txBody>
       </p:sp>
@@ -5793,7 +6626,7 @@
           <a:noFill/>
         </p:spPr>
         <p:txBody>
-          <a:bodyPr wrap="square" lIns="36576" tIns="18288" rIns="36576" bIns="18288" anchor="t">
+          <a:bodyPr wrap="square" anchor="t" lIns="36576" rIns="36576" tIns="18288" bIns="18288">
             <a:spAutoFit/>
           </a:bodyPr>
           <a:lstStyle/>
@@ -5804,16 +6637,10 @@
                 <a:solidFill>
                   <a:srgbClr val="FFFFFF"/>
                 </a:solidFill>
-                <a:latin typeface="微软雅黑" panose="020B0503020204020204" charset="-122"/>
-              </a:rPr>
-              <a:t>常见的 5 种风险</a:t>
-            </a:r>
-            <a:endParaRPr sz="2000" b="1">
-              <a:solidFill>
-                <a:srgbClr val="FFFFFF"/>
-              </a:solidFill>
-              <a:latin typeface="微软雅黑" panose="020B0503020204020204" charset="-122"/>
-            </a:endParaRPr>
+                <a:latin typeface="Microsoft YaHei"/>
+              </a:rPr>
+              <a:t>链上交易的真实风险</a:t>
+            </a:r>
           </a:p>
         </p:txBody>
       </p:sp>
@@ -5834,7 +6661,7 @@
           <a:noFill/>
         </p:spPr>
         <p:txBody>
-          <a:bodyPr wrap="square" lIns="36576" tIns="18288" rIns="36576" bIns="18288" anchor="t">
+          <a:bodyPr wrap="square" anchor="t" lIns="36576" rIns="36576" tIns="18288" bIns="18288">
             <a:spAutoFit/>
           </a:bodyPr>
           <a:lstStyle/>
@@ -5849,16 +6676,10 @@
                 <a:solidFill>
                   <a:srgbClr val="E9E9F2"/>
                 </a:solidFill>
-                <a:latin typeface="微软雅黑" panose="020B0503020204020204" charset="-122"/>
+                <a:latin typeface="Microsoft YaHei"/>
               </a:rPr>
               <a:t>•  授权无感知：点一下「授权」，可能交出无限额度</a:t>
             </a:r>
-            <a:endParaRPr sz="1600" b="0">
-              <a:solidFill>
-                <a:srgbClr val="E9E9F2"/>
-              </a:solidFill>
-              <a:latin typeface="微软雅黑" panose="020B0503020204020204" charset="-122"/>
-            </a:endParaRPr>
           </a:p>
           <a:p>
             <a:pPr algn="l">
@@ -5871,16 +6692,10 @@
                 <a:solidFill>
                   <a:srgbClr val="E9E9F2"/>
                 </a:solidFill>
-                <a:latin typeface="微软雅黑" panose="020B0503020204020204" charset="-122"/>
+                <a:latin typeface="Microsoft YaHei"/>
               </a:rPr>
               <a:t>•  收款方被掉包：看似转给朋友，实际转给黑客地址</a:t>
             </a:r>
-            <a:endParaRPr sz="1600" b="0">
-              <a:solidFill>
-                <a:srgbClr val="E9E9F2"/>
-              </a:solidFill>
-              <a:latin typeface="微软雅黑" panose="020B0503020204020204" charset="-122"/>
-            </a:endParaRPr>
           </a:p>
           <a:p>
             <a:pPr algn="l">
@@ -5893,16 +6708,10 @@
                 <a:solidFill>
                   <a:srgbClr val="E9E9F2"/>
                 </a:solidFill>
-                <a:latin typeface="微软雅黑" panose="020B0503020204020204" charset="-122"/>
+                <a:latin typeface="Microsoft YaHei"/>
               </a:rPr>
               <a:t>•  金额被膨胀：1 MON 变 100 MON，签名时已晚</a:t>
             </a:r>
-            <a:endParaRPr sz="1600" b="0">
-              <a:solidFill>
-                <a:srgbClr val="E9E9F2"/>
-              </a:solidFill>
-              <a:latin typeface="微软雅黑" panose="020B0503020204020204" charset="-122"/>
-            </a:endParaRPr>
           </a:p>
           <a:p>
             <a:pPr algn="l">
@@ -5915,16 +6724,10 @@
                 <a:solidFill>
                   <a:srgbClr val="E9E9F2"/>
                 </a:solidFill>
-                <a:latin typeface="微软雅黑" panose="020B0503020204020204" charset="-122"/>
+                <a:latin typeface="Microsoft YaHei"/>
               </a:rPr>
               <a:t>•  夹带授权：一笔操作里偷偷塞进授权调用</a:t>
             </a:r>
-            <a:endParaRPr sz="1600" b="0">
-              <a:solidFill>
-                <a:srgbClr val="E9E9F2"/>
-              </a:solidFill>
-              <a:latin typeface="微软雅黑" panose="020B0503020204020204" charset="-122"/>
-            </a:endParaRPr>
           </a:p>
           <a:p>
             <a:pPr algn="l">
@@ -5937,16 +6740,10 @@
                 <a:solidFill>
                   <a:srgbClr val="E9E9F2"/>
                 </a:solidFill>
-                <a:latin typeface="微软雅黑" panose="020B0503020204020204" charset="-122"/>
+                <a:latin typeface="Microsoft YaHei"/>
               </a:rPr>
               <a:t>•  签名即失控：交易上链不可逆，错了追不回</a:t>
             </a:r>
-            <a:endParaRPr sz="1600" b="0">
-              <a:solidFill>
-                <a:srgbClr val="E9E9F2"/>
-              </a:solidFill>
-              <a:latin typeface="微软雅黑" panose="020B0503020204020204" charset="-122"/>
-            </a:endParaRPr>
           </a:p>
         </p:txBody>
       </p:sp>
@@ -6059,7 +6856,7 @@
           <a:noFill/>
         </p:spPr>
         <p:txBody>
-          <a:bodyPr wrap="square" lIns="36576" tIns="18288" rIns="36576" bIns="18288" anchor="t">
+          <a:bodyPr wrap="square" anchor="t" lIns="36576" rIns="36576" tIns="18288" bIns="18288">
             <a:spAutoFit/>
           </a:bodyPr>
           <a:lstStyle/>
@@ -6070,16 +6867,10 @@
                 <a:solidFill>
                   <a:srgbClr val="F59E0B"/>
                 </a:solidFill>
-                <a:latin typeface="微软雅黑" panose="020B0503020204020204" charset="-122"/>
+                <a:latin typeface="Microsoft YaHei"/>
               </a:rPr>
               <a:t>真正的后果</a:t>
             </a:r>
-            <a:endParaRPr sz="2000" b="1">
-              <a:solidFill>
-                <a:srgbClr val="F59E0B"/>
-              </a:solidFill>
-              <a:latin typeface="微软雅黑" panose="020B0503020204020204" charset="-122"/>
-            </a:endParaRPr>
           </a:p>
         </p:txBody>
       </p:sp>
@@ -6100,7 +6891,7 @@
           <a:noFill/>
         </p:spPr>
         <p:txBody>
-          <a:bodyPr wrap="square" lIns="36576" tIns="18288" rIns="36576" bIns="18288" anchor="ctr">
+          <a:bodyPr wrap="square" anchor="ctr" lIns="36576" rIns="36576" tIns="18288" bIns="18288">
             <a:spAutoFit/>
           </a:bodyPr>
           <a:lstStyle/>
@@ -6111,16 +6902,10 @@
                 <a:solidFill>
                   <a:srgbClr val="EF4444"/>
                 </a:solidFill>
-                <a:latin typeface="微软雅黑" panose="020B0503020204020204" charset="-122"/>
+                <a:latin typeface="Microsoft YaHei"/>
               </a:rPr>
               <a:t>0</a:t>
             </a:r>
-            <a:endParaRPr sz="8000" b="1">
-              <a:solidFill>
-                <a:srgbClr val="EF4444"/>
-              </a:solidFill>
-              <a:latin typeface="微软雅黑" panose="020B0503020204020204" charset="-122"/>
-            </a:endParaRPr>
           </a:p>
         </p:txBody>
       </p:sp>
@@ -6141,7 +6926,7 @@
           <a:noFill/>
         </p:spPr>
         <p:txBody>
-          <a:bodyPr wrap="square" lIns="36576" tIns="18288" rIns="36576" bIns="18288" anchor="t">
+          <a:bodyPr wrap="square" anchor="t" lIns="36576" rIns="36576" tIns="18288" bIns="18288">
             <a:spAutoFit/>
           </a:bodyPr>
           <a:lstStyle/>
@@ -6152,16 +6937,10 @@
                 <a:solidFill>
                   <a:srgbClr val="9CA3B8"/>
                 </a:solidFill>
-                <a:latin typeface="微软雅黑" panose="020B0503020204020204" charset="-122"/>
+                <a:latin typeface="Microsoft YaHei"/>
               </a:rPr>
               <a:t>后悔药</a:t>
             </a:r>
-            <a:endParaRPr sz="1800" b="0">
-              <a:solidFill>
-                <a:srgbClr val="9CA3B8"/>
-              </a:solidFill>
-              <a:latin typeface="微软雅黑" panose="020B0503020204020204" charset="-122"/>
-            </a:endParaRPr>
           </a:p>
         </p:txBody>
       </p:sp>
@@ -6182,7 +6961,7 @@
           <a:noFill/>
         </p:spPr>
         <p:txBody>
-          <a:bodyPr wrap="square" lIns="36576" tIns="18288" rIns="36576" bIns="18288" anchor="t">
+          <a:bodyPr wrap="square" anchor="t" lIns="36576" rIns="36576" tIns="18288" bIns="18288">
             <a:spAutoFit/>
           </a:bodyPr>
           <a:lstStyle/>
@@ -6197,16 +6976,10 @@
                 <a:solidFill>
                   <a:srgbClr val="E9E9F2"/>
                 </a:solidFill>
-                <a:latin typeface="微软雅黑" panose="020B0503020204020204" charset="-122"/>
+                <a:latin typeface="Microsoft YaHei"/>
               </a:rPr>
               <a:t>用户往往在签名之后，才发现资产已经被转走。</a:t>
             </a:r>
-            <a:endParaRPr sz="1500" b="0">
-              <a:solidFill>
-                <a:srgbClr val="E9E9F2"/>
-              </a:solidFill>
-              <a:latin typeface="微软雅黑" panose="020B0503020204020204" charset="-122"/>
-            </a:endParaRPr>
           </a:p>
         </p:txBody>
       </p:sp>
@@ -6227,7 +7000,7 @@
           <a:noFill/>
         </p:spPr>
         <p:txBody>
-          <a:bodyPr wrap="square" lIns="36576" tIns="18288" rIns="36576" bIns="18288" anchor="t">
+          <a:bodyPr wrap="square" anchor="t" lIns="36576" rIns="36576" tIns="18288" bIns="18288">
             <a:spAutoFit/>
           </a:bodyPr>
           <a:lstStyle/>
@@ -6238,16 +7011,10 @@
                 <a:solidFill>
                   <a:srgbClr val="9CA3B8"/>
                 </a:solidFill>
-                <a:latin typeface="微软雅黑" panose="020B0503020204020204" charset="-122"/>
+                <a:latin typeface="Microsoft YaHei"/>
               </a:rPr>
               <a:t>MonadLens · 看清网络，看清后果</a:t>
             </a:r>
-            <a:endParaRPr sz="1000" b="0">
-              <a:solidFill>
-                <a:srgbClr val="9CA3B8"/>
-              </a:solidFill>
-              <a:latin typeface="微软雅黑" panose="020B0503020204020204" charset="-122"/>
-            </a:endParaRPr>
           </a:p>
         </p:txBody>
       </p:sp>
@@ -6268,7 +7035,7 @@
           <a:noFill/>
         </p:spPr>
         <p:txBody>
-          <a:bodyPr wrap="square" lIns="36576" tIns="18288" rIns="36576" bIns="18288" anchor="t">
+          <a:bodyPr wrap="square" anchor="t" lIns="36576" rIns="36576" tIns="18288" bIns="18288">
             <a:spAutoFit/>
           </a:bodyPr>
           <a:lstStyle/>
@@ -6279,16 +7046,10 @@
                 <a:solidFill>
                   <a:srgbClr val="9CA3B8"/>
                 </a:solidFill>
-                <a:latin typeface="微软雅黑" panose="020B0503020204020204" charset="-122"/>
+                <a:latin typeface="Microsoft YaHei"/>
               </a:rPr>
               <a:t>2</a:t>
             </a:r>
-            <a:endParaRPr sz="1000" b="0">
-              <a:solidFill>
-                <a:srgbClr val="9CA3B8"/>
-              </a:solidFill>
-              <a:latin typeface="微软雅黑" panose="020B0503020204020204" charset="-122"/>
-            </a:endParaRPr>
           </a:p>
         </p:txBody>
       </p:sp>
@@ -6301,7 +7062,7 @@
 </file>
 
 <file path=ppt/slides/slide3.xml><?xml version="1.0" encoding="utf-8"?>
-<p:sld xmlns:a="http://schemas.openxmlformats.org/drawingml/2006/main" xmlns:r="http://schemas.openxmlformats.org/officeDocument/2006/relationships" xmlns:p="http://schemas.openxmlformats.org/presentationml/2006/main">
+<p:sld xmlns:a="http://schemas.openxmlformats.org/drawingml/2006/main" xmlns:p="http://schemas.openxmlformats.org/presentationml/2006/main" xmlns:r="http://schemas.openxmlformats.org/officeDocument/2006/relationships">
   <p:cSld>
     <p:spTree>
       <p:nvGrpSpPr>
@@ -6371,7 +7132,7 @@
           <a:noFill/>
         </p:spPr>
         <p:txBody>
-          <a:bodyPr wrap="square" lIns="36576" tIns="18288" rIns="36576" bIns="18288" anchor="t">
+          <a:bodyPr wrap="square" anchor="t" lIns="36576" rIns="36576" tIns="18288" bIns="18288">
             <a:spAutoFit/>
           </a:bodyPr>
           <a:lstStyle/>
@@ -6382,16 +7143,10 @@
                 <a:solidFill>
                   <a:srgbClr val="8B5CF6"/>
                 </a:solidFill>
-                <a:latin typeface="微软雅黑" panose="020B0503020204020204" charset="-122"/>
+                <a:latin typeface="Microsoft YaHei"/>
               </a:rPr>
               <a:t>产品定位</a:t>
             </a:r>
-            <a:endParaRPr sz="1300" b="1">
-              <a:solidFill>
-                <a:srgbClr val="8B5CF6"/>
-              </a:solidFill>
-              <a:latin typeface="微软雅黑" panose="020B0503020204020204" charset="-122"/>
-            </a:endParaRPr>
           </a:p>
         </p:txBody>
       </p:sp>
@@ -6404,15 +7159,15 @@
         <p:spPr>
           <a:xfrm>
             <a:off x="548640" y="713232"/>
-            <a:ext cx="11064240" cy="497205"/>
-          </a:xfrm>
-          <a:prstGeom prst="rect">
-            <a:avLst/>
-          </a:prstGeom>
-          <a:noFill/>
-        </p:spPr>
-        <p:txBody>
-          <a:bodyPr wrap="square" lIns="36576" tIns="18288" rIns="36576" bIns="18288" anchor="t">
+            <a:ext cx="11064240" cy="777240"/>
+          </a:xfrm>
+          <a:prstGeom prst="rect">
+            <a:avLst/>
+          </a:prstGeom>
+          <a:noFill/>
+        </p:spPr>
+        <p:txBody>
+          <a:bodyPr wrap="square" anchor="t" lIns="36576" rIns="36576" tIns="18288" bIns="18288">
             <a:spAutoFit/>
           </a:bodyPr>
           <a:lstStyle/>
@@ -6423,43 +7178,10 @@
                 <a:solidFill>
                   <a:srgbClr val="FFFFFF"/>
                 </a:solidFill>
-                <a:latin typeface="微软雅黑" panose="020B0503020204020204" charset="-122"/>
-              </a:rPr>
-              <a:t>MonadLens</a:t>
-            </a:r>
-            <a:r>
-              <a:rPr lang="en-US" sz="3000" b="1">
-                <a:solidFill>
-                  <a:srgbClr val="FFFFFF"/>
-                </a:solidFill>
-                <a:latin typeface="微软雅黑" panose="020B0503020204020204" charset="-122"/>
-              </a:rPr>
-              <a:t> </a:t>
-            </a:r>
-            <a:r>
-              <a:rPr lang="zh-CN" altLang="en-US" sz="3000" b="1">
-                <a:solidFill>
-                  <a:srgbClr val="FFFFFF"/>
-                </a:solidFill>
-                <a:latin typeface="微软雅黑" panose="020B0503020204020204" charset="-122"/>
-              </a:rPr>
-              <a:t>· 透视链</a:t>
-            </a:r>
-            <a:r>
-              <a:rPr sz="3000" b="1">
-                <a:solidFill>
-                  <a:srgbClr val="FFFFFF"/>
-                </a:solidFill>
-                <a:latin typeface="微软雅黑" panose="020B0503020204020204" charset="-122"/>
-              </a:rPr>
-              <a:t> 是什么</a:t>
-            </a:r>
-            <a:endParaRPr sz="3000" b="1">
-              <a:solidFill>
-                <a:srgbClr val="FFFFFF"/>
-              </a:solidFill>
-              <a:latin typeface="微软雅黑" panose="020B0503020204020204" charset="-122"/>
-            </a:endParaRPr>
+                <a:latin typeface="Microsoft YaHei"/>
+              </a:rPr>
+              <a:t>MonadLens 是什么</a:t>
+            </a:r>
           </a:p>
         </p:txBody>
       </p:sp>
@@ -6480,7 +7202,7 @@
           <a:noFill/>
         </p:spPr>
         <p:txBody>
-          <a:bodyPr wrap="square" lIns="36576" tIns="18288" rIns="36576" bIns="18288" anchor="ctr">
+          <a:bodyPr wrap="square" anchor="ctr" lIns="36576" rIns="36576" tIns="18288" bIns="18288">
             <a:spAutoFit/>
           </a:bodyPr>
           <a:lstStyle/>
@@ -6491,16 +7213,10 @@
                 <a:solidFill>
                   <a:srgbClr val="E9E9F2"/>
                 </a:solidFill>
-                <a:latin typeface="微软雅黑" panose="020B0503020204020204" charset="-122"/>
+                <a:latin typeface="Microsoft YaHei"/>
               </a:rPr>
               <a:t>一个把「签名前后果」可视化、可对话、可拦截的链上安全助手。</a:t>
             </a:r>
-            <a:endParaRPr sz="1900" b="0">
-              <a:solidFill>
-                <a:srgbClr val="E9E9F2"/>
-              </a:solidFill>
-              <a:latin typeface="微软雅黑" panose="020B0503020204020204" charset="-122"/>
-            </a:endParaRPr>
           </a:p>
         </p:txBody>
       </p:sp>
@@ -6611,7 +7327,7 @@
           <a:noFill/>
         </p:spPr>
         <p:txBody>
-          <a:bodyPr wrap="square" lIns="36576" tIns="18288" rIns="36576" bIns="18288" anchor="ctr">
+          <a:bodyPr wrap="square" anchor="ctr" lIns="36576" rIns="36576" tIns="18288" bIns="18288">
             <a:spAutoFit/>
           </a:bodyPr>
           <a:lstStyle/>
@@ -6622,16 +7338,10 @@
                 <a:solidFill>
                   <a:srgbClr val="22D3EE"/>
                 </a:solidFill>
-                <a:latin typeface="微软雅黑" panose="020B0503020204020204" charset="-122"/>
+                <a:latin typeface="Microsoft YaHei"/>
               </a:rPr>
               <a:t>📊</a:t>
             </a:r>
-            <a:endParaRPr sz="4000" b="0">
-              <a:solidFill>
-                <a:srgbClr val="22D3EE"/>
-              </a:solidFill>
-              <a:latin typeface="微软雅黑" panose="020B0503020204020204" charset="-122"/>
-            </a:endParaRPr>
           </a:p>
         </p:txBody>
       </p:sp>
@@ -6652,7 +7362,7 @@
           <a:noFill/>
         </p:spPr>
         <p:txBody>
-          <a:bodyPr wrap="square" lIns="36576" tIns="18288" rIns="36576" bIns="18288" anchor="t">
+          <a:bodyPr wrap="square" anchor="t" lIns="36576" rIns="36576" tIns="18288" bIns="18288">
             <a:spAutoFit/>
           </a:bodyPr>
           <a:lstStyle/>
@@ -6663,16 +7373,10 @@
                 <a:solidFill>
                   <a:srgbClr val="FFFFFF"/>
                 </a:solidFill>
-                <a:latin typeface="微软雅黑" panose="020B0503020204020204" charset="-122"/>
+                <a:latin typeface="Microsoft YaHei"/>
               </a:rPr>
               <a:t>实时看板</a:t>
             </a:r>
-            <a:endParaRPr sz="2200" b="1">
-              <a:solidFill>
-                <a:srgbClr val="FFFFFF"/>
-              </a:solidFill>
-              <a:latin typeface="微软雅黑" panose="020B0503020204020204" charset="-122"/>
-            </a:endParaRPr>
           </a:p>
         </p:txBody>
       </p:sp>
@@ -6693,7 +7397,7 @@
           <a:noFill/>
         </p:spPr>
         <p:txBody>
-          <a:bodyPr wrap="square" lIns="36576" tIns="18288" rIns="36576" bIns="18288" anchor="t">
+          <a:bodyPr wrap="square" anchor="t" lIns="36576" rIns="36576" tIns="18288" bIns="18288">
             <a:spAutoFit/>
           </a:bodyPr>
           <a:lstStyle/>
@@ -6708,16 +7412,10 @@
                 <a:solidFill>
                   <a:srgbClr val="9CA3B8"/>
                 </a:solidFill>
-                <a:latin typeface="微软雅黑" panose="020B0503020204020204" charset="-122"/>
+                <a:latin typeface="Microsoft YaHei"/>
               </a:rPr>
               <a:t>把链上数据变成看得懂的画面</a:t>
             </a:r>
-            <a:endParaRPr sz="1500" b="0">
-              <a:solidFill>
-                <a:srgbClr val="9CA3B8"/>
-              </a:solidFill>
-              <a:latin typeface="微软雅黑" panose="020B0503020204020204" charset="-122"/>
-            </a:endParaRPr>
           </a:p>
         </p:txBody>
       </p:sp>
@@ -6828,7 +7526,7 @@
           <a:noFill/>
         </p:spPr>
         <p:txBody>
-          <a:bodyPr wrap="square" lIns="36576" tIns="18288" rIns="36576" bIns="18288" anchor="ctr">
+          <a:bodyPr wrap="square" anchor="ctr" lIns="36576" rIns="36576" tIns="18288" bIns="18288">
             <a:spAutoFit/>
           </a:bodyPr>
           <a:lstStyle/>
@@ -6839,16 +7537,10 @@
                 <a:solidFill>
                   <a:srgbClr val="8B5CF6"/>
                 </a:solidFill>
-                <a:latin typeface="微软雅黑" panose="020B0503020204020204" charset="-122"/>
+                <a:latin typeface="Microsoft YaHei"/>
               </a:rPr>
               <a:t>🤖</a:t>
             </a:r>
-            <a:endParaRPr sz="4000" b="0">
-              <a:solidFill>
-                <a:srgbClr val="8B5CF6"/>
-              </a:solidFill>
-              <a:latin typeface="微软雅黑" panose="020B0503020204020204" charset="-122"/>
-            </a:endParaRPr>
           </a:p>
         </p:txBody>
       </p:sp>
@@ -6869,7 +7561,7 @@
           <a:noFill/>
         </p:spPr>
         <p:txBody>
-          <a:bodyPr wrap="square" lIns="36576" tIns="18288" rIns="36576" bIns="18288" anchor="t">
+          <a:bodyPr wrap="square" anchor="t" lIns="36576" rIns="36576" tIns="18288" bIns="18288">
             <a:spAutoFit/>
           </a:bodyPr>
           <a:lstStyle/>
@@ -6880,16 +7572,10 @@
                 <a:solidFill>
                   <a:srgbClr val="FFFFFF"/>
                 </a:solidFill>
-                <a:latin typeface="微软雅黑" panose="020B0503020204020204" charset="-122"/>
+                <a:latin typeface="Microsoft YaHei"/>
               </a:rPr>
               <a:t>AI 对话</a:t>
             </a:r>
-            <a:endParaRPr sz="2200" b="1">
-              <a:solidFill>
-                <a:srgbClr val="FFFFFF"/>
-              </a:solidFill>
-              <a:latin typeface="微软雅黑" panose="020B0503020204020204" charset="-122"/>
-            </a:endParaRPr>
           </a:p>
         </p:txBody>
       </p:sp>
@@ -6910,7 +7596,7 @@
           <a:noFill/>
         </p:spPr>
         <p:txBody>
-          <a:bodyPr wrap="square" lIns="36576" tIns="18288" rIns="36576" bIns="18288" anchor="t">
+          <a:bodyPr wrap="square" anchor="t" lIns="36576" rIns="36576" tIns="18288" bIns="18288">
             <a:spAutoFit/>
           </a:bodyPr>
           <a:lstStyle/>
@@ -6925,16 +7611,10 @@
                 <a:solidFill>
                   <a:srgbClr val="9CA3B8"/>
                 </a:solidFill>
-                <a:latin typeface="微软雅黑" panose="020B0503020204020204" charset="-122"/>
+                <a:latin typeface="Microsoft YaHei"/>
               </a:rPr>
               <a:t>用自然语言规划交易、演示攻击</a:t>
             </a:r>
-            <a:endParaRPr sz="1500" b="0">
-              <a:solidFill>
-                <a:srgbClr val="9CA3B8"/>
-              </a:solidFill>
-              <a:latin typeface="微软雅黑" panose="020B0503020204020204" charset="-122"/>
-            </a:endParaRPr>
           </a:p>
         </p:txBody>
       </p:sp>
@@ -7045,7 +7725,7 @@
           <a:noFill/>
         </p:spPr>
         <p:txBody>
-          <a:bodyPr wrap="square" lIns="36576" tIns="18288" rIns="36576" bIns="18288" anchor="ctr">
+          <a:bodyPr wrap="square" anchor="ctr" lIns="36576" rIns="36576" tIns="18288" bIns="18288">
             <a:spAutoFit/>
           </a:bodyPr>
           <a:lstStyle/>
@@ -7056,16 +7736,10 @@
                 <a:solidFill>
                   <a:srgbClr val="F59E0B"/>
                 </a:solidFill>
-                <a:latin typeface="微软雅黑" panose="020B0503020204020204" charset="-122"/>
+                <a:latin typeface="Microsoft YaHei"/>
               </a:rPr>
               <a:t>🛡️</a:t>
             </a:r>
-            <a:endParaRPr sz="4000" b="0">
-              <a:solidFill>
-                <a:srgbClr val="F59E0B"/>
-              </a:solidFill>
-              <a:latin typeface="微软雅黑" panose="020B0503020204020204" charset="-122"/>
-            </a:endParaRPr>
           </a:p>
         </p:txBody>
       </p:sp>
@@ -7086,7 +7760,7 @@
           <a:noFill/>
         </p:spPr>
         <p:txBody>
-          <a:bodyPr wrap="square" lIns="36576" tIns="18288" rIns="36576" bIns="18288" anchor="t">
+          <a:bodyPr wrap="square" anchor="t" lIns="36576" rIns="36576" tIns="18288" bIns="18288">
             <a:spAutoFit/>
           </a:bodyPr>
           <a:lstStyle/>
@@ -7097,16 +7771,10 @@
                 <a:solidFill>
                   <a:srgbClr val="FFFFFF"/>
                 </a:solidFill>
-                <a:latin typeface="微软雅黑" panose="020B0503020204020204" charset="-122"/>
+                <a:latin typeface="Microsoft YaHei"/>
               </a:rPr>
               <a:t>后果透镜</a:t>
             </a:r>
-            <a:endParaRPr sz="2200" b="1">
-              <a:solidFill>
-                <a:srgbClr val="FFFFFF"/>
-              </a:solidFill>
-              <a:latin typeface="微软雅黑" panose="020B0503020204020204" charset="-122"/>
-            </a:endParaRPr>
           </a:p>
         </p:txBody>
       </p:sp>
@@ -7127,7 +7795,7 @@
           <a:noFill/>
         </p:spPr>
         <p:txBody>
-          <a:bodyPr wrap="square" lIns="36576" tIns="18288" rIns="36576" bIns="18288" anchor="t">
+          <a:bodyPr wrap="square" anchor="t" lIns="36576" rIns="36576" tIns="18288" bIns="18288">
             <a:spAutoFit/>
           </a:bodyPr>
           <a:lstStyle/>
@@ -7142,16 +7810,10 @@
                 <a:solidFill>
                   <a:srgbClr val="9CA3B8"/>
                 </a:solidFill>
-                <a:latin typeface="微软雅黑" panose="020B0503020204020204" charset="-122"/>
+                <a:latin typeface="Microsoft YaHei"/>
               </a:rPr>
               <a:t>签名前模拟并拦截危险操作</a:t>
             </a:r>
-            <a:endParaRPr sz="1500" b="0">
-              <a:solidFill>
-                <a:srgbClr val="9CA3B8"/>
-              </a:solidFill>
-              <a:latin typeface="微软雅黑" panose="020B0503020204020204" charset="-122"/>
-            </a:endParaRPr>
           </a:p>
         </p:txBody>
       </p:sp>
@@ -7172,7 +7834,7 @@
           <a:noFill/>
         </p:spPr>
         <p:txBody>
-          <a:bodyPr wrap="square" lIns="36576" tIns="18288" rIns="36576" bIns="18288" anchor="t">
+          <a:bodyPr wrap="square" anchor="t" lIns="36576" rIns="36576" tIns="18288" bIns="18288">
             <a:spAutoFit/>
           </a:bodyPr>
           <a:lstStyle/>
@@ -7183,16 +7845,10 @@
                 <a:solidFill>
                   <a:srgbClr val="9CA3B8"/>
                 </a:solidFill>
-                <a:latin typeface="微软雅黑" panose="020B0503020204020204" charset="-122"/>
+                <a:latin typeface="Microsoft YaHei"/>
               </a:rPr>
               <a:t>MonadLens · 看清网络，看清后果</a:t>
             </a:r>
-            <a:endParaRPr sz="1000" b="0">
-              <a:solidFill>
-                <a:srgbClr val="9CA3B8"/>
-              </a:solidFill>
-              <a:latin typeface="微软雅黑" panose="020B0503020204020204" charset="-122"/>
-            </a:endParaRPr>
           </a:p>
         </p:txBody>
       </p:sp>
@@ -7213,7 +7869,7 @@
           <a:noFill/>
         </p:spPr>
         <p:txBody>
-          <a:bodyPr wrap="square" lIns="36576" tIns="18288" rIns="36576" bIns="18288" anchor="t">
+          <a:bodyPr wrap="square" anchor="t" lIns="36576" rIns="36576" tIns="18288" bIns="18288">
             <a:spAutoFit/>
           </a:bodyPr>
           <a:lstStyle/>
@@ -7224,16 +7880,10 @@
                 <a:solidFill>
                   <a:srgbClr val="9CA3B8"/>
                 </a:solidFill>
-                <a:latin typeface="微软雅黑" panose="020B0503020204020204" charset="-122"/>
+                <a:latin typeface="Microsoft YaHei"/>
               </a:rPr>
               <a:t>3</a:t>
             </a:r>
-            <a:endParaRPr sz="1000" b="0">
-              <a:solidFill>
-                <a:srgbClr val="9CA3B8"/>
-              </a:solidFill>
-              <a:latin typeface="微软雅黑" panose="020B0503020204020204" charset="-122"/>
-            </a:endParaRPr>
           </a:p>
         </p:txBody>
       </p:sp>
@@ -7246,7 +7896,7 @@
 </file>
 
 <file path=ppt/slides/slide4.xml><?xml version="1.0" encoding="utf-8"?>
-<p:sld xmlns:a="http://schemas.openxmlformats.org/drawingml/2006/main" xmlns:r="http://schemas.openxmlformats.org/officeDocument/2006/relationships" xmlns:p="http://schemas.openxmlformats.org/presentationml/2006/main">
+<p:sld xmlns:a="http://schemas.openxmlformats.org/drawingml/2006/main" xmlns:p="http://schemas.openxmlformats.org/presentationml/2006/main" xmlns:r="http://schemas.openxmlformats.org/officeDocument/2006/relationships">
   <p:cSld>
     <p:spTree>
       <p:nvGrpSpPr>
@@ -7316,7 +7966,7 @@
           <a:noFill/>
         </p:spPr>
         <p:txBody>
-          <a:bodyPr wrap="square" lIns="36576" tIns="18288" rIns="36576" bIns="18288" anchor="t">
+          <a:bodyPr wrap="square" anchor="t" lIns="36576" rIns="36576" tIns="18288" bIns="18288">
             <a:spAutoFit/>
           </a:bodyPr>
           <a:lstStyle/>
@@ -7327,16 +7977,10 @@
                 <a:solidFill>
                   <a:srgbClr val="8B5CF6"/>
                 </a:solidFill>
-                <a:latin typeface="微软雅黑" panose="020B0503020204020204" charset="-122"/>
+                <a:latin typeface="Microsoft YaHei"/>
               </a:rPr>
               <a:t>整体架构</a:t>
             </a:r>
-            <a:endParaRPr sz="1300" b="1">
-              <a:solidFill>
-                <a:srgbClr val="8B5CF6"/>
-              </a:solidFill>
-              <a:latin typeface="微软雅黑" panose="020B0503020204020204" charset="-122"/>
-            </a:endParaRPr>
           </a:p>
         </p:txBody>
       </p:sp>
@@ -7357,7 +8001,7 @@
           <a:noFill/>
         </p:spPr>
         <p:txBody>
-          <a:bodyPr wrap="square" lIns="36576" tIns="18288" rIns="36576" bIns="18288" anchor="t">
+          <a:bodyPr wrap="square" anchor="t" lIns="36576" rIns="36576" tIns="18288" bIns="18288">
             <a:spAutoFit/>
           </a:bodyPr>
           <a:lstStyle/>
@@ -7368,16 +8012,10 @@
                 <a:solidFill>
                   <a:srgbClr val="FFFFFF"/>
                 </a:solidFill>
-                <a:latin typeface="微软雅黑" panose="020B0503020204020204" charset="-122"/>
+                <a:latin typeface="Microsoft YaHei"/>
               </a:rPr>
               <a:t>三栏一体化：数据 · 对话 · 防护</a:t>
             </a:r>
-            <a:endParaRPr sz="3000" b="1">
-              <a:solidFill>
-                <a:srgbClr val="FFFFFF"/>
-              </a:solidFill>
-              <a:latin typeface="微软雅黑" panose="020B0503020204020204" charset="-122"/>
-            </a:endParaRPr>
           </a:p>
         </p:txBody>
       </p:sp>
@@ -7488,7 +8126,7 @@
           <a:noFill/>
         </p:spPr>
         <p:txBody>
-          <a:bodyPr wrap="square" lIns="36576" tIns="18288" rIns="36576" bIns="18288" anchor="t">
+          <a:bodyPr wrap="square" anchor="t" lIns="36576" rIns="36576" tIns="18288" bIns="18288">
             <a:spAutoFit/>
           </a:bodyPr>
           <a:lstStyle/>
@@ -7499,16 +8137,10 @@
                 <a:solidFill>
                   <a:srgbClr val="22D3EE"/>
                 </a:solidFill>
-                <a:latin typeface="微软雅黑" panose="020B0503020204020204" charset="-122"/>
+                <a:latin typeface="Microsoft YaHei"/>
               </a:rPr>
               <a:t>左栏</a:t>
             </a:r>
-            <a:endParaRPr sz="1300" b="1">
-              <a:solidFill>
-                <a:srgbClr val="22D3EE"/>
-              </a:solidFill>
-              <a:latin typeface="微软雅黑" panose="020B0503020204020204" charset="-122"/>
-            </a:endParaRPr>
           </a:p>
         </p:txBody>
       </p:sp>
@@ -7529,7 +8161,7 @@
           <a:noFill/>
         </p:spPr>
         <p:txBody>
-          <a:bodyPr wrap="square" lIns="36576" tIns="18288" rIns="36576" bIns="18288" anchor="t">
+          <a:bodyPr wrap="square" anchor="t" lIns="36576" rIns="36576" tIns="18288" bIns="18288">
             <a:spAutoFit/>
           </a:bodyPr>
           <a:lstStyle/>
@@ -7540,16 +8172,10 @@
                 <a:solidFill>
                   <a:srgbClr val="FFFFFF"/>
                 </a:solidFill>
-                <a:latin typeface="微软雅黑" panose="020B0503020204020204" charset="-122"/>
+                <a:latin typeface="Microsoft YaHei"/>
               </a:rPr>
               <a:t>实时看板</a:t>
             </a:r>
-            <a:endParaRPr sz="2400" b="1">
-              <a:solidFill>
-                <a:srgbClr val="FFFFFF"/>
-              </a:solidFill>
-              <a:latin typeface="微软雅黑" panose="020B0503020204020204" charset="-122"/>
-            </a:endParaRPr>
           </a:p>
         </p:txBody>
       </p:sp>
@@ -7570,7 +8196,7 @@
           <a:noFill/>
         </p:spPr>
         <p:txBody>
-          <a:bodyPr wrap="square" lIns="36576" tIns="18288" rIns="36576" bIns="18288" anchor="t">
+          <a:bodyPr wrap="square" anchor="t" lIns="36576" rIns="36576" tIns="18288" bIns="18288">
             <a:spAutoFit/>
           </a:bodyPr>
           <a:lstStyle/>
@@ -7585,17 +8211,11 @@
                 <a:solidFill>
                   <a:srgbClr val="9CA3B8"/>
                 </a:solidFill>
-                <a:latin typeface="微软雅黑" panose="020B0503020204020204" charset="-122"/>
+                <a:latin typeface="Microsoft YaHei"/>
               </a:rPr>
               <a:t>Monad 链上实时数据
 TPS / 出块 / Gas / 活跃榜</a:t>
             </a:r>
-            <a:endParaRPr sz="1500" b="0">
-              <a:solidFill>
-                <a:srgbClr val="9CA3B8"/>
-              </a:solidFill>
-              <a:latin typeface="微软雅黑" panose="020B0503020204020204" charset="-122"/>
-            </a:endParaRPr>
           </a:p>
         </p:txBody>
       </p:sp>
@@ -7706,7 +8326,7 @@
           <a:noFill/>
         </p:spPr>
         <p:txBody>
-          <a:bodyPr wrap="square" lIns="36576" tIns="18288" rIns="36576" bIns="18288" anchor="t">
+          <a:bodyPr wrap="square" anchor="t" lIns="36576" rIns="36576" tIns="18288" bIns="18288">
             <a:spAutoFit/>
           </a:bodyPr>
           <a:lstStyle/>
@@ -7717,16 +8337,10 @@
                 <a:solidFill>
                   <a:srgbClr val="8B5CF6"/>
                 </a:solidFill>
-                <a:latin typeface="微软雅黑" panose="020B0503020204020204" charset="-122"/>
+                <a:latin typeface="Microsoft YaHei"/>
               </a:rPr>
               <a:t>中栏</a:t>
             </a:r>
-            <a:endParaRPr sz="1300" b="1">
-              <a:solidFill>
-                <a:srgbClr val="8B5CF6"/>
-              </a:solidFill>
-              <a:latin typeface="微软雅黑" panose="020B0503020204020204" charset="-122"/>
-            </a:endParaRPr>
           </a:p>
         </p:txBody>
       </p:sp>
@@ -7747,7 +8361,7 @@
           <a:noFill/>
         </p:spPr>
         <p:txBody>
-          <a:bodyPr wrap="square" lIns="36576" tIns="18288" rIns="36576" bIns="18288" anchor="t">
+          <a:bodyPr wrap="square" anchor="t" lIns="36576" rIns="36576" tIns="18288" bIns="18288">
             <a:spAutoFit/>
           </a:bodyPr>
           <a:lstStyle/>
@@ -7758,16 +8372,10 @@
                 <a:solidFill>
                   <a:srgbClr val="FFFFFF"/>
                 </a:solidFill>
-                <a:latin typeface="微软雅黑" panose="020B0503020204020204" charset="-122"/>
+                <a:latin typeface="Microsoft YaHei"/>
               </a:rPr>
               <a:t>Agent 双脑</a:t>
             </a:r>
-            <a:endParaRPr sz="2400" b="1">
-              <a:solidFill>
-                <a:srgbClr val="FFFFFF"/>
-              </a:solidFill>
-              <a:latin typeface="微软雅黑" panose="020B0503020204020204" charset="-122"/>
-            </a:endParaRPr>
           </a:p>
         </p:txBody>
       </p:sp>
@@ -7788,7 +8396,7 @@
           <a:noFill/>
         </p:spPr>
         <p:txBody>
-          <a:bodyPr wrap="square" lIns="36576" tIns="18288" rIns="36576" bIns="18288" anchor="t">
+          <a:bodyPr wrap="square" anchor="t" lIns="36576" rIns="36576" tIns="18288" bIns="18288">
             <a:spAutoFit/>
           </a:bodyPr>
           <a:lstStyle/>
@@ -7803,17 +8411,11 @@
                 <a:solidFill>
                   <a:srgbClr val="9CA3B8"/>
                 </a:solidFill>
-                <a:latin typeface="微软雅黑" panose="020B0503020204020204" charset="-122"/>
+                <a:latin typeface="Microsoft YaHei"/>
               </a:rPr>
               <a:t>自然语言交互
-规则引擎 + DeepSeek LLM</a:t>
-            </a:r>
-            <a:endParaRPr sz="1500" b="0">
-              <a:solidFill>
-                <a:srgbClr val="9CA3B8"/>
-              </a:solidFill>
-              <a:latin typeface="微软雅黑" panose="020B0503020204020204" charset="-122"/>
-            </a:endParaRPr>
+规则引擎 + LLM（OpenAI 兼容）</a:t>
+            </a:r>
           </a:p>
         </p:txBody>
       </p:sp>
@@ -7924,7 +8526,7 @@
           <a:noFill/>
         </p:spPr>
         <p:txBody>
-          <a:bodyPr wrap="square" lIns="36576" tIns="18288" rIns="36576" bIns="18288" anchor="t">
+          <a:bodyPr wrap="square" anchor="t" lIns="36576" rIns="36576" tIns="18288" bIns="18288">
             <a:spAutoFit/>
           </a:bodyPr>
           <a:lstStyle/>
@@ -7935,16 +8537,10 @@
                 <a:solidFill>
                   <a:srgbClr val="F59E0B"/>
                 </a:solidFill>
-                <a:latin typeface="微软雅黑" panose="020B0503020204020204" charset="-122"/>
+                <a:latin typeface="Microsoft YaHei"/>
               </a:rPr>
               <a:t>右栏</a:t>
             </a:r>
-            <a:endParaRPr sz="1300" b="1">
-              <a:solidFill>
-                <a:srgbClr val="F59E0B"/>
-              </a:solidFill>
-              <a:latin typeface="微软雅黑" panose="020B0503020204020204" charset="-122"/>
-            </a:endParaRPr>
           </a:p>
         </p:txBody>
       </p:sp>
@@ -7965,7 +8561,7 @@
           <a:noFill/>
         </p:spPr>
         <p:txBody>
-          <a:bodyPr wrap="square" lIns="36576" tIns="18288" rIns="36576" bIns="18288" anchor="t">
+          <a:bodyPr wrap="square" anchor="t" lIns="36576" rIns="36576" tIns="18288" bIns="18288">
             <a:spAutoFit/>
           </a:bodyPr>
           <a:lstStyle/>
@@ -7976,16 +8572,10 @@
                 <a:solidFill>
                   <a:srgbClr val="FFFFFF"/>
                 </a:solidFill>
-                <a:latin typeface="微软雅黑" panose="020B0503020204020204" charset="-122"/>
+                <a:latin typeface="Microsoft YaHei"/>
               </a:rPr>
               <a:t>后果透镜</a:t>
             </a:r>
-            <a:endParaRPr sz="2400" b="1">
-              <a:solidFill>
-                <a:srgbClr val="FFFFFF"/>
-              </a:solidFill>
-              <a:latin typeface="微软雅黑" panose="020B0503020204020204" charset="-122"/>
-            </a:endParaRPr>
           </a:p>
         </p:txBody>
       </p:sp>
@@ -8006,7 +8596,7 @@
           <a:noFill/>
         </p:spPr>
         <p:txBody>
-          <a:bodyPr wrap="square" lIns="36576" tIns="18288" rIns="36576" bIns="18288" anchor="t">
+          <a:bodyPr wrap="square" anchor="t" lIns="36576" rIns="36576" tIns="18288" bIns="18288">
             <a:spAutoFit/>
           </a:bodyPr>
           <a:lstStyle/>
@@ -8021,17 +8611,11 @@
                 <a:solidFill>
                   <a:srgbClr val="9CA3B8"/>
                 </a:solidFill>
-                <a:latin typeface="微软雅黑" panose="020B0503020204020204" charset="-122"/>
+                <a:latin typeface="Microsoft YaHei"/>
               </a:rPr>
               <a:t>签名前 Moss 模拟
 预览资金流向与授权</a:t>
             </a:r>
-            <a:endParaRPr sz="1500" b="0">
-              <a:solidFill>
-                <a:srgbClr val="9CA3B8"/>
-              </a:solidFill>
-              <a:latin typeface="微软雅黑" panose="020B0503020204020204" charset="-122"/>
-            </a:endParaRPr>
           </a:p>
         </p:txBody>
       </p:sp>
@@ -8100,7 +8684,7 @@
           <a:noFill/>
         </p:spPr>
         <p:txBody>
-          <a:bodyPr wrap="square" lIns="36576" tIns="18288" rIns="36576" bIns="18288" anchor="ctr">
+          <a:bodyPr wrap="square" anchor="ctr" lIns="36576" rIns="36576" tIns="18288" bIns="18288">
             <a:spAutoFit/>
           </a:bodyPr>
           <a:lstStyle/>
@@ -8115,16 +8699,10 @@
                 <a:solidFill>
                   <a:srgbClr val="E9E9F2"/>
                 </a:solidFill>
-                <a:latin typeface="微软雅黑" panose="020B0503020204020204" charset="-122"/>
+                <a:latin typeface="Microsoft YaHei"/>
               </a:rPr>
               <a:t>数据流：钱包 / 链上  →  看板可视化  →  Agent 规划  →  Moss 模拟  →  透镜拦截 / 放行  →  签名广播  →  链上验证</a:t>
             </a:r>
-            <a:endParaRPr sz="1500" b="0">
-              <a:solidFill>
-                <a:srgbClr val="E9E9F2"/>
-              </a:solidFill>
-              <a:latin typeface="微软雅黑" panose="020B0503020204020204" charset="-122"/>
-            </a:endParaRPr>
           </a:p>
         </p:txBody>
       </p:sp>
@@ -8145,7 +8723,7 @@
           <a:noFill/>
         </p:spPr>
         <p:txBody>
-          <a:bodyPr wrap="square" lIns="36576" tIns="18288" rIns="36576" bIns="18288" anchor="t">
+          <a:bodyPr wrap="square" anchor="t" lIns="36576" rIns="36576" tIns="18288" bIns="18288">
             <a:spAutoFit/>
           </a:bodyPr>
           <a:lstStyle/>
@@ -8156,16 +8734,10 @@
                 <a:solidFill>
                   <a:srgbClr val="9CA3B8"/>
                 </a:solidFill>
-                <a:latin typeface="微软雅黑" panose="020B0503020204020204" charset="-122"/>
+                <a:latin typeface="Microsoft YaHei"/>
               </a:rPr>
               <a:t>MonadLens · 看清网络，看清后果</a:t>
             </a:r>
-            <a:endParaRPr sz="1000" b="0">
-              <a:solidFill>
-                <a:srgbClr val="9CA3B8"/>
-              </a:solidFill>
-              <a:latin typeface="微软雅黑" panose="020B0503020204020204" charset="-122"/>
-            </a:endParaRPr>
           </a:p>
         </p:txBody>
       </p:sp>
@@ -8186,7 +8758,7 @@
           <a:noFill/>
         </p:spPr>
         <p:txBody>
-          <a:bodyPr wrap="square" lIns="36576" tIns="18288" rIns="36576" bIns="18288" anchor="t">
+          <a:bodyPr wrap="square" anchor="t" lIns="36576" rIns="36576" tIns="18288" bIns="18288">
             <a:spAutoFit/>
           </a:bodyPr>
           <a:lstStyle/>
@@ -8197,16 +8769,10 @@
                 <a:solidFill>
                   <a:srgbClr val="9CA3B8"/>
                 </a:solidFill>
-                <a:latin typeface="微软雅黑" panose="020B0503020204020204" charset="-122"/>
+                <a:latin typeface="Microsoft YaHei"/>
               </a:rPr>
               <a:t>4</a:t>
             </a:r>
-            <a:endParaRPr sz="1000" b="0">
-              <a:solidFill>
-                <a:srgbClr val="9CA3B8"/>
-              </a:solidFill>
-              <a:latin typeface="微软雅黑" panose="020B0503020204020204" charset="-122"/>
-            </a:endParaRPr>
           </a:p>
         </p:txBody>
       </p:sp>
@@ -8219,7 +8785,7 @@
 </file>
 
 <file path=ppt/slides/slide5.xml><?xml version="1.0" encoding="utf-8"?>
-<p:sld xmlns:a="http://schemas.openxmlformats.org/drawingml/2006/main" xmlns:r="http://schemas.openxmlformats.org/officeDocument/2006/relationships" xmlns:p="http://schemas.openxmlformats.org/presentationml/2006/main">
+<p:sld xmlns:a="http://schemas.openxmlformats.org/drawingml/2006/main" xmlns:p="http://schemas.openxmlformats.org/presentationml/2006/main" xmlns:r="http://schemas.openxmlformats.org/officeDocument/2006/relationships">
   <p:cSld>
     <p:spTree>
       <p:nvGrpSpPr>
@@ -8289,7 +8855,7 @@
           <a:noFill/>
         </p:spPr>
         <p:txBody>
-          <a:bodyPr wrap="square" lIns="36576" tIns="18288" rIns="36576" bIns="18288" anchor="t">
+          <a:bodyPr wrap="square" anchor="t" lIns="36576" rIns="36576" tIns="18288" bIns="18288">
             <a:spAutoFit/>
           </a:bodyPr>
           <a:lstStyle/>
@@ -8300,16 +8866,10 @@
                 <a:solidFill>
                   <a:srgbClr val="8B5CF6"/>
                 </a:solidFill>
-                <a:latin typeface="微软雅黑" panose="020B0503020204020204" charset="-122"/>
+                <a:latin typeface="Microsoft YaHei"/>
               </a:rPr>
               <a:t>核心功能 ①</a:t>
             </a:r>
-            <a:endParaRPr sz="1300" b="1">
-              <a:solidFill>
-                <a:srgbClr val="8B5CF6"/>
-              </a:solidFill>
-              <a:latin typeface="微软雅黑" panose="020B0503020204020204" charset="-122"/>
-            </a:endParaRPr>
           </a:p>
         </p:txBody>
       </p:sp>
@@ -8330,7 +8890,7 @@
           <a:noFill/>
         </p:spPr>
         <p:txBody>
-          <a:bodyPr wrap="square" lIns="36576" tIns="18288" rIns="36576" bIns="18288" anchor="t">
+          <a:bodyPr wrap="square" anchor="t" lIns="36576" rIns="36576" tIns="18288" bIns="18288">
             <a:spAutoFit/>
           </a:bodyPr>
           <a:lstStyle/>
@@ -8341,16 +8901,10 @@
                 <a:solidFill>
                   <a:srgbClr val="FFFFFF"/>
                 </a:solidFill>
-                <a:latin typeface="微软雅黑" panose="020B0503020204020204" charset="-122"/>
+                <a:latin typeface="Microsoft YaHei"/>
               </a:rPr>
               <a:t>实时链上看板</a:t>
             </a:r>
-            <a:endParaRPr sz="3000" b="1">
-              <a:solidFill>
-                <a:srgbClr val="FFFFFF"/>
-              </a:solidFill>
-              <a:latin typeface="微软雅黑" panose="020B0503020204020204" charset="-122"/>
-            </a:endParaRPr>
           </a:p>
         </p:txBody>
       </p:sp>
@@ -8461,7 +9015,7 @@
           <a:noFill/>
         </p:spPr>
         <p:txBody>
-          <a:bodyPr wrap="square" lIns="36576" tIns="18288" rIns="36576" bIns="18288" anchor="t">
+          <a:bodyPr wrap="square" anchor="t" lIns="36576" rIns="36576" tIns="18288" bIns="18288">
             <a:spAutoFit/>
           </a:bodyPr>
           <a:lstStyle/>
@@ -8472,16 +9026,10 @@
                 <a:solidFill>
                   <a:srgbClr val="FFFFFF"/>
                 </a:solidFill>
-                <a:latin typeface="微软雅黑" panose="020B0503020204020204" charset="-122"/>
+                <a:latin typeface="Microsoft YaHei"/>
               </a:rPr>
               <a:t>你能看到什么</a:t>
             </a:r>
-            <a:endParaRPr sz="2000" b="1">
-              <a:solidFill>
-                <a:srgbClr val="FFFFFF"/>
-              </a:solidFill>
-              <a:latin typeface="微软雅黑" panose="020B0503020204020204" charset="-122"/>
-            </a:endParaRPr>
           </a:p>
         </p:txBody>
       </p:sp>
@@ -8502,7 +9050,7 @@
           <a:noFill/>
         </p:spPr>
         <p:txBody>
-          <a:bodyPr wrap="square" lIns="36576" tIns="18288" rIns="36576" bIns="18288" anchor="t">
+          <a:bodyPr wrap="square" anchor="t" lIns="36576" rIns="36576" tIns="18288" bIns="18288">
             <a:spAutoFit/>
           </a:bodyPr>
           <a:lstStyle/>
@@ -8517,16 +9065,10 @@
                 <a:solidFill>
                   <a:srgbClr val="E9E9F2"/>
                 </a:solidFill>
-                <a:latin typeface="微软雅黑" panose="020B0503020204020204" charset="-122"/>
+                <a:latin typeface="Microsoft YaHei"/>
               </a:rPr>
               <a:t>•  TPS 实时估算（约 40 tx/s）</a:t>
             </a:r>
-            <a:endParaRPr sz="1600" b="0">
-              <a:solidFill>
-                <a:srgbClr val="E9E9F2"/>
-              </a:solidFill>
-              <a:latin typeface="微软雅黑" panose="020B0503020204020204" charset="-122"/>
-            </a:endParaRPr>
           </a:p>
           <a:p>
             <a:pPr algn="l">
@@ -8539,16 +9081,10 @@
                 <a:solidFill>
                   <a:srgbClr val="E9E9F2"/>
                 </a:solidFill>
-                <a:latin typeface="微软雅黑" panose="020B0503020204020204" charset="-122"/>
+                <a:latin typeface="Microsoft YaHei"/>
               </a:rPr>
               <a:t>•  出块间隔约 0.3s，毫秒级刷新</a:t>
             </a:r>
-            <a:endParaRPr sz="1600" b="0">
-              <a:solidFill>
-                <a:srgbClr val="E9E9F2"/>
-              </a:solidFill>
-              <a:latin typeface="微软雅黑" panose="020B0503020204020204" charset="-122"/>
-            </a:endParaRPr>
           </a:p>
           <a:p>
             <a:pPr algn="l">
@@ -8561,16 +9097,10 @@
                 <a:solidFill>
                   <a:srgbClr val="E9E9F2"/>
                 </a:solidFill>
-                <a:latin typeface="微软雅黑" panose="020B0503020204020204" charset="-122"/>
+                <a:latin typeface="Microsoft YaHei"/>
               </a:rPr>
               <a:t>•  Gas 费用趋势图，提前感知拥堵</a:t>
             </a:r>
-            <a:endParaRPr sz="1600" b="0">
-              <a:solidFill>
-                <a:srgbClr val="E9E9F2"/>
-              </a:solidFill>
-              <a:latin typeface="微软雅黑" panose="020B0503020204020204" charset="-122"/>
-            </a:endParaRPr>
           </a:p>
           <a:p>
             <a:pPr algn="l">
@@ -8583,16 +9113,10 @@
                 <a:solidFill>
                   <a:srgbClr val="E9E9F2"/>
                 </a:solidFill>
-                <a:latin typeface="微软雅黑" panose="020B0503020204020204" charset="-122"/>
+                <a:latin typeface="Microsoft YaHei"/>
               </a:rPr>
               <a:t>•  活跃地址 / 合约榜 Top 5 实时更新</a:t>
             </a:r>
-            <a:endParaRPr sz="1600" b="0">
-              <a:solidFill>
-                <a:srgbClr val="E9E9F2"/>
-              </a:solidFill>
-              <a:latin typeface="微软雅黑" panose="020B0503020204020204" charset="-122"/>
-            </a:endParaRPr>
           </a:p>
           <a:p>
             <a:pPr algn="l">
@@ -8605,16 +9129,10 @@
                 <a:solidFill>
                   <a:srgbClr val="E9E9F2"/>
                 </a:solidFill>
-                <a:latin typeface="微软雅黑" panose="020B0503020204020204" charset="-122"/>
+                <a:latin typeface="Microsoft YaHei"/>
               </a:rPr>
               <a:t>•  WS 与 HTTP 竞速，慢节点也不卡死</a:t>
             </a:r>
-            <a:endParaRPr sz="1600" b="0">
-              <a:solidFill>
-                <a:srgbClr val="E9E9F2"/>
-              </a:solidFill>
-              <a:latin typeface="微软雅黑" panose="020B0503020204020204" charset="-122"/>
-            </a:endParaRPr>
           </a:p>
         </p:txBody>
       </p:sp>
@@ -8725,7 +9243,7 @@
           <a:noFill/>
         </p:spPr>
         <p:txBody>
-          <a:bodyPr wrap="square" lIns="36576" tIns="18288" rIns="36576" bIns="18288" anchor="t">
+          <a:bodyPr wrap="square" anchor="t" lIns="36576" rIns="36576" tIns="18288" bIns="18288">
             <a:spAutoFit/>
           </a:bodyPr>
           <a:lstStyle/>
@@ -8736,16 +9254,10 @@
                 <a:solidFill>
                   <a:srgbClr val="FFFFFF"/>
                 </a:solidFill>
-                <a:latin typeface="微软雅黑" panose="020B0503020204020204" charset="-122"/>
+                <a:latin typeface="Microsoft YaHei"/>
               </a:rPr>
               <a:t>Gas 趋势（示意）</a:t>
             </a:r>
-            <a:endParaRPr sz="1700" b="1">
-              <a:solidFill>
-                <a:srgbClr val="FFFFFF"/>
-              </a:solidFill>
-              <a:latin typeface="微软雅黑" panose="020B0503020204020204" charset="-122"/>
-            </a:endParaRPr>
           </a:p>
         </p:txBody>
       </p:sp>
@@ -9411,7 +9923,7 @@
           <a:noFill/>
         </p:spPr>
         <p:txBody>
-          <a:bodyPr wrap="square" lIns="36576" tIns="18288" rIns="36576" bIns="18288" anchor="t">
+          <a:bodyPr wrap="square" anchor="t" lIns="36576" rIns="36576" tIns="18288" bIns="18288">
             <a:spAutoFit/>
           </a:bodyPr>
           <a:lstStyle/>
@@ -9422,16 +9934,10 @@
                 <a:solidFill>
                   <a:srgbClr val="9CA3B8"/>
                 </a:solidFill>
-                <a:latin typeface="微软雅黑" panose="020B0503020204020204" charset="-122"/>
+                <a:latin typeface="Microsoft YaHei"/>
               </a:rPr>
               <a:t>实时数据，一眼看懂网络状态</a:t>
             </a:r>
-            <a:endParaRPr sz="1200" b="0">
-              <a:solidFill>
-                <a:srgbClr val="9CA3B8"/>
-              </a:solidFill>
-              <a:latin typeface="微软雅黑" panose="020B0503020204020204" charset="-122"/>
-            </a:endParaRPr>
           </a:p>
         </p:txBody>
       </p:sp>
@@ -9452,7 +9958,7 @@
           <a:noFill/>
         </p:spPr>
         <p:txBody>
-          <a:bodyPr wrap="square" lIns="36576" tIns="18288" rIns="36576" bIns="18288" anchor="t">
+          <a:bodyPr wrap="square" anchor="t" lIns="36576" rIns="36576" tIns="18288" bIns="18288">
             <a:spAutoFit/>
           </a:bodyPr>
           <a:lstStyle/>
@@ -9463,16 +9969,10 @@
                 <a:solidFill>
                   <a:srgbClr val="9CA3B8"/>
                 </a:solidFill>
-                <a:latin typeface="微软雅黑" panose="020B0503020204020204" charset="-122"/>
+                <a:latin typeface="Microsoft YaHei"/>
               </a:rPr>
               <a:t>MonadLens · 看清网络，看清后果</a:t>
             </a:r>
-            <a:endParaRPr sz="1000" b="0">
-              <a:solidFill>
-                <a:srgbClr val="9CA3B8"/>
-              </a:solidFill>
-              <a:latin typeface="微软雅黑" panose="020B0503020204020204" charset="-122"/>
-            </a:endParaRPr>
           </a:p>
         </p:txBody>
       </p:sp>
@@ -9493,7 +9993,7 @@
           <a:noFill/>
         </p:spPr>
         <p:txBody>
-          <a:bodyPr wrap="square" lIns="36576" tIns="18288" rIns="36576" bIns="18288" anchor="t">
+          <a:bodyPr wrap="square" anchor="t" lIns="36576" rIns="36576" tIns="18288" bIns="18288">
             <a:spAutoFit/>
           </a:bodyPr>
           <a:lstStyle/>
@@ -9504,16 +10004,10 @@
                 <a:solidFill>
                   <a:srgbClr val="9CA3B8"/>
                 </a:solidFill>
-                <a:latin typeface="微软雅黑" panose="020B0503020204020204" charset="-122"/>
+                <a:latin typeface="Microsoft YaHei"/>
               </a:rPr>
               <a:t>5</a:t>
             </a:r>
-            <a:endParaRPr sz="1000" b="0">
-              <a:solidFill>
-                <a:srgbClr val="9CA3B8"/>
-              </a:solidFill>
-              <a:latin typeface="微软雅黑" panose="020B0503020204020204" charset="-122"/>
-            </a:endParaRPr>
           </a:p>
         </p:txBody>
       </p:sp>
@@ -9526,7 +10020,7 @@
 </file>
 
 <file path=ppt/slides/slide6.xml><?xml version="1.0" encoding="utf-8"?>
-<p:sld xmlns:a="http://schemas.openxmlformats.org/drawingml/2006/main" xmlns:r="http://schemas.openxmlformats.org/officeDocument/2006/relationships" xmlns:p="http://schemas.openxmlformats.org/presentationml/2006/main">
+<p:sld xmlns:a="http://schemas.openxmlformats.org/drawingml/2006/main" xmlns:p="http://schemas.openxmlformats.org/presentationml/2006/main" xmlns:r="http://schemas.openxmlformats.org/officeDocument/2006/relationships">
   <p:cSld>
     <p:spTree>
       <p:nvGrpSpPr>
@@ -9596,7 +10090,7 @@
           <a:noFill/>
         </p:spPr>
         <p:txBody>
-          <a:bodyPr wrap="square" lIns="36576" tIns="18288" rIns="36576" bIns="18288" anchor="t">
+          <a:bodyPr wrap="square" anchor="t" lIns="36576" rIns="36576" tIns="18288" bIns="18288">
             <a:spAutoFit/>
           </a:bodyPr>
           <a:lstStyle/>
@@ -9607,16 +10101,10 @@
                 <a:solidFill>
                   <a:srgbClr val="8B5CF6"/>
                 </a:solidFill>
-                <a:latin typeface="微软雅黑" panose="020B0503020204020204" charset="-122"/>
+                <a:latin typeface="Microsoft YaHei"/>
               </a:rPr>
               <a:t>核心功能 ②</a:t>
             </a:r>
-            <a:endParaRPr sz="1300" b="1">
-              <a:solidFill>
-                <a:srgbClr val="8B5CF6"/>
-              </a:solidFill>
-              <a:latin typeface="微软雅黑" panose="020B0503020204020204" charset="-122"/>
-            </a:endParaRPr>
           </a:p>
         </p:txBody>
       </p:sp>
@@ -9637,7 +10125,7 @@
           <a:noFill/>
         </p:spPr>
         <p:txBody>
-          <a:bodyPr wrap="square" lIns="36576" tIns="18288" rIns="36576" bIns="18288" anchor="t">
+          <a:bodyPr wrap="square" anchor="t" lIns="36576" rIns="36576" tIns="18288" bIns="18288">
             <a:spAutoFit/>
           </a:bodyPr>
           <a:lstStyle/>
@@ -9648,16 +10136,10 @@
                 <a:solidFill>
                   <a:srgbClr val="FFFFFF"/>
                 </a:solidFill>
-                <a:latin typeface="微软雅黑" panose="020B0503020204020204" charset="-122"/>
+                <a:latin typeface="Microsoft YaHei"/>
               </a:rPr>
               <a:t>Agent 双脑 AI 对话</a:t>
             </a:r>
-            <a:endParaRPr sz="3000" b="1">
-              <a:solidFill>
-                <a:srgbClr val="FFFFFF"/>
-              </a:solidFill>
-              <a:latin typeface="微软雅黑" panose="020B0503020204020204" charset="-122"/>
-            </a:endParaRPr>
           </a:p>
         </p:txBody>
       </p:sp>
@@ -9768,7 +10250,7 @@
           <a:noFill/>
         </p:spPr>
         <p:txBody>
-          <a:bodyPr wrap="square" lIns="36576" tIns="18288" rIns="36576" bIns="18288" anchor="t">
+          <a:bodyPr wrap="square" anchor="t" lIns="36576" rIns="36576" tIns="18288" bIns="18288">
             <a:spAutoFit/>
           </a:bodyPr>
           <a:lstStyle/>
@@ -9779,16 +10261,10 @@
                 <a:solidFill>
                   <a:srgbClr val="FFFFFF"/>
                 </a:solidFill>
-                <a:latin typeface="微软雅黑" panose="020B0503020204020204" charset="-122"/>
+                <a:latin typeface="Microsoft YaHei"/>
               </a:rPr>
               <a:t>🧠 规则引擎</a:t>
             </a:r>
-            <a:endParaRPr sz="1900" b="1">
-              <a:solidFill>
-                <a:srgbClr val="FFFFFF"/>
-              </a:solidFill>
-              <a:latin typeface="微软雅黑" panose="020B0503020204020204" charset="-122"/>
-            </a:endParaRPr>
           </a:p>
         </p:txBody>
       </p:sp>
@@ -9809,7 +10285,7 @@
           <a:noFill/>
         </p:spPr>
         <p:txBody>
-          <a:bodyPr wrap="square" lIns="36576" tIns="18288" rIns="36576" bIns="18288" anchor="t">
+          <a:bodyPr wrap="square" anchor="t" lIns="36576" rIns="36576" tIns="18288" bIns="18288">
             <a:spAutoFit/>
           </a:bodyPr>
           <a:lstStyle/>
@@ -9824,16 +10300,10 @@
                 <a:solidFill>
                   <a:srgbClr val="E9E9F2"/>
                 </a:solidFill>
-                <a:latin typeface="微软雅黑" panose="020B0503020204020204" charset="-122"/>
+                <a:latin typeface="Microsoft YaHei"/>
               </a:rPr>
               <a:t>•  快、确定，覆盖已知意图</a:t>
             </a:r>
-            <a:endParaRPr sz="1500" b="0">
-              <a:solidFill>
-                <a:srgbClr val="E9E9F2"/>
-              </a:solidFill>
-              <a:latin typeface="微软雅黑" panose="020B0503020204020204" charset="-122"/>
-            </a:endParaRPr>
           </a:p>
           <a:p>
             <a:pPr algn="l">
@@ -9846,16 +10316,10 @@
                 <a:solidFill>
                   <a:srgbClr val="E9E9F2"/>
                 </a:solidFill>
-                <a:latin typeface="微软雅黑" panose="020B0503020204020204" charset="-122"/>
+                <a:latin typeface="Microsoft YaHei"/>
               </a:rPr>
               <a:t>•  交易规划、攻击演示一键触发</a:t>
             </a:r>
-            <a:endParaRPr sz="1500" b="0">
-              <a:solidFill>
-                <a:srgbClr val="E9E9F2"/>
-              </a:solidFill>
-              <a:latin typeface="微软雅黑" panose="020B0503020204020204" charset="-122"/>
-            </a:endParaRPr>
           </a:p>
         </p:txBody>
       </p:sp>
@@ -9966,7 +10430,7 @@
           <a:noFill/>
         </p:spPr>
         <p:txBody>
-          <a:bodyPr wrap="square" lIns="36576" tIns="18288" rIns="36576" bIns="18288" anchor="t">
+          <a:bodyPr wrap="square" anchor="t" lIns="36576" rIns="36576" tIns="18288" bIns="18288">
             <a:spAutoFit/>
           </a:bodyPr>
           <a:lstStyle/>
@@ -9977,16 +10441,10 @@
                 <a:solidFill>
                   <a:srgbClr val="FFFFFF"/>
                 </a:solidFill>
-                <a:latin typeface="微软雅黑" panose="020B0503020204020204" charset="-122"/>
-              </a:rPr>
-              <a:t>✨ DeepSeek LLM</a:t>
-            </a:r>
-            <a:endParaRPr sz="1900" b="1">
-              <a:solidFill>
-                <a:srgbClr val="FFFFFF"/>
-              </a:solidFill>
-              <a:latin typeface="微软雅黑" panose="020B0503020204020204" charset="-122"/>
-            </a:endParaRPr>
+                <a:latin typeface="Microsoft YaHei"/>
+              </a:rPr>
+              <a:t>✨ LLM（OpenAI 兼容）</a:t>
+            </a:r>
           </a:p>
         </p:txBody>
       </p:sp>
@@ -10007,7 +10465,7 @@
           <a:noFill/>
         </p:spPr>
         <p:txBody>
-          <a:bodyPr wrap="square" lIns="36576" tIns="18288" rIns="36576" bIns="18288" anchor="t">
+          <a:bodyPr wrap="square" anchor="t" lIns="36576" rIns="36576" tIns="18288" bIns="18288">
             <a:spAutoFit/>
           </a:bodyPr>
           <a:lstStyle/>
@@ -10022,16 +10480,10 @@
                 <a:solidFill>
                   <a:srgbClr val="E9E9F2"/>
                 </a:solidFill>
-                <a:latin typeface="微软雅黑" panose="020B0503020204020204" charset="-122"/>
+                <a:latin typeface="Microsoft YaHei"/>
               </a:rPr>
               <a:t>•  自然、智能，理解自由提问</a:t>
             </a:r>
-            <a:endParaRPr sz="1500" b="0">
-              <a:solidFill>
-                <a:srgbClr val="E9E9F2"/>
-              </a:solidFill>
-              <a:latin typeface="微软雅黑" panose="020B0503020204020204" charset="-122"/>
-            </a:endParaRPr>
           </a:p>
           <a:p>
             <a:pPr algn="l">
@@ -10044,16 +10496,10 @@
                 <a:solidFill>
                   <a:srgbClr val="E9E9F2"/>
                 </a:solidFill>
-                <a:latin typeface="微软雅黑" panose="020B0503020204020204" charset="-122"/>
-              </a:rPr>
-              <a:t>•  解释「为什么先模拟再签名」等</a:t>
-            </a:r>
-            <a:endParaRPr sz="1500" b="0">
-              <a:solidFill>
-                <a:srgbClr val="E9E9F2"/>
-              </a:solidFill>
-              <a:latin typeface="微软雅黑" panose="020B0503020204020204" charset="-122"/>
-            </a:endParaRPr>
+                <a:latin typeface="Microsoft YaHei"/>
+              </a:rPr>
+              <a:t>•  当前接入智谱 glm-4-flash，可一键换模型</a:t>
+            </a:r>
           </a:p>
         </p:txBody>
       </p:sp>
@@ -10166,7 +10612,7 @@
           <a:noFill/>
         </p:spPr>
         <p:txBody>
-          <a:bodyPr wrap="square" lIns="36576" tIns="18288" rIns="36576" bIns="18288" anchor="t">
+          <a:bodyPr wrap="square" anchor="t" lIns="36576" rIns="36576" tIns="18288" bIns="18288">
             <a:spAutoFit/>
           </a:bodyPr>
           <a:lstStyle/>
@@ -10177,16 +10623,10 @@
                 <a:solidFill>
                   <a:srgbClr val="FFFFFF"/>
                 </a:solidFill>
-                <a:latin typeface="微软雅黑" panose="020B0503020204020204" charset="-122"/>
+                <a:latin typeface="Microsoft YaHei"/>
               </a:rPr>
               <a:t>🔄 自动降级：LLM 不可用时切回规则引擎，永不掉线</a:t>
             </a:r>
-            <a:endParaRPr sz="1700" b="1">
-              <a:solidFill>
-                <a:srgbClr val="FFFFFF"/>
-              </a:solidFill>
-              <a:latin typeface="微软雅黑" panose="020B0503020204020204" charset="-122"/>
-            </a:endParaRPr>
           </a:p>
         </p:txBody>
       </p:sp>
@@ -10207,7 +10647,7 @@
           <a:noFill/>
         </p:spPr>
         <p:txBody>
-          <a:bodyPr wrap="square" lIns="36576" tIns="18288" rIns="36576" bIns="18288" anchor="t">
+          <a:bodyPr wrap="square" anchor="t" lIns="36576" rIns="36576" tIns="18288" bIns="18288">
             <a:spAutoFit/>
           </a:bodyPr>
           <a:lstStyle/>
@@ -10222,16 +10662,10 @@
                 <a:solidFill>
                   <a:srgbClr val="9CA3B8"/>
                 </a:solidFill>
-                <a:latin typeface="微软雅黑" panose="020B0503020204020204" charset="-122"/>
+                <a:latin typeface="Microsoft YaHei"/>
               </a:rPr>
               <a:t>两条大脑互为备份，演示现场再也不怕「AI 抽风」导致功能失灵。</a:t>
             </a:r>
-            <a:endParaRPr sz="1500" b="0">
-              <a:solidFill>
-                <a:srgbClr val="9CA3B8"/>
-              </a:solidFill>
-              <a:latin typeface="微软雅黑" panose="020B0503020204020204" charset="-122"/>
-            </a:endParaRPr>
           </a:p>
         </p:txBody>
       </p:sp>
@@ -10252,7 +10686,7 @@
           <a:noFill/>
         </p:spPr>
         <p:txBody>
-          <a:bodyPr wrap="square" lIns="36576" tIns="18288" rIns="36576" bIns="18288" anchor="t">
+          <a:bodyPr wrap="square" anchor="t" lIns="36576" rIns="36576" tIns="18288" bIns="18288">
             <a:spAutoFit/>
           </a:bodyPr>
           <a:lstStyle/>
@@ -10263,16 +10697,10 @@
                 <a:solidFill>
                   <a:srgbClr val="9CA3B8"/>
                 </a:solidFill>
-                <a:latin typeface="微软雅黑" panose="020B0503020204020204" charset="-122"/>
+                <a:latin typeface="Microsoft YaHei"/>
               </a:rPr>
               <a:t>MonadLens · 看清网络，看清后果</a:t>
             </a:r>
-            <a:endParaRPr sz="1000" b="0">
-              <a:solidFill>
-                <a:srgbClr val="9CA3B8"/>
-              </a:solidFill>
-              <a:latin typeface="微软雅黑" panose="020B0503020204020204" charset="-122"/>
-            </a:endParaRPr>
           </a:p>
         </p:txBody>
       </p:sp>
@@ -10293,7 +10721,7 @@
           <a:noFill/>
         </p:spPr>
         <p:txBody>
-          <a:bodyPr wrap="square" lIns="36576" tIns="18288" rIns="36576" bIns="18288" anchor="t">
+          <a:bodyPr wrap="square" anchor="t" lIns="36576" rIns="36576" tIns="18288" bIns="18288">
             <a:spAutoFit/>
           </a:bodyPr>
           <a:lstStyle/>
@@ -10304,16 +10732,10 @@
                 <a:solidFill>
                   <a:srgbClr val="9CA3B8"/>
                 </a:solidFill>
-                <a:latin typeface="微软雅黑" panose="020B0503020204020204" charset="-122"/>
+                <a:latin typeface="Microsoft YaHei"/>
               </a:rPr>
               <a:t>6</a:t>
             </a:r>
-            <a:endParaRPr sz="1000" b="0">
-              <a:solidFill>
-                <a:srgbClr val="9CA3B8"/>
-              </a:solidFill>
-              <a:latin typeface="微软雅黑" panose="020B0503020204020204" charset="-122"/>
-            </a:endParaRPr>
           </a:p>
         </p:txBody>
       </p:sp>
@@ -10326,7 +10748,7 @@
 </file>
 
 <file path=ppt/slides/slide7.xml><?xml version="1.0" encoding="utf-8"?>
-<p:sld xmlns:a="http://schemas.openxmlformats.org/drawingml/2006/main" xmlns:r="http://schemas.openxmlformats.org/officeDocument/2006/relationships" xmlns:p="http://schemas.openxmlformats.org/presentationml/2006/main">
+<p:sld xmlns:a="http://schemas.openxmlformats.org/drawingml/2006/main" xmlns:p="http://schemas.openxmlformats.org/presentationml/2006/main" xmlns:r="http://schemas.openxmlformats.org/officeDocument/2006/relationships">
   <p:cSld>
     <p:spTree>
       <p:nvGrpSpPr>
@@ -10396,7 +10818,7 @@
           <a:noFill/>
         </p:spPr>
         <p:txBody>
-          <a:bodyPr wrap="square" lIns="36576" tIns="18288" rIns="36576" bIns="18288" anchor="t">
+          <a:bodyPr wrap="square" anchor="t" lIns="36576" rIns="36576" tIns="18288" bIns="18288">
             <a:spAutoFit/>
           </a:bodyPr>
           <a:lstStyle/>
@@ -10407,16 +10829,10 @@
                 <a:solidFill>
                   <a:srgbClr val="8B5CF6"/>
                 </a:solidFill>
-                <a:latin typeface="微软雅黑" panose="020B0503020204020204" charset="-122"/>
+                <a:latin typeface="Microsoft YaHei"/>
               </a:rPr>
               <a:t>核心功能 ③</a:t>
             </a:r>
-            <a:endParaRPr sz="1300" b="1">
-              <a:solidFill>
-                <a:srgbClr val="8B5CF6"/>
-              </a:solidFill>
-              <a:latin typeface="微软雅黑" panose="020B0503020204020204" charset="-122"/>
-            </a:endParaRPr>
           </a:p>
         </p:txBody>
       </p:sp>
@@ -10437,7 +10853,7 @@
           <a:noFill/>
         </p:spPr>
         <p:txBody>
-          <a:bodyPr wrap="square" lIns="36576" tIns="18288" rIns="36576" bIns="18288" anchor="t">
+          <a:bodyPr wrap="square" anchor="t" lIns="36576" rIns="36576" tIns="18288" bIns="18288">
             <a:spAutoFit/>
           </a:bodyPr>
           <a:lstStyle/>
@@ -10448,16 +10864,10 @@
                 <a:solidFill>
                   <a:srgbClr val="FFFFFF"/>
                 </a:solidFill>
-                <a:latin typeface="微软雅黑" panose="020B0503020204020204" charset="-122"/>
+                <a:latin typeface="Microsoft YaHei"/>
               </a:rPr>
               <a:t>后果透镜（签名前模拟）</a:t>
             </a:r>
-            <a:endParaRPr sz="3000" b="1">
-              <a:solidFill>
-                <a:srgbClr val="FFFFFF"/>
-              </a:solidFill>
-              <a:latin typeface="微软雅黑" panose="020B0503020204020204" charset="-122"/>
-            </a:endParaRPr>
           </a:p>
         </p:txBody>
       </p:sp>
@@ -10568,7 +10978,7 @@
           <a:noFill/>
         </p:spPr>
         <p:txBody>
-          <a:bodyPr wrap="square" lIns="36576" tIns="18288" rIns="36576" bIns="18288" anchor="t">
+          <a:bodyPr wrap="square" anchor="t" lIns="36576" rIns="36576" tIns="18288" bIns="18288">
             <a:spAutoFit/>
           </a:bodyPr>
           <a:lstStyle/>
@@ -10579,16 +10989,10 @@
                 <a:solidFill>
                   <a:srgbClr val="FFFFFF"/>
                 </a:solidFill>
-                <a:latin typeface="微软雅黑" panose="020B0503020204020204" charset="-122"/>
+                <a:latin typeface="Microsoft YaHei"/>
               </a:rPr>
               <a:t>它模拟什么</a:t>
             </a:r>
-            <a:endParaRPr sz="2000" b="1">
-              <a:solidFill>
-                <a:srgbClr val="FFFFFF"/>
-              </a:solidFill>
-              <a:latin typeface="微软雅黑" panose="020B0503020204020204" charset="-122"/>
-            </a:endParaRPr>
           </a:p>
         </p:txBody>
       </p:sp>
@@ -10609,7 +11013,7 @@
           <a:noFill/>
         </p:spPr>
         <p:txBody>
-          <a:bodyPr wrap="square" lIns="36576" tIns="18288" rIns="36576" bIns="18288" anchor="t">
+          <a:bodyPr wrap="square" anchor="t" lIns="36576" rIns="36576" tIns="18288" bIns="18288">
             <a:spAutoFit/>
           </a:bodyPr>
           <a:lstStyle/>
@@ -10624,16 +11028,10 @@
                 <a:solidFill>
                   <a:srgbClr val="E9E9F2"/>
                 </a:solidFill>
-                <a:latin typeface="微软雅黑" panose="020B0503020204020204" charset="-122"/>
+                <a:latin typeface="Microsoft YaHei"/>
               </a:rPr>
               <a:t>•  资金流向：谁转出、谁收到、多少</a:t>
             </a:r>
-            <a:endParaRPr sz="1600" b="0">
-              <a:solidFill>
-                <a:srgbClr val="E9E9F2"/>
-              </a:solidFill>
-              <a:latin typeface="微软雅黑" panose="020B0503020204020204" charset="-122"/>
-            </a:endParaRPr>
           </a:p>
           <a:p>
             <a:pPr algn="l">
@@ -10646,16 +11044,10 @@
                 <a:solidFill>
                   <a:srgbClr val="E9E9F2"/>
                 </a:solidFill>
-                <a:latin typeface="微软雅黑" panose="020B0503020204020204" charset="-122"/>
+                <a:latin typeface="Microsoft YaHei"/>
               </a:rPr>
               <a:t>•  授权范围：交出的是定额还是无限</a:t>
             </a:r>
-            <a:endParaRPr sz="1600" b="0">
-              <a:solidFill>
-                <a:srgbClr val="E9E9F2"/>
-              </a:solidFill>
-              <a:latin typeface="微软雅黑" panose="020B0503020204020204" charset="-122"/>
-            </a:endParaRPr>
           </a:p>
           <a:p>
             <a:pPr algn="l">
@@ -10668,16 +11060,10 @@
                 <a:solidFill>
                   <a:srgbClr val="E9E9F2"/>
                 </a:solidFill>
-                <a:latin typeface="微软雅黑" panose="020B0503020204020204" charset="-122"/>
+                <a:latin typeface="Microsoft YaHei"/>
               </a:rPr>
               <a:t>•  余额变化：签名前后的净变动</a:t>
             </a:r>
-            <a:endParaRPr sz="1600" b="0">
-              <a:solidFill>
-                <a:srgbClr val="E9E9F2"/>
-              </a:solidFill>
-              <a:latin typeface="微软雅黑" panose="020B0503020204020204" charset="-122"/>
-            </a:endParaRPr>
           </a:p>
           <a:p>
             <a:pPr algn="l">
@@ -10690,16 +11076,10 @@
                 <a:solidFill>
                   <a:srgbClr val="E9E9F2"/>
                 </a:solidFill>
-                <a:latin typeface="微软雅黑" panose="020B0503020204020204" charset="-122"/>
+                <a:latin typeface="Microsoft YaHei"/>
               </a:rPr>
               <a:t>•  收款方对账：有没有偷偷换地址</a:t>
             </a:r>
-            <a:endParaRPr sz="1600" b="0">
-              <a:solidFill>
-                <a:srgbClr val="E9E9F2"/>
-              </a:solidFill>
-              <a:latin typeface="微软雅黑" panose="020B0503020204020204" charset="-122"/>
-            </a:endParaRPr>
           </a:p>
         </p:txBody>
       </p:sp>
@@ -10810,7 +11190,7 @@
           <a:noFill/>
         </p:spPr>
         <p:txBody>
-          <a:bodyPr wrap="square" lIns="36576" tIns="18288" rIns="36576" bIns="18288" anchor="t">
+          <a:bodyPr wrap="square" anchor="t" lIns="36576" rIns="36576" tIns="18288" bIns="18288">
             <a:spAutoFit/>
           </a:bodyPr>
           <a:lstStyle/>
@@ -10821,16 +11201,10 @@
                 <a:solidFill>
                   <a:srgbClr val="FFFFFF"/>
                 </a:solidFill>
-                <a:latin typeface="微软雅黑" panose="020B0503020204020204" charset="-122"/>
+                <a:latin typeface="Microsoft YaHei"/>
               </a:rPr>
               <a:t>为什么重要</a:t>
             </a:r>
-            <a:endParaRPr sz="2000" b="1">
-              <a:solidFill>
-                <a:srgbClr val="FFFFFF"/>
-              </a:solidFill>
-              <a:latin typeface="微软雅黑" panose="020B0503020204020204" charset="-122"/>
-            </a:endParaRPr>
           </a:p>
         </p:txBody>
       </p:sp>
@@ -10851,7 +11225,7 @@
           <a:noFill/>
         </p:spPr>
         <p:txBody>
-          <a:bodyPr wrap="square" lIns="36576" tIns="18288" rIns="36576" bIns="18288" anchor="t">
+          <a:bodyPr wrap="square" anchor="t" lIns="36576" rIns="36576" tIns="18288" bIns="18288">
             <a:spAutoFit/>
           </a:bodyPr>
           <a:lstStyle/>
@@ -10866,16 +11240,10 @@
                 <a:solidFill>
                   <a:srgbClr val="E9E9F2"/>
                 </a:solidFill>
-                <a:latin typeface="微软雅黑" panose="020B0503020204020204" charset="-122"/>
+                <a:latin typeface="Microsoft YaHei"/>
               </a:rPr>
               <a:t>•  基于 Moss SDK 的 debug_traceCall 真模拟</a:t>
             </a:r>
-            <a:endParaRPr sz="1600" b="0">
-              <a:solidFill>
-                <a:srgbClr val="E9E9F2"/>
-              </a:solidFill>
-              <a:latin typeface="微软雅黑" panose="020B0503020204020204" charset="-122"/>
-            </a:endParaRPr>
           </a:p>
           <a:p>
             <a:pPr algn="l">
@@ -10888,16 +11256,10 @@
                 <a:solidFill>
                   <a:srgbClr val="E9E9F2"/>
                 </a:solidFill>
-                <a:latin typeface="微软雅黑" panose="020B0503020204020204" charset="-122"/>
+                <a:latin typeface="Microsoft YaHei"/>
               </a:rPr>
               <a:t>•  主网 0 MON 也能跑（内部预充 1000 MON）</a:t>
             </a:r>
-            <a:endParaRPr sz="1600" b="0">
-              <a:solidFill>
-                <a:srgbClr val="E9E9F2"/>
-              </a:solidFill>
-              <a:latin typeface="微软雅黑" panose="020B0503020204020204" charset="-122"/>
-            </a:endParaRPr>
           </a:p>
           <a:p>
             <a:pPr algn="l">
@@ -10910,16 +11272,10 @@
                 <a:solidFill>
                   <a:srgbClr val="E9E9F2"/>
                 </a:solidFill>
-                <a:latin typeface="微软雅黑" panose="020B0503020204020204" charset="-122"/>
+                <a:latin typeface="Microsoft YaHei"/>
               </a:rPr>
               <a:t>•  把「看不见的后果」变成「看得见的清单」</a:t>
             </a:r>
-            <a:endParaRPr sz="1600" b="0">
-              <a:solidFill>
-                <a:srgbClr val="E9E9F2"/>
-              </a:solidFill>
-              <a:latin typeface="微软雅黑" panose="020B0503020204020204" charset="-122"/>
-            </a:endParaRPr>
           </a:p>
           <a:p>
             <a:pPr algn="l">
@@ -10932,16 +11288,10 @@
                 <a:solidFill>
                   <a:srgbClr val="E9E9F2"/>
                 </a:solidFill>
-                <a:latin typeface="微软雅黑" panose="020B0503020204020204" charset="-122"/>
+                <a:latin typeface="Microsoft YaHei"/>
               </a:rPr>
               <a:t>•  先把风险看清楚，再决定要不要签</a:t>
             </a:r>
-            <a:endParaRPr sz="1600" b="0">
-              <a:solidFill>
-                <a:srgbClr val="E9E9F2"/>
-              </a:solidFill>
-              <a:latin typeface="微软雅黑" panose="020B0503020204020204" charset="-122"/>
-            </a:endParaRPr>
           </a:p>
         </p:txBody>
       </p:sp>
@@ -10962,7 +11312,7 @@
           <a:noFill/>
         </p:spPr>
         <p:txBody>
-          <a:bodyPr wrap="square" lIns="36576" tIns="18288" rIns="36576" bIns="18288" anchor="t">
+          <a:bodyPr wrap="square" anchor="t" lIns="36576" rIns="36576" tIns="18288" bIns="18288">
             <a:spAutoFit/>
           </a:bodyPr>
           <a:lstStyle/>
@@ -10973,16 +11323,10 @@
                 <a:solidFill>
                   <a:srgbClr val="9CA3B8"/>
                 </a:solidFill>
-                <a:latin typeface="微软雅黑" panose="020B0503020204020204" charset="-122"/>
+                <a:latin typeface="Microsoft YaHei"/>
               </a:rPr>
               <a:t>MonadLens · 看清网络，看清后果</a:t>
             </a:r>
-            <a:endParaRPr sz="1000" b="0">
-              <a:solidFill>
-                <a:srgbClr val="9CA3B8"/>
-              </a:solidFill>
-              <a:latin typeface="微软雅黑" panose="020B0503020204020204" charset="-122"/>
-            </a:endParaRPr>
           </a:p>
         </p:txBody>
       </p:sp>
@@ -11003,7 +11347,7 @@
           <a:noFill/>
         </p:spPr>
         <p:txBody>
-          <a:bodyPr wrap="square" lIns="36576" tIns="18288" rIns="36576" bIns="18288" anchor="t">
+          <a:bodyPr wrap="square" anchor="t" lIns="36576" rIns="36576" tIns="18288" bIns="18288">
             <a:spAutoFit/>
           </a:bodyPr>
           <a:lstStyle/>
@@ -11014,16 +11358,10 @@
                 <a:solidFill>
                   <a:srgbClr val="9CA3B8"/>
                 </a:solidFill>
-                <a:latin typeface="微软雅黑" panose="020B0503020204020204" charset="-122"/>
+                <a:latin typeface="Microsoft YaHei"/>
               </a:rPr>
               <a:t>7</a:t>
             </a:r>
-            <a:endParaRPr sz="1000" b="0">
-              <a:solidFill>
-                <a:srgbClr val="9CA3B8"/>
-              </a:solidFill>
-              <a:latin typeface="微软雅黑" panose="020B0503020204020204" charset="-122"/>
-            </a:endParaRPr>
           </a:p>
         </p:txBody>
       </p:sp>
@@ -11036,7 +11374,7 @@
 </file>
 
 <file path=ppt/slides/slide8.xml><?xml version="1.0" encoding="utf-8"?>
-<p:sld xmlns:a="http://schemas.openxmlformats.org/drawingml/2006/main" xmlns:r="http://schemas.openxmlformats.org/officeDocument/2006/relationships" xmlns:p="http://schemas.openxmlformats.org/presentationml/2006/main">
+<p:sld xmlns:a="http://schemas.openxmlformats.org/drawingml/2006/main" xmlns:p="http://schemas.openxmlformats.org/presentationml/2006/main" xmlns:r="http://schemas.openxmlformats.org/officeDocument/2006/relationships">
   <p:cSld>
     <p:spTree>
       <p:nvGrpSpPr>
@@ -11106,7 +11444,7 @@
           <a:noFill/>
         </p:spPr>
         <p:txBody>
-          <a:bodyPr wrap="square" lIns="36576" tIns="18288" rIns="36576" bIns="18288" anchor="t">
+          <a:bodyPr wrap="square" anchor="t" lIns="36576" rIns="36576" tIns="18288" bIns="18288">
             <a:spAutoFit/>
           </a:bodyPr>
           <a:lstStyle/>
@@ -11117,16 +11455,10 @@
                 <a:solidFill>
                   <a:srgbClr val="8B5CF6"/>
                 </a:solidFill>
-                <a:latin typeface="微软雅黑" panose="020B0503020204020204" charset="-122"/>
+                <a:latin typeface="Microsoft YaHei"/>
               </a:rPr>
               <a:t>核心功能 ④</a:t>
             </a:r>
-            <a:endParaRPr sz="1300" b="1">
-              <a:solidFill>
-                <a:srgbClr val="8B5CF6"/>
-              </a:solidFill>
-              <a:latin typeface="微软雅黑" panose="020B0503020204020204" charset="-122"/>
-            </a:endParaRPr>
           </a:p>
         </p:txBody>
       </p:sp>
@@ -11147,7 +11479,7 @@
           <a:noFill/>
         </p:spPr>
         <p:txBody>
-          <a:bodyPr wrap="square" lIns="36576" tIns="18288" rIns="36576" bIns="18288" anchor="t">
+          <a:bodyPr wrap="square" anchor="t" lIns="36576" rIns="36576" tIns="18288" bIns="18288">
             <a:spAutoFit/>
           </a:bodyPr>
           <a:lstStyle/>
@@ -11158,16 +11490,10 @@
                 <a:solidFill>
                   <a:srgbClr val="FFFFFF"/>
                 </a:solidFill>
-                <a:latin typeface="微软雅黑" panose="020B0503020204020204" charset="-122"/>
-              </a:rPr>
-              <a:t>5 类攻击护栏 — 签名前拦截</a:t>
-            </a:r>
-            <a:endParaRPr sz="3000" b="1">
-              <a:solidFill>
-                <a:srgbClr val="FFFFFF"/>
-              </a:solidFill>
-              <a:latin typeface="微软雅黑" panose="020B0503020204020204" charset="-122"/>
-            </a:endParaRPr>
+                <a:latin typeface="Microsoft YaHei"/>
+              </a:rPr>
+              <a:t>7 类攻击护栏 — 签名前拦截</a:t>
+            </a:r>
           </a:p>
         </p:txBody>
       </p:sp>
@@ -11180,7 +11506,7 @@
         <p:spPr>
           <a:xfrm>
             <a:off x="548640" y="1828800"/>
-            <a:ext cx="2084831" cy="1691640"/>
+            <a:ext cx="1481328" cy="1874519"/>
           </a:xfrm>
           <a:prstGeom prst="roundRect">
             <a:avLst>
@@ -11225,36 +11551,30 @@
         </p:nvSpPr>
         <p:spPr>
           <a:xfrm>
-            <a:off x="548640" y="2011680"/>
-            <a:ext cx="2084831" cy="731520"/>
-          </a:xfrm>
-          <a:prstGeom prst="rect">
-            <a:avLst/>
-          </a:prstGeom>
-          <a:noFill/>
-        </p:spPr>
-        <p:txBody>
-          <a:bodyPr wrap="square" lIns="36576" tIns="18288" rIns="36576" bIns="18288" anchor="ctr">
-            <a:spAutoFit/>
-          </a:bodyPr>
-          <a:lstStyle/>
-          <a:p>
-            <a:pPr algn="ctr"/>
-            <a:r>
-              <a:rPr sz="3000" b="0">
+            <a:off x="548640" y="1993392"/>
+            <a:ext cx="1481328" cy="640080"/>
+          </a:xfrm>
+          <a:prstGeom prst="rect">
+            <a:avLst/>
+          </a:prstGeom>
+          <a:noFill/>
+        </p:spPr>
+        <p:txBody>
+          <a:bodyPr wrap="square" anchor="ctr" lIns="36576" rIns="36576" tIns="18288" bIns="18288">
+            <a:spAutoFit/>
+          </a:bodyPr>
+          <a:lstStyle/>
+          <a:p>
+            <a:pPr algn="ctr"/>
+            <a:r>
+              <a:rPr sz="2700" b="0">
                 <a:solidFill>
                   <a:srgbClr val="F59E0B"/>
                 </a:solidFill>
-                <a:latin typeface="微软雅黑" panose="020B0503020204020204" charset="-122"/>
-              </a:rPr>
-              <a:t>🔄</a:t>
-            </a:r>
-            <a:endParaRPr sz="3000" b="0">
-              <a:solidFill>
-                <a:srgbClr val="F59E0B"/>
-              </a:solidFill>
-              <a:latin typeface="微软雅黑" panose="020B0503020204020204" charset="-122"/>
-            </a:endParaRPr>
+                <a:latin typeface="Microsoft YaHei"/>
+              </a:rPr>
+              <a:t>💥</a:t>
+            </a:r>
           </a:p>
         </p:txBody>
       </p:sp>
@@ -11266,36 +11586,30 @@
         </p:nvSpPr>
         <p:spPr>
           <a:xfrm>
-            <a:off x="548640" y="2697480"/>
-            <a:ext cx="2084831" cy="457200"/>
-          </a:xfrm>
-          <a:prstGeom prst="rect">
-            <a:avLst/>
-          </a:prstGeom>
-          <a:noFill/>
-        </p:spPr>
-        <p:txBody>
-          <a:bodyPr wrap="square" lIns="36576" tIns="18288" rIns="36576" bIns="18288" anchor="t">
-            <a:spAutoFit/>
-          </a:bodyPr>
-          <a:lstStyle/>
-          <a:p>
-            <a:pPr algn="ctr"/>
-            <a:r>
-              <a:rPr sz="1500" b="1">
+            <a:off x="548640" y="2724912"/>
+            <a:ext cx="1481328" cy="457200"/>
+          </a:xfrm>
+          <a:prstGeom prst="rect">
+            <a:avLst/>
+          </a:prstGeom>
+          <a:noFill/>
+        </p:spPr>
+        <p:txBody>
+          <a:bodyPr wrap="square" anchor="t" lIns="36576" rIns="36576" tIns="18288" bIns="18288">
+            <a:spAutoFit/>
+          </a:bodyPr>
+          <a:lstStyle/>
+          <a:p>
+            <a:pPr algn="ctr"/>
+            <a:r>
+              <a:rPr sz="1300" b="1">
                 <a:solidFill>
                   <a:srgbClr val="FFFFFF"/>
                 </a:solidFill>
-                <a:latin typeface="微软雅黑" panose="020B0503020204020204" charset="-122"/>
-              </a:rPr>
-              <a:t>收款方掉包</a:t>
-            </a:r>
-            <a:endParaRPr sz="1500" b="1">
-              <a:solidFill>
-                <a:srgbClr val="FFFFFF"/>
-              </a:solidFill>
-              <a:latin typeface="微软雅黑" panose="020B0503020204020204" charset="-122"/>
-            </a:endParaRPr>
+                <a:latin typeface="Microsoft YaHei"/>
+              </a:rPr>
+              <a:t>金额膨胀</a:t>
+            </a:r>
           </a:p>
         </p:txBody>
       </p:sp>
@@ -11307,16 +11621,16 @@
         </p:nvSpPr>
         <p:spPr>
           <a:xfrm>
-            <a:off x="548640" y="3108960"/>
-            <a:ext cx="2084831" cy="365760"/>
-          </a:xfrm>
-          <a:prstGeom prst="rect">
-            <a:avLst/>
-          </a:prstGeom>
-          <a:noFill/>
-        </p:spPr>
-        <p:txBody>
-          <a:bodyPr wrap="square" lIns="36576" tIns="18288" rIns="36576" bIns="18288" anchor="t">
+            <a:off x="548640" y="3246120"/>
+            <a:ext cx="1481328" cy="365760"/>
+          </a:xfrm>
+          <a:prstGeom prst="rect">
+            <a:avLst/>
+          </a:prstGeom>
+          <a:noFill/>
+        </p:spPr>
+        <p:txBody>
+          <a:bodyPr wrap="square" anchor="t" lIns="36576" rIns="36576" tIns="18288" bIns="18288">
             <a:spAutoFit/>
           </a:bodyPr>
           <a:lstStyle/>
@@ -11327,16 +11641,10 @@
                 <a:solidFill>
                   <a:srgbClr val="22D3EE"/>
                 </a:solidFill>
-                <a:latin typeface="微软雅黑" panose="020B0503020204020204" charset="-122"/>
-              </a:rPr>
-              <a:t>全部 blocked</a:t>
-            </a:r>
-            <a:endParaRPr sz="1200" b="1">
-              <a:solidFill>
-                <a:srgbClr val="22D3EE"/>
-              </a:solidFill>
-              <a:latin typeface="微软雅黑" panose="020B0503020204020204" charset="-122"/>
-            </a:endParaRPr>
+                <a:latin typeface="Microsoft YaHei"/>
+              </a:rPr>
+              <a:t>Moss</a:t>
+            </a:r>
           </a:p>
         </p:txBody>
       </p:sp>
@@ -11348,8 +11656,8 @@
         </p:nvSpPr>
         <p:spPr>
           <a:xfrm>
-            <a:off x="2788919" y="1828800"/>
-            <a:ext cx="2084831" cy="1691640"/>
+            <a:off x="2139696" y="1828800"/>
+            <a:ext cx="1481328" cy="1874519"/>
           </a:xfrm>
           <a:prstGeom prst="roundRect">
             <a:avLst>
@@ -11394,36 +11702,30 @@
         </p:nvSpPr>
         <p:spPr>
           <a:xfrm>
-            <a:off x="2788919" y="2011680"/>
-            <a:ext cx="2084831" cy="731520"/>
-          </a:xfrm>
-          <a:prstGeom prst="rect">
-            <a:avLst/>
-          </a:prstGeom>
-          <a:noFill/>
-        </p:spPr>
-        <p:txBody>
-          <a:bodyPr wrap="square" lIns="36576" tIns="18288" rIns="36576" bIns="18288" anchor="ctr">
-            <a:spAutoFit/>
-          </a:bodyPr>
-          <a:lstStyle/>
-          <a:p>
-            <a:pPr algn="ctr"/>
-            <a:r>
-              <a:rPr sz="3000" b="0">
+            <a:off x="2139696" y="1993392"/>
+            <a:ext cx="1481328" cy="640080"/>
+          </a:xfrm>
+          <a:prstGeom prst="rect">
+            <a:avLst/>
+          </a:prstGeom>
+          <a:noFill/>
+        </p:spPr>
+        <p:txBody>
+          <a:bodyPr wrap="square" anchor="ctr" lIns="36576" rIns="36576" tIns="18288" bIns="18288">
+            <a:spAutoFit/>
+          </a:bodyPr>
+          <a:lstStyle/>
+          <a:p>
+            <a:pPr algn="ctr"/>
+            <a:r>
+              <a:rPr sz="2700" b="0">
                 <a:solidFill>
                   <a:srgbClr val="F59E0B"/>
                 </a:solidFill>
-                <a:latin typeface="微软雅黑" panose="020B0503020204020204" charset="-122"/>
-              </a:rPr>
-              <a:t>🔓</a:t>
-            </a:r>
-            <a:endParaRPr sz="3000" b="0">
-              <a:solidFill>
-                <a:srgbClr val="F59E0B"/>
-              </a:solidFill>
-              <a:latin typeface="微软雅黑" panose="020B0503020204020204" charset="-122"/>
-            </a:endParaRPr>
+                <a:latin typeface="Microsoft YaHei"/>
+              </a:rPr>
+              <a:t>♾️</a:t>
+            </a:r>
           </a:p>
         </p:txBody>
       </p:sp>
@@ -11435,36 +11737,30 @@
         </p:nvSpPr>
         <p:spPr>
           <a:xfrm>
-            <a:off x="2788919" y="2697480"/>
-            <a:ext cx="2084831" cy="457200"/>
-          </a:xfrm>
-          <a:prstGeom prst="rect">
-            <a:avLst/>
-          </a:prstGeom>
-          <a:noFill/>
-        </p:spPr>
-        <p:txBody>
-          <a:bodyPr wrap="square" lIns="36576" tIns="18288" rIns="36576" bIns="18288" anchor="t">
-            <a:spAutoFit/>
-          </a:bodyPr>
-          <a:lstStyle/>
-          <a:p>
-            <a:pPr algn="ctr"/>
-            <a:r>
-              <a:rPr sz="1500" b="1">
+            <a:off x="2139696" y="2724912"/>
+            <a:ext cx="1481328" cy="457200"/>
+          </a:xfrm>
+          <a:prstGeom prst="rect">
+            <a:avLst/>
+          </a:prstGeom>
+          <a:noFill/>
+        </p:spPr>
+        <p:txBody>
+          <a:bodyPr wrap="square" anchor="t" lIns="36576" rIns="36576" tIns="18288" bIns="18288">
+            <a:spAutoFit/>
+          </a:bodyPr>
+          <a:lstStyle/>
+          <a:p>
+            <a:pPr algn="ctr"/>
+            <a:r>
+              <a:rPr sz="1300" b="1">
                 <a:solidFill>
                   <a:srgbClr val="FFFFFF"/>
                 </a:solidFill>
-                <a:latin typeface="微软雅黑" panose="020B0503020204020204" charset="-122"/>
-              </a:rPr>
-              <a:t>夹带授权</a:t>
-            </a:r>
-            <a:endParaRPr sz="1500" b="1">
-              <a:solidFill>
-                <a:srgbClr val="FFFFFF"/>
-              </a:solidFill>
-              <a:latin typeface="微软雅黑" panose="020B0503020204020204" charset="-122"/>
-            </a:endParaRPr>
+                <a:latin typeface="Microsoft YaHei"/>
+              </a:rPr>
+              <a:t>无限授权</a:t>
+            </a:r>
           </a:p>
         </p:txBody>
       </p:sp>
@@ -11476,16 +11772,16 @@
         </p:nvSpPr>
         <p:spPr>
           <a:xfrm>
-            <a:off x="2788919" y="3108960"/>
-            <a:ext cx="2084831" cy="365760"/>
-          </a:xfrm>
-          <a:prstGeom prst="rect">
-            <a:avLst/>
-          </a:prstGeom>
-          <a:noFill/>
-        </p:spPr>
-        <p:txBody>
-          <a:bodyPr wrap="square" lIns="36576" tIns="18288" rIns="36576" bIns="18288" anchor="t">
+            <a:off x="2139696" y="3246120"/>
+            <a:ext cx="1481328" cy="365760"/>
+          </a:xfrm>
+          <a:prstGeom prst="rect">
+            <a:avLst/>
+          </a:prstGeom>
+          <a:noFill/>
+        </p:spPr>
+        <p:txBody>
+          <a:bodyPr wrap="square" anchor="t" lIns="36576" rIns="36576" tIns="18288" bIns="18288">
             <a:spAutoFit/>
           </a:bodyPr>
           <a:lstStyle/>
@@ -11496,16 +11792,10 @@
                 <a:solidFill>
                   <a:srgbClr val="22D3EE"/>
                 </a:solidFill>
-                <a:latin typeface="微软雅黑" panose="020B0503020204020204" charset="-122"/>
-              </a:rPr>
-              <a:t>全部 blocked</a:t>
-            </a:r>
-            <a:endParaRPr sz="1200" b="1">
-              <a:solidFill>
-                <a:srgbClr val="22D3EE"/>
-              </a:solidFill>
-              <a:latin typeface="微软雅黑" panose="020B0503020204020204" charset="-122"/>
-            </a:endParaRPr>
+                <a:latin typeface="Microsoft YaHei"/>
+              </a:rPr>
+              <a:t>Moss</a:t>
+            </a:r>
           </a:p>
         </p:txBody>
       </p:sp>
@@ -11517,8 +11807,8 @@
         </p:nvSpPr>
         <p:spPr>
           <a:xfrm>
-            <a:off x="5029198" y="1828800"/>
-            <a:ext cx="2084831" cy="1691640"/>
+            <a:off x="3730752" y="1828800"/>
+            <a:ext cx="1481328" cy="1874519"/>
           </a:xfrm>
           <a:prstGeom prst="roundRect">
             <a:avLst>
@@ -11563,36 +11853,30 @@
         </p:nvSpPr>
         <p:spPr>
           <a:xfrm>
-            <a:off x="5029198" y="2011680"/>
-            <a:ext cx="2084831" cy="731520"/>
-          </a:xfrm>
-          <a:prstGeom prst="rect">
-            <a:avLst/>
-          </a:prstGeom>
-          <a:noFill/>
-        </p:spPr>
-        <p:txBody>
-          <a:bodyPr wrap="square" lIns="36576" tIns="18288" rIns="36576" bIns="18288" anchor="ctr">
-            <a:spAutoFit/>
-          </a:bodyPr>
-          <a:lstStyle/>
-          <a:p>
-            <a:pPr algn="ctr"/>
-            <a:r>
-              <a:rPr sz="3000" b="0">
+            <a:off x="3730752" y="1993392"/>
+            <a:ext cx="1481328" cy="640080"/>
+          </a:xfrm>
+          <a:prstGeom prst="rect">
+            <a:avLst/>
+          </a:prstGeom>
+          <a:noFill/>
+        </p:spPr>
+        <p:txBody>
+          <a:bodyPr wrap="square" anchor="ctr" lIns="36576" rIns="36576" tIns="18288" bIns="18288">
+            <a:spAutoFit/>
+          </a:bodyPr>
+          <a:lstStyle/>
+          <a:p>
+            <a:pPr algn="ctr"/>
+            <a:r>
+              <a:rPr sz="2700" b="0">
                 <a:solidFill>
                   <a:srgbClr val="F59E0B"/>
                 </a:solidFill>
-                <a:latin typeface="微软雅黑" panose="020B0503020204020204" charset="-122"/>
-              </a:rPr>
-              <a:t>💥</a:t>
-            </a:r>
-            <a:endParaRPr sz="3000" b="0">
-              <a:solidFill>
-                <a:srgbClr val="F59E0B"/>
-              </a:solidFill>
-              <a:latin typeface="微软雅黑" panose="020B0503020204020204" charset="-122"/>
-            </a:endParaRPr>
+                <a:latin typeface="Microsoft YaHei"/>
+              </a:rPr>
+              <a:t>🔓</a:t>
+            </a:r>
           </a:p>
         </p:txBody>
       </p:sp>
@@ -11604,36 +11888,30 @@
         </p:nvSpPr>
         <p:spPr>
           <a:xfrm>
-            <a:off x="5029198" y="2697480"/>
-            <a:ext cx="2084831" cy="457200"/>
-          </a:xfrm>
-          <a:prstGeom prst="rect">
-            <a:avLst/>
-          </a:prstGeom>
-          <a:noFill/>
-        </p:spPr>
-        <p:txBody>
-          <a:bodyPr wrap="square" lIns="36576" tIns="18288" rIns="36576" bIns="18288" anchor="t">
-            <a:spAutoFit/>
-          </a:bodyPr>
-          <a:lstStyle/>
-          <a:p>
-            <a:pPr algn="ctr"/>
-            <a:r>
-              <a:rPr sz="1500" b="1">
+            <a:off x="3730752" y="2724912"/>
+            <a:ext cx="1481328" cy="457200"/>
+          </a:xfrm>
+          <a:prstGeom prst="rect">
+            <a:avLst/>
+          </a:prstGeom>
+          <a:noFill/>
+        </p:spPr>
+        <p:txBody>
+          <a:bodyPr wrap="square" anchor="t" lIns="36576" rIns="36576" tIns="18288" bIns="18288">
+            <a:spAutoFit/>
+          </a:bodyPr>
+          <a:lstStyle/>
+          <a:p>
+            <a:pPr algn="ctr"/>
+            <a:r>
+              <a:rPr sz="1300" b="1">
                 <a:solidFill>
                   <a:srgbClr val="FFFFFF"/>
                 </a:solidFill>
-                <a:latin typeface="微软雅黑" panose="020B0503020204020204" charset="-122"/>
-              </a:rPr>
-              <a:t>金额膨胀</a:t>
-            </a:r>
-            <a:endParaRPr sz="1500" b="1">
-              <a:solidFill>
-                <a:srgbClr val="FFFFFF"/>
-              </a:solidFill>
-              <a:latin typeface="微软雅黑" panose="020B0503020204020204" charset="-122"/>
-            </a:endParaRPr>
+                <a:latin typeface="Microsoft YaHei"/>
+              </a:rPr>
+              <a:t>夹带授权</a:t>
+            </a:r>
           </a:p>
         </p:txBody>
       </p:sp>
@@ -11645,16 +11923,16 @@
         </p:nvSpPr>
         <p:spPr>
           <a:xfrm>
-            <a:off x="5029198" y="3108960"/>
-            <a:ext cx="2084831" cy="365760"/>
-          </a:xfrm>
-          <a:prstGeom prst="rect">
-            <a:avLst/>
-          </a:prstGeom>
-          <a:noFill/>
-        </p:spPr>
-        <p:txBody>
-          <a:bodyPr wrap="square" lIns="36576" tIns="18288" rIns="36576" bIns="18288" anchor="t">
+            <a:off x="3730752" y="3246120"/>
+            <a:ext cx="1481328" cy="365760"/>
+          </a:xfrm>
+          <a:prstGeom prst="rect">
+            <a:avLst/>
+          </a:prstGeom>
+          <a:noFill/>
+        </p:spPr>
+        <p:txBody>
+          <a:bodyPr wrap="square" anchor="t" lIns="36576" rIns="36576" tIns="18288" bIns="18288">
             <a:spAutoFit/>
           </a:bodyPr>
           <a:lstStyle/>
@@ -11665,16 +11943,10 @@
                 <a:solidFill>
                   <a:srgbClr val="22D3EE"/>
                 </a:solidFill>
-                <a:latin typeface="微软雅黑" panose="020B0503020204020204" charset="-122"/>
-              </a:rPr>
-              <a:t>全部 blocked</a:t>
-            </a:r>
-            <a:endParaRPr sz="1200" b="1">
-              <a:solidFill>
-                <a:srgbClr val="22D3EE"/>
-              </a:solidFill>
-              <a:latin typeface="微软雅黑" panose="020B0503020204020204" charset="-122"/>
-            </a:endParaRPr>
+                <a:latin typeface="Microsoft YaHei"/>
+              </a:rPr>
+              <a:t>Moss</a:t>
+            </a:r>
           </a:p>
         </p:txBody>
       </p:sp>
@@ -11686,8 +11958,8 @@
         </p:nvSpPr>
         <p:spPr>
           <a:xfrm>
-            <a:off x="7269477" y="1828800"/>
-            <a:ext cx="2084831" cy="1691640"/>
+            <a:off x="5321808" y="1828800"/>
+            <a:ext cx="1481328" cy="1874519"/>
           </a:xfrm>
           <a:prstGeom prst="roundRect">
             <a:avLst>
@@ -11732,36 +12004,30 @@
         </p:nvSpPr>
         <p:spPr>
           <a:xfrm>
-            <a:off x="7269477" y="2011680"/>
-            <a:ext cx="2084831" cy="731520"/>
-          </a:xfrm>
-          <a:prstGeom prst="rect">
-            <a:avLst/>
-          </a:prstGeom>
-          <a:noFill/>
-        </p:spPr>
-        <p:txBody>
-          <a:bodyPr wrap="square" lIns="36576" tIns="18288" rIns="36576" bIns="18288" anchor="ctr">
-            <a:spAutoFit/>
-          </a:bodyPr>
-          <a:lstStyle/>
-          <a:p>
-            <a:pPr algn="ctr"/>
-            <a:r>
-              <a:rPr sz="3000" b="0">
+            <a:off x="5321808" y="1993392"/>
+            <a:ext cx="1481328" cy="640080"/>
+          </a:xfrm>
+          <a:prstGeom prst="rect">
+            <a:avLst/>
+          </a:prstGeom>
+          <a:noFill/>
+        </p:spPr>
+        <p:txBody>
+          <a:bodyPr wrap="square" anchor="ctr" lIns="36576" rIns="36576" tIns="18288" bIns="18288">
+            <a:spAutoFit/>
+          </a:bodyPr>
+          <a:lstStyle/>
+          <a:p>
+            <a:pPr algn="ctr"/>
+            <a:r>
+              <a:rPr sz="2700" b="0">
                 <a:solidFill>
                   <a:srgbClr val="F59E0B"/>
                 </a:solidFill>
-                <a:latin typeface="微软雅黑" panose="020B0503020204020204" charset="-122"/>
-              </a:rPr>
-              <a:t>♾️</a:t>
-            </a:r>
-            <a:endParaRPr sz="3000" b="0">
-              <a:solidFill>
-                <a:srgbClr val="F59E0B"/>
-              </a:solidFill>
-              <a:latin typeface="微软雅黑" panose="020B0503020204020204" charset="-122"/>
-            </a:endParaRPr>
+                <a:latin typeface="Microsoft YaHei"/>
+              </a:rPr>
+              <a:t>✍️</a:t>
+            </a:r>
           </a:p>
         </p:txBody>
       </p:sp>
@@ -11773,36 +12039,30 @@
         </p:nvSpPr>
         <p:spPr>
           <a:xfrm>
-            <a:off x="7269477" y="2697480"/>
-            <a:ext cx="2084831" cy="457200"/>
-          </a:xfrm>
-          <a:prstGeom prst="rect">
-            <a:avLst/>
-          </a:prstGeom>
-          <a:noFill/>
-        </p:spPr>
-        <p:txBody>
-          <a:bodyPr wrap="square" lIns="36576" tIns="18288" rIns="36576" bIns="18288" anchor="t">
-            <a:spAutoFit/>
-          </a:bodyPr>
-          <a:lstStyle/>
-          <a:p>
-            <a:pPr algn="ctr"/>
-            <a:r>
-              <a:rPr sz="1500" b="1">
+            <a:off x="5321808" y="2724912"/>
+            <a:ext cx="1481328" cy="457200"/>
+          </a:xfrm>
+          <a:prstGeom prst="rect">
+            <a:avLst/>
+          </a:prstGeom>
+          <a:noFill/>
+        </p:spPr>
+        <p:txBody>
+          <a:bodyPr wrap="square" anchor="t" lIns="36576" rIns="36576" tIns="18288" bIns="18288">
+            <a:spAutoFit/>
+          </a:bodyPr>
+          <a:lstStyle/>
+          <a:p>
+            <a:pPr algn="ctr"/>
+            <a:r>
+              <a:rPr sz="1300" b="1">
                 <a:solidFill>
                   <a:srgbClr val="FFFFFF"/>
                 </a:solidFill>
-                <a:latin typeface="微软雅黑" panose="020B0503020204020204" charset="-122"/>
-              </a:rPr>
-              <a:t>无限授权</a:t>
-            </a:r>
-            <a:endParaRPr sz="1500" b="1">
-              <a:solidFill>
-                <a:srgbClr val="FFFFFF"/>
-              </a:solidFill>
-              <a:latin typeface="微软雅黑" panose="020B0503020204020204" charset="-122"/>
-            </a:endParaRPr>
+                <a:latin typeface="Microsoft YaHei"/>
+              </a:rPr>
+              <a:t>篡改后签名</a:t>
+            </a:r>
           </a:p>
         </p:txBody>
       </p:sp>
@@ -11814,16 +12074,16 @@
         </p:nvSpPr>
         <p:spPr>
           <a:xfrm>
-            <a:off x="7269477" y="3108960"/>
-            <a:ext cx="2084831" cy="365760"/>
-          </a:xfrm>
-          <a:prstGeom prst="rect">
-            <a:avLst/>
-          </a:prstGeom>
-          <a:noFill/>
-        </p:spPr>
-        <p:txBody>
-          <a:bodyPr wrap="square" lIns="36576" tIns="18288" rIns="36576" bIns="18288" anchor="t">
+            <a:off x="5321808" y="3246120"/>
+            <a:ext cx="1481328" cy="365760"/>
+          </a:xfrm>
+          <a:prstGeom prst="rect">
+            <a:avLst/>
+          </a:prstGeom>
+          <a:noFill/>
+        </p:spPr>
+        <p:txBody>
+          <a:bodyPr wrap="square" anchor="t" lIns="36576" rIns="36576" tIns="18288" bIns="18288">
             <a:spAutoFit/>
           </a:bodyPr>
           <a:lstStyle/>
@@ -11834,16 +12094,10 @@
                 <a:solidFill>
                   <a:srgbClr val="22D3EE"/>
                 </a:solidFill>
-                <a:latin typeface="微软雅黑" panose="020B0503020204020204" charset="-122"/>
-              </a:rPr>
-              <a:t>全部 blocked</a:t>
-            </a:r>
-            <a:endParaRPr sz="1200" b="1">
-              <a:solidFill>
-                <a:srgbClr val="22D3EE"/>
-              </a:solidFill>
-              <a:latin typeface="微软雅黑" panose="020B0503020204020204" charset="-122"/>
-            </a:endParaRPr>
+                <a:latin typeface="Microsoft YaHei"/>
+              </a:rPr>
+              <a:t>Moss</a:t>
+            </a:r>
           </a:p>
         </p:txBody>
       </p:sp>
@@ -11855,8 +12109,8 @@
         </p:nvSpPr>
         <p:spPr>
           <a:xfrm>
-            <a:off x="9509756" y="1828800"/>
-            <a:ext cx="2084831" cy="1691640"/>
+            <a:off x="6912864" y="1828800"/>
+            <a:ext cx="1481328" cy="1874519"/>
           </a:xfrm>
           <a:prstGeom prst="roundRect">
             <a:avLst>
@@ -11901,36 +12155,30 @@
         </p:nvSpPr>
         <p:spPr>
           <a:xfrm>
-            <a:off x="9509756" y="2011680"/>
-            <a:ext cx="2084831" cy="731520"/>
-          </a:xfrm>
-          <a:prstGeom prst="rect">
-            <a:avLst/>
-          </a:prstGeom>
-          <a:noFill/>
-        </p:spPr>
-        <p:txBody>
-          <a:bodyPr wrap="square" lIns="36576" tIns="18288" rIns="36576" bIns="18288" anchor="ctr">
-            <a:spAutoFit/>
-          </a:bodyPr>
-          <a:lstStyle/>
-          <a:p>
-            <a:pPr algn="ctr"/>
-            <a:r>
-              <a:rPr sz="3000" b="0">
+            <a:off x="6912864" y="1993392"/>
+            <a:ext cx="1481328" cy="640080"/>
+          </a:xfrm>
+          <a:prstGeom prst="rect">
+            <a:avLst/>
+          </a:prstGeom>
+          <a:noFill/>
+        </p:spPr>
+        <p:txBody>
+          <a:bodyPr wrap="square" anchor="ctr" lIns="36576" rIns="36576" tIns="18288" bIns="18288">
+            <a:spAutoFit/>
+          </a:bodyPr>
+          <a:lstStyle/>
+          <a:p>
+            <a:pPr algn="ctr"/>
+            <a:r>
+              <a:rPr sz="2700" b="0">
                 <a:solidFill>
                   <a:srgbClr val="F59E0B"/>
                 </a:solidFill>
-                <a:latin typeface="微软雅黑" panose="020B0503020204020204" charset="-122"/>
-              </a:rPr>
-              <a:t>✍️</a:t>
-            </a:r>
-            <a:endParaRPr sz="3000" b="0">
-              <a:solidFill>
-                <a:srgbClr val="F59E0B"/>
-              </a:solidFill>
-              <a:latin typeface="微软雅黑" panose="020B0503020204020204" charset="-122"/>
-            </a:endParaRPr>
+                <a:latin typeface="Microsoft YaHei"/>
+              </a:rPr>
+              <a:t>🔄</a:t>
+            </a:r>
           </a:p>
         </p:txBody>
       </p:sp>
@@ -11942,36 +12190,30 @@
         </p:nvSpPr>
         <p:spPr>
           <a:xfrm>
-            <a:off x="9509756" y="2697480"/>
-            <a:ext cx="2084831" cy="457200"/>
-          </a:xfrm>
-          <a:prstGeom prst="rect">
-            <a:avLst/>
-          </a:prstGeom>
-          <a:noFill/>
-        </p:spPr>
-        <p:txBody>
-          <a:bodyPr wrap="square" lIns="36576" tIns="18288" rIns="36576" bIns="18288" anchor="t">
-            <a:spAutoFit/>
-          </a:bodyPr>
-          <a:lstStyle/>
-          <a:p>
-            <a:pPr algn="ctr"/>
-            <a:r>
-              <a:rPr sz="1500" b="1">
+            <a:off x="6912864" y="2724912"/>
+            <a:ext cx="1481328" cy="457200"/>
+          </a:xfrm>
+          <a:prstGeom prst="rect">
+            <a:avLst/>
+          </a:prstGeom>
+          <a:noFill/>
+        </p:spPr>
+        <p:txBody>
+          <a:bodyPr wrap="square" anchor="t" lIns="36576" rIns="36576" tIns="18288" bIns="18288">
+            <a:spAutoFit/>
+          </a:bodyPr>
+          <a:lstStyle/>
+          <a:p>
+            <a:pPr algn="ctr"/>
+            <a:r>
+              <a:rPr sz="1300" b="1">
                 <a:solidFill>
                   <a:srgbClr val="FFFFFF"/>
                 </a:solidFill>
-                <a:latin typeface="微软雅黑" panose="020B0503020204020204" charset="-122"/>
-              </a:rPr>
-              <a:t>篡改后签名</a:t>
-            </a:r>
-            <a:endParaRPr sz="1500" b="1">
-              <a:solidFill>
-                <a:srgbClr val="FFFFFF"/>
-              </a:solidFill>
-              <a:latin typeface="微软雅黑" panose="020B0503020204020204" charset="-122"/>
-            </a:endParaRPr>
+                <a:latin typeface="Microsoft YaHei"/>
+              </a:rPr>
+              <a:t>收款方掉包</a:t>
+            </a:r>
           </a:p>
         </p:txBody>
       </p:sp>
@@ -11983,16 +12225,16 @@
         </p:nvSpPr>
         <p:spPr>
           <a:xfrm>
-            <a:off x="9509756" y="3108960"/>
-            <a:ext cx="2084831" cy="365760"/>
-          </a:xfrm>
-          <a:prstGeom prst="rect">
-            <a:avLst/>
-          </a:prstGeom>
-          <a:noFill/>
-        </p:spPr>
-        <p:txBody>
-          <a:bodyPr wrap="square" lIns="36576" tIns="18288" rIns="36576" bIns="18288" anchor="t">
+            <a:off x="6912864" y="3246120"/>
+            <a:ext cx="1481328" cy="365760"/>
+          </a:xfrm>
+          <a:prstGeom prst="rect">
+            <a:avLst/>
+          </a:prstGeom>
+          <a:noFill/>
+        </p:spPr>
+        <p:txBody>
+          <a:bodyPr wrap="square" anchor="t" lIns="36576" rIns="36576" tIns="18288" bIns="18288">
             <a:spAutoFit/>
           </a:bodyPr>
           <a:lstStyle/>
@@ -12001,18 +12243,12 @@
             <a:r>
               <a:rPr sz="1200" b="1">
                 <a:solidFill>
-                  <a:srgbClr val="22D3EE"/>
-                </a:solidFill>
-                <a:latin typeface="微软雅黑" panose="020B0503020204020204" charset="-122"/>
-              </a:rPr>
-              <a:t>全部 blocked</a:t>
-            </a:r>
-            <a:endParaRPr sz="1200" b="1">
-              <a:solidFill>
-                <a:srgbClr val="22D3EE"/>
-              </a:solidFill>
-              <a:latin typeface="微软雅黑" panose="020B0503020204020204" charset="-122"/>
-            </a:endParaRPr>
+                  <a:srgbClr val="8B5CF6"/>
+                </a:solidFill>
+                <a:latin typeface="Microsoft YaHei"/>
+              </a:rPr>
+              <a:t>自研</a:t>
+            </a:r>
           </a:p>
         </p:txBody>
       </p:sp>
@@ -12024,7 +12260,309 @@
         </p:nvSpPr>
         <p:spPr>
           <a:xfrm>
-            <a:off x="548640" y="3886200"/>
+            <a:off x="8503920" y="1828800"/>
+            <a:ext cx="1481328" cy="1874519"/>
+          </a:xfrm>
+          <a:prstGeom prst="roundRect">
+            <a:avLst>
+              <a:gd name="adj" fmla="val 10000"/>
+            </a:avLst>
+          </a:prstGeom>
+          <a:solidFill>
+            <a:srgbClr val="221E42"/>
+          </a:solidFill>
+          <a:ln>
+            <a:noFill/>
+          </a:ln>
+          <a:effectLst/>
+        </p:spPr>
+        <p:style>
+          <a:lnRef idx="1">
+            <a:schemeClr val="accent1"/>
+          </a:lnRef>
+          <a:fillRef idx="3">
+            <a:schemeClr val="accent1"/>
+          </a:fillRef>
+          <a:effectRef idx="2">
+            <a:schemeClr val="accent1"/>
+          </a:effectRef>
+          <a:fontRef idx="minor">
+            <a:schemeClr val="lt1"/>
+          </a:fontRef>
+        </p:style>
+        <p:txBody>
+          <a:bodyPr rtlCol="0" anchor="ctr"/>
+          <a:lstStyle/>
+          <a:p>
+            <a:pPr algn="ctr"/>
+          </a:p>
+        </p:txBody>
+      </p:sp>
+      <p:sp>
+        <p:nvSpPr>
+          <p:cNvPr id="26" name="TextBox 25"/>
+          <p:cNvSpPr txBox="1"/>
+          <p:nvPr/>
+        </p:nvSpPr>
+        <p:spPr>
+          <a:xfrm>
+            <a:off x="8503920" y="1993392"/>
+            <a:ext cx="1481328" cy="640080"/>
+          </a:xfrm>
+          <a:prstGeom prst="rect">
+            <a:avLst/>
+          </a:prstGeom>
+          <a:noFill/>
+        </p:spPr>
+        <p:txBody>
+          <a:bodyPr wrap="square" anchor="ctr" lIns="36576" rIns="36576" tIns="18288" bIns="18288">
+            <a:spAutoFit/>
+          </a:bodyPr>
+          <a:lstStyle/>
+          <a:p>
+            <a:pPr algn="ctr"/>
+            <a:r>
+              <a:rPr sz="2700" b="0">
+                <a:solidFill>
+                  <a:srgbClr val="F59E0B"/>
+                </a:solidFill>
+                <a:latin typeface="Microsoft YaHei"/>
+              </a:rPr>
+              <a:t>👻</a:t>
+            </a:r>
+          </a:p>
+        </p:txBody>
+      </p:sp>
+      <p:sp>
+        <p:nvSpPr>
+          <p:cNvPr id="27" name="TextBox 26"/>
+          <p:cNvSpPr txBox="1"/>
+          <p:nvPr/>
+        </p:nvSpPr>
+        <p:spPr>
+          <a:xfrm>
+            <a:off x="8503920" y="2724912"/>
+            <a:ext cx="1481328" cy="457200"/>
+          </a:xfrm>
+          <a:prstGeom prst="rect">
+            <a:avLst/>
+          </a:prstGeom>
+          <a:noFill/>
+        </p:spPr>
+        <p:txBody>
+          <a:bodyPr wrap="square" anchor="t" lIns="36576" rIns="36576" tIns="18288" bIns="18288">
+            <a:spAutoFit/>
+          </a:bodyPr>
+          <a:lstStyle/>
+          <a:p>
+            <a:pPr algn="ctr"/>
+            <a:r>
+              <a:rPr sz="1300" b="1">
+                <a:solidFill>
+                  <a:srgbClr val="FFFFFF"/>
+                </a:solidFill>
+                <a:latin typeface="Microsoft YaHei"/>
+              </a:rPr>
+              <a:t>零宽字符掉包</a:t>
+            </a:r>
+          </a:p>
+        </p:txBody>
+      </p:sp>
+      <p:sp>
+        <p:nvSpPr>
+          <p:cNvPr id="28" name="TextBox 27"/>
+          <p:cNvSpPr txBox="1"/>
+          <p:nvPr/>
+        </p:nvSpPr>
+        <p:spPr>
+          <a:xfrm>
+            <a:off x="8503920" y="3246120"/>
+            <a:ext cx="1481328" cy="365760"/>
+          </a:xfrm>
+          <a:prstGeom prst="rect">
+            <a:avLst/>
+          </a:prstGeom>
+          <a:noFill/>
+        </p:spPr>
+        <p:txBody>
+          <a:bodyPr wrap="square" anchor="t" lIns="36576" rIns="36576" tIns="18288" bIns="18288">
+            <a:spAutoFit/>
+          </a:bodyPr>
+          <a:lstStyle/>
+          <a:p>
+            <a:pPr algn="ctr"/>
+            <a:r>
+              <a:rPr sz="1200" b="1">
+                <a:solidFill>
+                  <a:srgbClr val="8B5CF6"/>
+                </a:solidFill>
+                <a:latin typeface="Microsoft YaHei"/>
+              </a:rPr>
+              <a:t>自研</a:t>
+            </a:r>
+          </a:p>
+        </p:txBody>
+      </p:sp>
+      <p:sp>
+        <p:nvSpPr>
+          <p:cNvPr id="29" name="Rounded Rectangle 28"/>
+          <p:cNvSpPr/>
+          <p:nvPr/>
+        </p:nvSpPr>
+        <p:spPr>
+          <a:xfrm>
+            <a:off x="10094976" y="1828800"/>
+            <a:ext cx="1481328" cy="1874519"/>
+          </a:xfrm>
+          <a:prstGeom prst="roundRect">
+            <a:avLst>
+              <a:gd name="adj" fmla="val 10000"/>
+            </a:avLst>
+          </a:prstGeom>
+          <a:solidFill>
+            <a:srgbClr val="221E42"/>
+          </a:solidFill>
+          <a:ln>
+            <a:noFill/>
+          </a:ln>
+          <a:effectLst/>
+        </p:spPr>
+        <p:style>
+          <a:lnRef idx="1">
+            <a:schemeClr val="accent1"/>
+          </a:lnRef>
+          <a:fillRef idx="3">
+            <a:schemeClr val="accent1"/>
+          </a:fillRef>
+          <a:effectRef idx="2">
+            <a:schemeClr val="accent1"/>
+          </a:effectRef>
+          <a:fontRef idx="minor">
+            <a:schemeClr val="lt1"/>
+          </a:fontRef>
+        </p:style>
+        <p:txBody>
+          <a:bodyPr rtlCol="0" anchor="ctr"/>
+          <a:lstStyle/>
+          <a:p>
+            <a:pPr algn="ctr"/>
+          </a:p>
+        </p:txBody>
+      </p:sp>
+      <p:sp>
+        <p:nvSpPr>
+          <p:cNvPr id="30" name="TextBox 29"/>
+          <p:cNvSpPr txBox="1"/>
+          <p:nvPr/>
+        </p:nvSpPr>
+        <p:spPr>
+          <a:xfrm>
+            <a:off x="10094976" y="1993392"/>
+            <a:ext cx="1481328" cy="640080"/>
+          </a:xfrm>
+          <a:prstGeom prst="rect">
+            <a:avLst/>
+          </a:prstGeom>
+          <a:noFill/>
+        </p:spPr>
+        <p:txBody>
+          <a:bodyPr wrap="square" anchor="ctr" lIns="36576" rIns="36576" tIns="18288" bIns="18288">
+            <a:spAutoFit/>
+          </a:bodyPr>
+          <a:lstStyle/>
+          <a:p>
+            <a:pPr algn="ctr"/>
+            <a:r>
+              <a:rPr sz="2700" b="0">
+                <a:solidFill>
+                  <a:srgbClr val="F59E0B"/>
+                </a:solidFill>
+                <a:latin typeface="Microsoft YaHei"/>
+              </a:rPr>
+              <a:t>🪞</a:t>
+            </a:r>
+          </a:p>
+        </p:txBody>
+      </p:sp>
+      <p:sp>
+        <p:nvSpPr>
+          <p:cNvPr id="31" name="TextBox 30"/>
+          <p:cNvSpPr txBox="1"/>
+          <p:nvPr/>
+        </p:nvSpPr>
+        <p:spPr>
+          <a:xfrm>
+            <a:off x="10094976" y="2724912"/>
+            <a:ext cx="1481328" cy="457200"/>
+          </a:xfrm>
+          <a:prstGeom prst="rect">
+            <a:avLst/>
+          </a:prstGeom>
+          <a:noFill/>
+        </p:spPr>
+        <p:txBody>
+          <a:bodyPr wrap="square" anchor="t" lIns="36576" rIns="36576" tIns="18288" bIns="18288">
+            <a:spAutoFit/>
+          </a:bodyPr>
+          <a:lstStyle/>
+          <a:p>
+            <a:pPr algn="ctr"/>
+            <a:r>
+              <a:rPr sz="1300" b="1">
+                <a:solidFill>
+                  <a:srgbClr val="FFFFFF"/>
+                </a:solidFill>
+                <a:latin typeface="Microsoft YaHei"/>
+              </a:rPr>
+              <a:t>permit 重放</a:t>
+            </a:r>
+          </a:p>
+        </p:txBody>
+      </p:sp>
+      <p:sp>
+        <p:nvSpPr>
+          <p:cNvPr id="32" name="TextBox 31"/>
+          <p:cNvSpPr txBox="1"/>
+          <p:nvPr/>
+        </p:nvSpPr>
+        <p:spPr>
+          <a:xfrm>
+            <a:off x="10094976" y="3246120"/>
+            <a:ext cx="1481328" cy="365760"/>
+          </a:xfrm>
+          <a:prstGeom prst="rect">
+            <a:avLst/>
+          </a:prstGeom>
+          <a:noFill/>
+        </p:spPr>
+        <p:txBody>
+          <a:bodyPr wrap="square" anchor="t" lIns="36576" rIns="36576" tIns="18288" bIns="18288">
+            <a:spAutoFit/>
+          </a:bodyPr>
+          <a:lstStyle/>
+          <a:p>
+            <a:pPr algn="ctr"/>
+            <a:r>
+              <a:rPr sz="1200" b="1">
+                <a:solidFill>
+                  <a:srgbClr val="8B5CF6"/>
+                </a:solidFill>
+                <a:latin typeface="Microsoft YaHei"/>
+              </a:rPr>
+              <a:t>自研</a:t>
+            </a:r>
+          </a:p>
+        </p:txBody>
+      </p:sp>
+      <p:sp>
+        <p:nvSpPr>
+          <p:cNvPr id="33" name="Rounded Rectangle 32"/>
+          <p:cNvSpPr/>
+          <p:nvPr/>
+        </p:nvSpPr>
+        <p:spPr>
+          <a:xfrm>
+            <a:off x="548640" y="3977639"/>
             <a:ext cx="11064240" cy="2057400"/>
           </a:xfrm>
           <a:prstGeom prst="roundRect">
@@ -12066,13 +12604,13 @@
       </p:sp>
       <p:sp>
         <p:nvSpPr>
-          <p:cNvPr id="26" name="Rectangle 25"/>
+          <p:cNvPr id="34" name="Rectangle 33"/>
           <p:cNvSpPr/>
           <p:nvPr/>
         </p:nvSpPr>
         <p:spPr>
           <a:xfrm>
-            <a:off x="548640" y="3886200"/>
+            <a:off x="548640" y="3977639"/>
             <a:ext cx="82296" cy="2057400"/>
           </a:xfrm>
           <a:prstGeom prst="rect">
@@ -12110,13 +12648,13 @@
       </p:sp>
       <p:sp>
         <p:nvSpPr>
-          <p:cNvPr id="27" name="TextBox 26"/>
-          <p:cNvSpPr txBox="1"/>
-          <p:nvPr/>
-        </p:nvSpPr>
-        <p:spPr>
-          <a:xfrm>
-            <a:off x="822960" y="4023360"/>
+          <p:cNvPr id="35" name="TextBox 34"/>
+          <p:cNvSpPr txBox="1"/>
+          <p:nvPr/>
+        </p:nvSpPr>
+        <p:spPr>
+          <a:xfrm>
+            <a:off x="822960" y="4114800"/>
             <a:ext cx="10515600" cy="457200"/>
           </a:xfrm>
           <a:prstGeom prst="rect">
@@ -12125,7 +12663,7 @@
           <a:noFill/>
         </p:spPr>
         <p:txBody>
-          <a:bodyPr wrap="square" lIns="36576" tIns="18288" rIns="36576" bIns="18288" anchor="t">
+          <a:bodyPr wrap="square" anchor="t" lIns="36576" rIns="36576" tIns="18288" bIns="18288">
             <a:spAutoFit/>
           </a:bodyPr>
           <a:lstStyle/>
@@ -12136,148 +12674,122 @@
                 <a:solidFill>
                   <a:srgbClr val="FFFFFF"/>
                 </a:solidFill>
-                <a:latin typeface="微软雅黑" panose="020B0503020204020204" charset="-122"/>
-              </a:rPr>
-              <a:t>危险操作对比</a:t>
-            </a:r>
-            <a:endParaRPr sz="1800" b="1">
-              <a:solidFill>
-                <a:srgbClr val="FFFFFF"/>
-              </a:solidFill>
-              <a:latin typeface="微软雅黑" panose="020B0503020204020204" charset="-122"/>
-            </a:endParaRPr>
-          </a:p>
-        </p:txBody>
-      </p:sp>
-      <p:sp>
-        <p:nvSpPr>
-          <p:cNvPr id="28" name="TextBox 27"/>
-          <p:cNvSpPr txBox="1"/>
-          <p:nvPr/>
-        </p:nvSpPr>
-        <p:spPr>
-          <a:xfrm>
-            <a:off x="822960" y="4572000"/>
-            <a:ext cx="5029200" cy="1188720"/>
-          </a:xfrm>
-          <a:prstGeom prst="rect">
-            <a:avLst/>
-          </a:prstGeom>
-          <a:noFill/>
-        </p:spPr>
-        <p:txBody>
-          <a:bodyPr wrap="square" lIns="36576" tIns="18288" rIns="36576" bIns="18288" anchor="t">
+                <a:latin typeface="Microsoft YaHei"/>
+              </a:rPr>
+              <a:t>Moss 原生抓不到的 3 类盲区 —— MonadLens 在应用层补上</a:t>
+            </a:r>
+          </a:p>
+        </p:txBody>
+      </p:sp>
+      <p:sp>
+        <p:nvSpPr>
+          <p:cNvPr id="36" name="TextBox 35"/>
+          <p:cNvSpPr txBox="1"/>
+          <p:nvPr/>
+        </p:nvSpPr>
+        <p:spPr>
+          <a:xfrm>
+            <a:off x="822960" y="4663440"/>
+            <a:ext cx="10607040" cy="1143000"/>
+          </a:xfrm>
+          <a:prstGeom prst="rect">
+            <a:avLst/>
+          </a:prstGeom>
+          <a:noFill/>
+        </p:spPr>
+        <p:txBody>
+          <a:bodyPr wrap="square" anchor="t" lIns="36576" rIns="36576" tIns="18288" bIns="18288">
+            <a:spAutoFit/>
+          </a:bodyPr>
+          <a:lstStyle/>
+          <a:p>
+            <a:pPr algn="l">
+              <a:spcAft>
+                <a:spcPts val="700"/>
+              </a:spcAft>
+            </a:pPr>
+            <a:r>
+              <a:rPr sz="1400" b="0">
+                <a:solidFill>
+                  <a:srgbClr val="E9E9F2"/>
+                </a:solidFill>
+                <a:latin typeface="Microsoft YaHei"/>
+              </a:rPr>
+              <a:t>•  收款方对账：金额一分不差，收款地址却被换 —— Moss 不查「转给谁」</a:t>
+            </a:r>
+          </a:p>
+          <a:p>
+            <a:pPr algn="l">
+              <a:spcAft>
+                <a:spcPts val="700"/>
+              </a:spcAft>
+            </a:pPr>
+            <a:r>
+              <a:rPr sz="1400" b="0">
+                <a:solidFill>
+                  <a:srgbClr val="E9E9F2"/>
+                </a:solidFill>
+                <a:latin typeface="Microsoft YaHei"/>
+              </a:rPr>
+              <a:t>•  地址外观：零宽 / 形似字符掉包，肉眼与 checksum 都认不出</a:t>
+            </a:r>
+          </a:p>
+          <a:p>
+            <a:pPr algn="l">
+              <a:spcAft>
+                <a:spcPts val="700"/>
+              </a:spcAft>
+            </a:pPr>
+            <a:r>
+              <a:rPr sz="1400" b="0">
+                <a:solidFill>
+                  <a:srgbClr val="E9E9F2"/>
+                </a:solidFill>
+                <a:latin typeface="Microsoft YaHei"/>
+              </a:rPr>
+              <a:t>•  签名溯源：permit 重放 —— Moss 只见 calldata，不见离链签名的 provenance</a:t>
+            </a:r>
+          </a:p>
+        </p:txBody>
+      </p:sp>
+      <p:sp>
+        <p:nvSpPr>
+          <p:cNvPr id="37" name="TextBox 36"/>
+          <p:cNvSpPr txBox="1"/>
+          <p:nvPr/>
+        </p:nvSpPr>
+        <p:spPr>
+          <a:xfrm>
+            <a:off x="822960" y="5760720"/>
+            <a:ext cx="10515600" cy="274320"/>
+          </a:xfrm>
+          <a:prstGeom prst="rect">
+            <a:avLst/>
+          </a:prstGeom>
+          <a:noFill/>
+        </p:spPr>
+        <p:txBody>
+          <a:bodyPr wrap="square" anchor="t" lIns="36576" rIns="36576" tIns="18288" bIns="18288">
             <a:spAutoFit/>
           </a:bodyPr>
           <a:lstStyle/>
           <a:p>
             <a:pPr algn="l"/>
             <a:r>
-              <a:rPr sz="1500" b="1">
+              <a:rPr sz="1200" b="0">
                 <a:solidFill>
                   <a:srgbClr val="9CA3B8"/>
                 </a:solidFill>
-                <a:latin typeface="微软雅黑" panose="020B0503020204020204" charset="-122"/>
-              </a:rPr>
-              <a:t>普通钱包</a:t>
-            </a:r>
-            <a:endParaRPr sz="1500" b="1">
-              <a:solidFill>
-                <a:srgbClr val="9CA3B8"/>
-              </a:solidFill>
-              <a:latin typeface="微软雅黑" panose="020B0503020204020204" charset="-122"/>
-            </a:endParaRPr>
-          </a:p>
-          <a:p>
-            <a:pPr algn="l">
-              <a:spcBef>
-                <a:spcPts val="600"/>
-              </a:spcBef>
-            </a:pPr>
-            <a:r>
-              <a:rPr sz="1500" b="0">
-                <a:solidFill>
-                  <a:srgbClr val="E9E9F2"/>
-                </a:solidFill>
-                <a:latin typeface="微软雅黑" panose="020B0503020204020204" charset="-122"/>
-              </a:rPr>
-              <a:t>直接放行 → 资产悄悄流失</a:t>
-            </a:r>
-            <a:endParaRPr sz="1500" b="0">
-              <a:solidFill>
-                <a:srgbClr val="E9E9F2"/>
-              </a:solidFill>
-              <a:latin typeface="微软雅黑" panose="020B0503020204020204" charset="-122"/>
-            </a:endParaRPr>
-          </a:p>
-        </p:txBody>
-      </p:sp>
-      <p:sp>
-        <p:nvSpPr>
-          <p:cNvPr id="29" name="TextBox 28"/>
-          <p:cNvSpPr txBox="1"/>
-          <p:nvPr/>
-        </p:nvSpPr>
-        <p:spPr>
-          <a:xfrm>
-            <a:off x="6217920" y="4572000"/>
-            <a:ext cx="5029200" cy="1188720"/>
-          </a:xfrm>
-          <a:prstGeom prst="rect">
-            <a:avLst/>
-          </a:prstGeom>
-          <a:noFill/>
-        </p:spPr>
-        <p:txBody>
-          <a:bodyPr wrap="square" lIns="36576" tIns="18288" rIns="36576" bIns="18288" anchor="t">
-            <a:spAutoFit/>
-          </a:bodyPr>
-          <a:lstStyle/>
-          <a:p>
-            <a:pPr algn="l"/>
-            <a:r>
-              <a:rPr sz="1500" b="1">
-                <a:solidFill>
-                  <a:srgbClr val="22D3EE"/>
-                </a:solidFill>
-                <a:latin typeface="微软雅黑" panose="020B0503020204020204" charset="-122"/>
-              </a:rPr>
-              <a:t>MonadLens</a:t>
-            </a:r>
-            <a:endParaRPr sz="1500" b="1">
-              <a:solidFill>
-                <a:srgbClr val="22D3EE"/>
-              </a:solidFill>
-              <a:latin typeface="微软雅黑" panose="020B0503020204020204" charset="-122"/>
-            </a:endParaRPr>
-          </a:p>
-          <a:p>
-            <a:pPr algn="l">
-              <a:spcBef>
-                <a:spcPts val="600"/>
-              </a:spcBef>
-            </a:pPr>
-            <a:r>
-              <a:rPr sz="1500" b="0">
-                <a:solidFill>
-                  <a:srgbClr val="E9E9F2"/>
-                </a:solidFill>
-                <a:latin typeface="微软雅黑" panose="020B0503020204020204" charset="-122"/>
-              </a:rPr>
-              <a:t>标红告警 + 锁死签名按钮</a:t>
-            </a:r>
-            <a:endParaRPr sz="1500" b="0">
-              <a:solidFill>
-                <a:srgbClr val="E9E9F2"/>
-              </a:solidFill>
-              <a:latin typeface="微软雅黑" panose="020B0503020204020204" charset="-122"/>
-            </a:endParaRPr>
-          </a:p>
-        </p:txBody>
-      </p:sp>
-      <p:sp>
-        <p:nvSpPr>
-          <p:cNvPr id="30" name="TextBox 29"/>
+                <a:latin typeface="Microsoft YaHei"/>
+              </a:rPr>
+              <a:t>另：兑换请求会被当场拆穿为「假 DEX 骗签名」骗局（permit 重放演示）</a:t>
+            </a:r>
+          </a:p>
+        </p:txBody>
+      </p:sp>
+      <p:sp>
+        <p:nvSpPr>
+          <p:cNvPr id="38" name="TextBox 37"/>
           <p:cNvSpPr txBox="1"/>
           <p:nvPr/>
         </p:nvSpPr>
@@ -12292,7 +12804,7 @@
           <a:noFill/>
         </p:spPr>
         <p:txBody>
-          <a:bodyPr wrap="square" lIns="36576" tIns="18288" rIns="36576" bIns="18288" anchor="t">
+          <a:bodyPr wrap="square" anchor="t" lIns="36576" rIns="36576" tIns="18288" bIns="18288">
             <a:spAutoFit/>
           </a:bodyPr>
           <a:lstStyle/>
@@ -12303,22 +12815,16 @@
                 <a:solidFill>
                   <a:srgbClr val="9CA3B8"/>
                 </a:solidFill>
-                <a:latin typeface="微软雅黑" panose="020B0503020204020204" charset="-122"/>
+                <a:latin typeface="Microsoft YaHei"/>
               </a:rPr>
               <a:t>MonadLens · 看清网络，看清后果</a:t>
             </a:r>
-            <a:endParaRPr sz="1000" b="0">
-              <a:solidFill>
-                <a:srgbClr val="9CA3B8"/>
-              </a:solidFill>
-              <a:latin typeface="微软雅黑" panose="020B0503020204020204" charset="-122"/>
-            </a:endParaRPr>
-          </a:p>
-        </p:txBody>
-      </p:sp>
-      <p:sp>
-        <p:nvSpPr>
-          <p:cNvPr id="31" name="TextBox 30"/>
+          </a:p>
+        </p:txBody>
+      </p:sp>
+      <p:sp>
+        <p:nvSpPr>
+          <p:cNvPr id="39" name="TextBox 38"/>
           <p:cNvSpPr txBox="1"/>
           <p:nvPr/>
         </p:nvSpPr>
@@ -12333,7 +12839,7 @@
           <a:noFill/>
         </p:spPr>
         <p:txBody>
-          <a:bodyPr wrap="square" lIns="36576" tIns="18288" rIns="36576" bIns="18288" anchor="t">
+          <a:bodyPr wrap="square" anchor="t" lIns="36576" rIns="36576" tIns="18288" bIns="18288">
             <a:spAutoFit/>
           </a:bodyPr>
           <a:lstStyle/>
@@ -12344,16 +12850,10 @@
                 <a:solidFill>
                   <a:srgbClr val="9CA3B8"/>
                 </a:solidFill>
-                <a:latin typeface="微软雅黑" panose="020B0503020204020204" charset="-122"/>
+                <a:latin typeface="Microsoft YaHei"/>
               </a:rPr>
               <a:t>8</a:t>
             </a:r>
-            <a:endParaRPr sz="1000" b="0">
-              <a:solidFill>
-                <a:srgbClr val="9CA3B8"/>
-              </a:solidFill>
-              <a:latin typeface="微软雅黑" panose="020B0503020204020204" charset="-122"/>
-            </a:endParaRPr>
           </a:p>
         </p:txBody>
       </p:sp>
@@ -12366,7 +12866,7 @@
 </file>
 
 <file path=ppt/slides/slide9.xml><?xml version="1.0" encoding="utf-8"?>
-<p:sld xmlns:a="http://schemas.openxmlformats.org/drawingml/2006/main" xmlns:r="http://schemas.openxmlformats.org/officeDocument/2006/relationships" xmlns:p="http://schemas.openxmlformats.org/presentationml/2006/main">
+<p:sld xmlns:a="http://schemas.openxmlformats.org/drawingml/2006/main" xmlns:p="http://schemas.openxmlformats.org/presentationml/2006/main" xmlns:r="http://schemas.openxmlformats.org/officeDocument/2006/relationships">
   <p:cSld>
     <p:spTree>
       <p:nvGrpSpPr>
@@ -12436,7 +12936,7 @@
           <a:noFill/>
         </p:spPr>
         <p:txBody>
-          <a:bodyPr wrap="square" lIns="36576" tIns="18288" rIns="36576" bIns="18288" anchor="t">
+          <a:bodyPr wrap="square" anchor="t" lIns="36576" rIns="36576" tIns="18288" bIns="18288">
             <a:spAutoFit/>
           </a:bodyPr>
           <a:lstStyle/>
@@ -12447,16 +12947,10 @@
                 <a:solidFill>
                   <a:srgbClr val="8B5CF6"/>
                 </a:solidFill>
-                <a:latin typeface="微软雅黑" panose="020B0503020204020204" charset="-122"/>
-              </a:rPr>
-              <a:t>端到端演示</a:t>
-            </a:r>
-            <a:endParaRPr sz="1300" b="1">
-              <a:solidFill>
-                <a:srgbClr val="8B5CF6"/>
-              </a:solidFill>
-              <a:latin typeface="微软雅黑" panose="020B0503020204020204" charset="-122"/>
-            </a:endParaRPr>
+                <a:latin typeface="Microsoft YaHei"/>
+              </a:rPr>
+              <a:t>核心差异</a:t>
+            </a:r>
           </a:p>
         </p:txBody>
       </p:sp>
@@ -12477,7 +12971,7 @@
           <a:noFill/>
         </p:spPr>
         <p:txBody>
-          <a:bodyPr wrap="square" lIns="36576" tIns="18288" rIns="36576" bIns="18288" anchor="t">
+          <a:bodyPr wrap="square" anchor="t" lIns="36576" rIns="36576" tIns="18288" bIns="18288">
             <a:spAutoFit/>
           </a:bodyPr>
           <a:lstStyle/>
@@ -12488,16 +12982,10 @@
                 <a:solidFill>
                   <a:srgbClr val="FFFFFF"/>
                 </a:solidFill>
-                <a:latin typeface="微软雅黑" panose="020B0503020204020204" charset="-122"/>
-              </a:rPr>
-              <a:t>一条完整的可信交易闭环</a:t>
-            </a:r>
-            <a:endParaRPr sz="3000" b="1">
-              <a:solidFill>
-                <a:srgbClr val="FFFFFF"/>
-              </a:solidFill>
-              <a:latin typeface="微软雅黑" panose="020B0503020204020204" charset="-122"/>
-            </a:endParaRPr>
+                <a:latin typeface="Microsoft YaHei"/>
+              </a:rPr>
+              <a:t>不是 Moss 套壳 —— 在 Moss 之上补了三层</a:t>
+            </a:r>
           </a:p>
         </p:txBody>
       </p:sp>
@@ -12509,8 +12997,8 @@
         </p:nvSpPr>
         <p:spPr>
           <a:xfrm>
-            <a:off x="548640" y="2011680"/>
-            <a:ext cx="1755648" cy="1280160"/>
+            <a:off x="548640" y="1828800"/>
+            <a:ext cx="3520440" cy="3840480"/>
           </a:xfrm>
           <a:prstGeom prst="roundRect">
             <a:avLst>
@@ -12549,69 +13037,25 @@
       </p:sp>
       <p:sp>
         <p:nvSpPr>
-          <p:cNvPr id="6" name="TextBox 5"/>
-          <p:cNvSpPr txBox="1"/>
-          <p:nvPr/>
-        </p:nvSpPr>
-        <p:spPr>
-          <a:xfrm>
-            <a:off x="548640" y="2103120"/>
-            <a:ext cx="1755648" cy="1097280"/>
-          </a:xfrm>
-          <a:prstGeom prst="rect">
-            <a:avLst/>
-          </a:prstGeom>
-          <a:noFill/>
-        </p:spPr>
-        <p:txBody>
-          <a:bodyPr wrap="square" lIns="36576" tIns="18288" rIns="36576" bIns="18288" anchor="ctr">
-            <a:spAutoFit/>
-          </a:bodyPr>
-          <a:lstStyle/>
-          <a:p>
-            <a:pPr algn="ctr">
-              <a:lnSpc>
-                <a:spcPct val="115000"/>
-              </a:lnSpc>
-            </a:pPr>
-            <a:r>
-              <a:rPr sz="1500" b="1">
-                <a:solidFill>
-                  <a:srgbClr val="FFFFFF"/>
-                </a:solidFill>
-                <a:latin typeface="微软雅黑" panose="020B0503020204020204" charset="-122"/>
-              </a:rPr>
-              <a:t>① 连钱包</a:t>
-            </a:r>
-            <a:endParaRPr sz="1500" b="1">
-              <a:solidFill>
-                <a:srgbClr val="FFFFFF"/>
-              </a:solidFill>
-              <a:latin typeface="微软雅黑" panose="020B0503020204020204" charset="-122"/>
-            </a:endParaRPr>
-          </a:p>
-        </p:txBody>
-      </p:sp>
-      <p:sp>
-        <p:nvSpPr>
-          <p:cNvPr id="7" name="Chevron 6"/>
+          <p:cNvPr id="6" name="Rectangle 5"/>
           <p:cNvSpPr/>
           <p:nvPr/>
         </p:nvSpPr>
         <p:spPr>
           <a:xfrm>
-            <a:off x="2286000" y="2423160"/>
-            <a:ext cx="146304" cy="457200"/>
-          </a:xfrm>
-          <a:prstGeom prst="chevron">
+            <a:off x="548640" y="1828800"/>
+            <a:ext cx="82296" cy="3840480"/>
+          </a:xfrm>
+          <a:prstGeom prst="rect">
             <a:avLst/>
           </a:prstGeom>
           <a:solidFill>
-            <a:srgbClr val="8B5CF6"/>
+            <a:srgbClr val="22D3EE"/>
           </a:solidFill>
           <a:ln>
             <a:noFill/>
           </a:ln>
+          <a:effectLst/>
         </p:spPr>
         <p:style>
           <a:lnRef idx="1">
@@ -12637,14 +13081,123 @@
       </p:sp>
       <p:sp>
         <p:nvSpPr>
-          <p:cNvPr id="8" name="Rounded Rectangle 7"/>
+          <p:cNvPr id="7" name="TextBox 6"/>
+          <p:cNvSpPr txBox="1"/>
+          <p:nvPr/>
+        </p:nvSpPr>
+        <p:spPr>
+          <a:xfrm>
+            <a:off x="786384" y="2011680"/>
+            <a:ext cx="3063240" cy="502920"/>
+          </a:xfrm>
+          <a:prstGeom prst="rect">
+            <a:avLst/>
+          </a:prstGeom>
+          <a:noFill/>
+        </p:spPr>
+        <p:txBody>
+          <a:bodyPr wrap="square" anchor="t" lIns="36576" rIns="36576" tIns="18288" bIns="18288">
+            <a:spAutoFit/>
+          </a:bodyPr>
+          <a:lstStyle/>
+          <a:p>
+            <a:pPr algn="l"/>
+            <a:r>
+              <a:rPr sz="1900" b="1">
+                <a:solidFill>
+                  <a:srgbClr val="FFFFFF"/>
+                </a:solidFill>
+                <a:latin typeface="Microsoft YaHei"/>
+              </a:rPr>
+              <a:t>① 收款方对账</a:t>
+            </a:r>
+          </a:p>
+        </p:txBody>
+      </p:sp>
+      <p:sp>
+        <p:nvSpPr>
+          <p:cNvPr id="8" name="TextBox 7"/>
+          <p:cNvSpPr txBox="1"/>
+          <p:nvPr/>
+        </p:nvSpPr>
+        <p:spPr>
+          <a:xfrm>
+            <a:off x="786384" y="2578608"/>
+            <a:ext cx="3063240" cy="365760"/>
+          </a:xfrm>
+          <a:prstGeom prst="rect">
+            <a:avLst/>
+          </a:prstGeom>
+          <a:noFill/>
+        </p:spPr>
+        <p:txBody>
+          <a:bodyPr wrap="square" anchor="t" lIns="36576" rIns="36576" tIns="18288" bIns="18288">
+            <a:spAutoFit/>
+          </a:bodyPr>
+          <a:lstStyle/>
+          <a:p>
+            <a:pPr algn="l"/>
+            <a:r>
+              <a:rPr sz="1400" b="1">
+                <a:solidFill>
+                  <a:srgbClr val="22D3EE"/>
+                </a:solidFill>
+                <a:latin typeface="Microsoft YaHei"/>
+              </a:rPr>
+              <a:t>UNDECLARED_RECIPIENT</a:t>
+            </a:r>
+          </a:p>
+        </p:txBody>
+      </p:sp>
+      <p:sp>
+        <p:nvSpPr>
+          <p:cNvPr id="9" name="TextBox 8"/>
+          <p:cNvSpPr txBox="1"/>
+          <p:nvPr/>
+        </p:nvSpPr>
+        <p:spPr>
+          <a:xfrm>
+            <a:off x="786384" y="3108960"/>
+            <a:ext cx="3044952" cy="2468880"/>
+          </a:xfrm>
+          <a:prstGeom prst="rect">
+            <a:avLst/>
+          </a:prstGeom>
+          <a:noFill/>
+        </p:spPr>
+        <p:txBody>
+          <a:bodyPr wrap="square" anchor="t" lIns="36576" rIns="36576" tIns="18288" bIns="18288">
+            <a:spAutoFit/>
+          </a:bodyPr>
+          <a:lstStyle/>
+          <a:p>
+            <a:pPr algn="l">
+              <a:lnSpc>
+                <a:spcPct val="125000"/>
+              </a:lnSpc>
+            </a:pPr>
+            <a:r>
+              <a:rPr sz="1400" b="0">
+                <a:solidFill>
+                  <a:srgbClr val="E9E9F2"/>
+                </a:solidFill>
+                <a:latin typeface="Microsoft YaHei"/>
+              </a:rPr>
+              <a:t>Moss 只约束「转出多少」，不约束「转给谁」。MonadLens 用界面声明的收款方做对账，未声明地址直接标红。</a:t>
+            </a:r>
+          </a:p>
+        </p:txBody>
+      </p:sp>
+      <p:sp>
+        <p:nvSpPr>
+          <p:cNvPr id="10" name="Rounded Rectangle 9"/>
           <p:cNvSpPr/>
           <p:nvPr/>
         </p:nvSpPr>
         <p:spPr>
           <a:xfrm>
-            <a:off x="2414016" y="2011680"/>
-            <a:ext cx="1755648" cy="1280160"/>
+            <a:off x="4315968" y="1828800"/>
+            <a:ext cx="3520440" cy="3840480"/>
           </a:xfrm>
           <a:prstGeom prst="roundRect">
             <a:avLst>
@@ -12683,61 +13236,16 @@
       </p:sp>
       <p:sp>
         <p:nvSpPr>
-          <p:cNvPr id="9" name="TextBox 8"/>
-          <p:cNvSpPr txBox="1"/>
-          <p:nvPr/>
-        </p:nvSpPr>
-        <p:spPr>
-          <a:xfrm>
-            <a:off x="2414016" y="2103120"/>
-            <a:ext cx="1755648" cy="1097280"/>
-          </a:xfrm>
-          <a:prstGeom prst="rect">
-            <a:avLst/>
-          </a:prstGeom>
-          <a:noFill/>
-        </p:spPr>
-        <p:txBody>
-          <a:bodyPr wrap="square" lIns="36576" tIns="18288" rIns="36576" bIns="18288" anchor="ctr">
-            <a:spAutoFit/>
-          </a:bodyPr>
-          <a:lstStyle/>
-          <a:p>
-            <a:pPr algn="ctr">
-              <a:lnSpc>
-                <a:spcPct val="115000"/>
-              </a:lnSpc>
-            </a:pPr>
-            <a:r>
-              <a:rPr sz="1500" b="1">
-                <a:solidFill>
-                  <a:srgbClr val="FFFFFF"/>
-                </a:solidFill>
-                <a:latin typeface="微软雅黑" panose="020B0503020204020204" charset="-122"/>
-              </a:rPr>
-              <a:t>② Agent 对话</a:t>
-            </a:r>
-            <a:endParaRPr sz="1500" b="1">
-              <a:solidFill>
-                <a:srgbClr val="FFFFFF"/>
-              </a:solidFill>
-              <a:latin typeface="微软雅黑" panose="020B0503020204020204" charset="-122"/>
-            </a:endParaRPr>
-          </a:p>
-        </p:txBody>
-      </p:sp>
-      <p:sp>
-        <p:nvSpPr>
-          <p:cNvPr id="10" name="Chevron 9"/>
+          <p:cNvPr id="11" name="Rectangle 10"/>
           <p:cNvSpPr/>
           <p:nvPr/>
         </p:nvSpPr>
         <p:spPr>
           <a:xfrm>
-            <a:off x="4151376" y="2423160"/>
-            <a:ext cx="146304" cy="457200"/>
-          </a:xfrm>
-          <a:prstGeom prst="chevron">
+            <a:off x="4315968" y="1828800"/>
+            <a:ext cx="82296" cy="3840480"/>
+          </a:xfrm>
+          <a:prstGeom prst="rect">
             <a:avLst/>
           </a:prstGeom>
           <a:solidFill>
@@ -12746,6 +13254,7 @@
           <a:ln>
             <a:noFill/>
           </a:ln>
+          <a:effectLst/>
         </p:spPr>
         <p:style>
           <a:lnRef idx="1">
@@ -12771,14 +13280,123 @@
       </p:sp>
       <p:sp>
         <p:nvSpPr>
-          <p:cNvPr id="11" name="Rounded Rectangle 10"/>
+          <p:cNvPr id="12" name="TextBox 11"/>
+          <p:cNvSpPr txBox="1"/>
+          <p:nvPr/>
+        </p:nvSpPr>
+        <p:spPr>
+          <a:xfrm>
+            <a:off x="4553712" y="2011680"/>
+            <a:ext cx="3063240" cy="502920"/>
+          </a:xfrm>
+          <a:prstGeom prst="rect">
+            <a:avLst/>
+          </a:prstGeom>
+          <a:noFill/>
+        </p:spPr>
+        <p:txBody>
+          <a:bodyPr wrap="square" anchor="t" lIns="36576" rIns="36576" tIns="18288" bIns="18288">
+            <a:spAutoFit/>
+          </a:bodyPr>
+          <a:lstStyle/>
+          <a:p>
+            <a:pPr algn="l"/>
+            <a:r>
+              <a:rPr sz="1900" b="1">
+                <a:solidFill>
+                  <a:srgbClr val="FFFFFF"/>
+                </a:solidFill>
+                <a:latin typeface="Microsoft YaHei"/>
+              </a:rPr>
+              <a:t>② 地址外观检测</a:t>
+            </a:r>
+          </a:p>
+        </p:txBody>
+      </p:sp>
+      <p:sp>
+        <p:nvSpPr>
+          <p:cNvPr id="13" name="TextBox 12"/>
+          <p:cNvSpPr txBox="1"/>
+          <p:nvPr/>
+        </p:nvSpPr>
+        <p:spPr>
+          <a:xfrm>
+            <a:off x="4553712" y="2578608"/>
+            <a:ext cx="3063240" cy="365760"/>
+          </a:xfrm>
+          <a:prstGeom prst="rect">
+            <a:avLst/>
+          </a:prstGeom>
+          <a:noFill/>
+        </p:spPr>
+        <p:txBody>
+          <a:bodyPr wrap="square" anchor="t" lIns="36576" rIns="36576" tIns="18288" bIns="18288">
+            <a:spAutoFit/>
+          </a:bodyPr>
+          <a:lstStyle/>
+          <a:p>
+            <a:pPr algn="l"/>
+            <a:r>
+              <a:rPr sz="1400" b="1">
+                <a:solidFill>
+                  <a:srgbClr val="8B5CF6"/>
+                </a:solidFill>
+                <a:latin typeface="Microsoft YaHei"/>
+              </a:rPr>
+              <a:t>MISLEADING_ADDRESS</a:t>
+            </a:r>
+          </a:p>
+        </p:txBody>
+      </p:sp>
+      <p:sp>
+        <p:nvSpPr>
+          <p:cNvPr id="14" name="TextBox 13"/>
+          <p:cNvSpPr txBox="1"/>
+          <p:nvPr/>
+        </p:nvSpPr>
+        <p:spPr>
+          <a:xfrm>
+            <a:off x="4553712" y="3108960"/>
+            <a:ext cx="3044952" cy="2468880"/>
+          </a:xfrm>
+          <a:prstGeom prst="rect">
+            <a:avLst/>
+          </a:prstGeom>
+          <a:noFill/>
+        </p:spPr>
+        <p:txBody>
+          <a:bodyPr wrap="square" anchor="t" lIns="36576" rIns="36576" tIns="18288" bIns="18288">
+            <a:spAutoFit/>
+          </a:bodyPr>
+          <a:lstStyle/>
+          <a:p>
+            <a:pPr algn="l">
+              <a:lnSpc>
+                <a:spcPct val="125000"/>
+              </a:lnSpc>
+            </a:pPr>
+            <a:r>
+              <a:rPr sz="1400" b="0">
+                <a:solidFill>
+                  <a:srgbClr val="E9E9F2"/>
+                </a:solidFill>
+                <a:latin typeface="Microsoft YaHei"/>
+              </a:rPr>
+              <a:t>零宽 / 形似字符掉包，calldata 全合法、肉眼无法分辨。MonadLens 单独检测非 ASCII 与形近字符。</a:t>
+            </a:r>
+          </a:p>
+        </p:txBody>
+      </p:sp>
+      <p:sp>
+        <p:nvSpPr>
+          <p:cNvPr id="15" name="Rounded Rectangle 14"/>
           <p:cNvSpPr/>
           <p:nvPr/>
         </p:nvSpPr>
         <p:spPr>
           <a:xfrm>
-            <a:off x="4279392" y="2011680"/>
-            <a:ext cx="1755648" cy="1280160"/>
+            <a:off x="8083296" y="1828800"/>
+            <a:ext cx="3520440" cy="3840480"/>
           </a:xfrm>
           <a:prstGeom prst="roundRect">
             <a:avLst>
@@ -12817,69 +13435,25 @@
       </p:sp>
       <p:sp>
         <p:nvSpPr>
-          <p:cNvPr id="12" name="TextBox 11"/>
-          <p:cNvSpPr txBox="1"/>
-          <p:nvPr/>
-        </p:nvSpPr>
-        <p:spPr>
-          <a:xfrm>
-            <a:off x="4279392" y="2103120"/>
-            <a:ext cx="1755648" cy="1097280"/>
-          </a:xfrm>
-          <a:prstGeom prst="rect">
-            <a:avLst/>
-          </a:prstGeom>
-          <a:noFill/>
-        </p:spPr>
-        <p:txBody>
-          <a:bodyPr wrap="square" lIns="36576" tIns="18288" rIns="36576" bIns="18288" anchor="ctr">
-            <a:spAutoFit/>
-          </a:bodyPr>
-          <a:lstStyle/>
-          <a:p>
-            <a:pPr algn="ctr">
-              <a:lnSpc>
-                <a:spcPct val="115000"/>
-              </a:lnSpc>
-            </a:pPr>
-            <a:r>
-              <a:rPr sz="1500" b="1">
-                <a:solidFill>
-                  <a:srgbClr val="FFFFFF"/>
-                </a:solidFill>
-                <a:latin typeface="微软雅黑" panose="020B0503020204020204" charset="-122"/>
-              </a:rPr>
-              <a:t>③ Moss 模拟预览</a:t>
-            </a:r>
-            <a:endParaRPr sz="1500" b="1">
-              <a:solidFill>
-                <a:srgbClr val="FFFFFF"/>
-              </a:solidFill>
-              <a:latin typeface="微软雅黑" panose="020B0503020204020204" charset="-122"/>
-            </a:endParaRPr>
-          </a:p>
-        </p:txBody>
-      </p:sp>
-      <p:sp>
-        <p:nvSpPr>
-          <p:cNvPr id="13" name="Chevron 12"/>
+          <p:cNvPr id="16" name="Rectangle 15"/>
           <p:cNvSpPr/>
           <p:nvPr/>
         </p:nvSpPr>
         <p:spPr>
           <a:xfrm>
-            <a:off x="6016752" y="2423160"/>
-            <a:ext cx="146304" cy="457200"/>
-          </a:xfrm>
-          <a:prstGeom prst="chevron">
+            <a:off x="8083296" y="1828800"/>
+            <a:ext cx="82296" cy="3840480"/>
+          </a:xfrm>
+          <a:prstGeom prst="rect">
             <a:avLst/>
           </a:prstGeom>
           <a:solidFill>
-            <a:srgbClr val="8B5CF6"/>
+            <a:srgbClr val="F59E0B"/>
           </a:solidFill>
           <a:ln>
             <a:noFill/>
           </a:ln>
+          <a:effectLst/>
         </p:spPr>
         <p:style>
           <a:lnRef idx="1">
@@ -12905,544 +13479,151 @@
       </p:sp>
       <p:sp>
         <p:nvSpPr>
-          <p:cNvPr id="14" name="Rounded Rectangle 13"/>
-          <p:cNvSpPr/>
-          <p:nvPr/>
-        </p:nvSpPr>
-        <p:spPr>
-          <a:xfrm>
-            <a:off x="6144768" y="2011680"/>
-            <a:ext cx="1755648" cy="1280160"/>
-          </a:xfrm>
-          <a:prstGeom prst="roundRect">
-            <a:avLst>
-              <a:gd name="adj" fmla="val 10000"/>
-            </a:avLst>
-          </a:prstGeom>
-          <a:solidFill>
-            <a:srgbClr val="221E42"/>
-          </a:solidFill>
-          <a:ln>
-            <a:noFill/>
-          </a:ln>
-          <a:effectLst/>
-        </p:spPr>
-        <p:style>
-          <a:lnRef idx="1">
-            <a:schemeClr val="accent1"/>
-          </a:lnRef>
-          <a:fillRef idx="3">
-            <a:schemeClr val="accent1"/>
-          </a:fillRef>
-          <a:effectRef idx="2">
-            <a:schemeClr val="accent1"/>
-          </a:effectRef>
-          <a:fontRef idx="minor">
-            <a:schemeClr val="lt1"/>
-          </a:fontRef>
-        </p:style>
-        <p:txBody>
-          <a:bodyPr rtlCol="0" anchor="ctr"/>
-          <a:lstStyle/>
-          <a:p>
-            <a:pPr algn="ctr"/>
-          </a:p>
-        </p:txBody>
-      </p:sp>
-      <p:sp>
-        <p:nvSpPr>
-          <p:cNvPr id="15" name="TextBox 14"/>
-          <p:cNvSpPr txBox="1"/>
-          <p:nvPr/>
-        </p:nvSpPr>
-        <p:spPr>
-          <a:xfrm>
-            <a:off x="6144768" y="2103120"/>
-            <a:ext cx="1755648" cy="1097280"/>
-          </a:xfrm>
-          <a:prstGeom prst="rect">
-            <a:avLst/>
-          </a:prstGeom>
-          <a:noFill/>
-        </p:spPr>
-        <p:txBody>
-          <a:bodyPr wrap="square" lIns="36576" tIns="18288" rIns="36576" bIns="18288" anchor="ctr">
-            <a:spAutoFit/>
-          </a:bodyPr>
-          <a:lstStyle/>
-          <a:p>
-            <a:pPr algn="ctr">
+          <p:cNvPr id="17" name="TextBox 16"/>
+          <p:cNvSpPr txBox="1"/>
+          <p:nvPr/>
+        </p:nvSpPr>
+        <p:spPr>
+          <a:xfrm>
+            <a:off x="8321040" y="2011680"/>
+            <a:ext cx="3063240" cy="502920"/>
+          </a:xfrm>
+          <a:prstGeom prst="rect">
+            <a:avLst/>
+          </a:prstGeom>
+          <a:noFill/>
+        </p:spPr>
+        <p:txBody>
+          <a:bodyPr wrap="square" anchor="t" lIns="36576" rIns="36576" tIns="18288" bIns="18288">
+            <a:spAutoFit/>
+          </a:bodyPr>
+          <a:lstStyle/>
+          <a:p>
+            <a:pPr algn="l"/>
+            <a:r>
+              <a:rPr sz="1900" b="1">
+                <a:solidFill>
+                  <a:srgbClr val="FFFFFF"/>
+                </a:solidFill>
+                <a:latin typeface="Microsoft YaHei"/>
+              </a:rPr>
+              <a:t>③ 签名溯源</a:t>
+            </a:r>
+          </a:p>
+        </p:txBody>
+      </p:sp>
+      <p:sp>
+        <p:nvSpPr>
+          <p:cNvPr id="18" name="TextBox 17"/>
+          <p:cNvSpPr txBox="1"/>
+          <p:nvPr/>
+        </p:nvSpPr>
+        <p:spPr>
+          <a:xfrm>
+            <a:off x="8321040" y="2578608"/>
+            <a:ext cx="3063240" cy="365760"/>
+          </a:xfrm>
+          <a:prstGeom prst="rect">
+            <a:avLst/>
+          </a:prstGeom>
+          <a:noFill/>
+        </p:spPr>
+        <p:txBody>
+          <a:bodyPr wrap="square" anchor="t" lIns="36576" rIns="36576" tIns="18288" bIns="18288">
+            <a:spAutoFit/>
+          </a:bodyPr>
+          <a:lstStyle/>
+          <a:p>
+            <a:pPr algn="l"/>
+            <a:r>
+              <a:rPr sz="1400" b="1">
+                <a:solidFill>
+                  <a:srgbClr val="F59E0B"/>
+                </a:solidFill>
+                <a:latin typeface="Microsoft YaHei"/>
+              </a:rPr>
+              <a:t>PERMIT_REPLAY_RISK</a:t>
+            </a:r>
+          </a:p>
+        </p:txBody>
+      </p:sp>
+      <p:sp>
+        <p:nvSpPr>
+          <p:cNvPr id="19" name="TextBox 18"/>
+          <p:cNvSpPr txBox="1"/>
+          <p:nvPr/>
+        </p:nvSpPr>
+        <p:spPr>
+          <a:xfrm>
+            <a:off x="8321040" y="3108960"/>
+            <a:ext cx="3044952" cy="2468880"/>
+          </a:xfrm>
+          <a:prstGeom prst="rect">
+            <a:avLst/>
+          </a:prstGeom>
+          <a:noFill/>
+        </p:spPr>
+        <p:txBody>
+          <a:bodyPr wrap="square" anchor="t" lIns="36576" rIns="36576" tIns="18288" bIns="18288">
+            <a:spAutoFit/>
+          </a:bodyPr>
+          <a:lstStyle/>
+          <a:p>
+            <a:pPr algn="l">
               <a:lnSpc>
-                <a:spcPct val="115000"/>
+                <a:spcPct val="125000"/>
               </a:lnSpc>
             </a:pPr>
             <a:r>
-              <a:rPr sz="1500" b="1">
-                <a:solidFill>
-                  <a:srgbClr val="FFFFFF"/>
-                </a:solidFill>
-                <a:latin typeface="微软雅黑" panose="020B0503020204020204" charset="-122"/>
-              </a:rPr>
-              <a:t>④ 用户确认</a:t>
-            </a:r>
-            <a:endParaRPr sz="1500" b="1">
-              <a:solidFill>
-                <a:srgbClr val="FFFFFF"/>
-              </a:solidFill>
-              <a:latin typeface="微软雅黑" panose="020B0503020204020204" charset="-122"/>
-            </a:endParaRPr>
-          </a:p>
-        </p:txBody>
-      </p:sp>
-      <p:sp>
-        <p:nvSpPr>
-          <p:cNvPr id="16" name="Chevron 15"/>
-          <p:cNvSpPr/>
-          <p:nvPr/>
-        </p:nvSpPr>
-        <p:spPr>
-          <a:xfrm>
-            <a:off x="7882128" y="2423160"/>
-            <a:ext cx="146304" cy="457200"/>
-          </a:xfrm>
-          <a:prstGeom prst="chevron">
-            <a:avLst/>
-          </a:prstGeom>
-          <a:solidFill>
-            <a:srgbClr val="8B5CF6"/>
-          </a:solidFill>
-          <a:ln>
-            <a:noFill/>
-          </a:ln>
-        </p:spPr>
-        <p:style>
-          <a:lnRef idx="1">
-            <a:schemeClr val="accent1"/>
-          </a:lnRef>
-          <a:fillRef idx="3">
-            <a:schemeClr val="accent1"/>
-          </a:fillRef>
-          <a:effectRef idx="2">
-            <a:schemeClr val="accent1"/>
-          </a:effectRef>
-          <a:fontRef idx="minor">
-            <a:schemeClr val="lt1"/>
-          </a:fontRef>
-        </p:style>
-        <p:txBody>
-          <a:bodyPr rtlCol="0" anchor="ctr"/>
-          <a:lstStyle/>
-          <a:p>
-            <a:pPr algn="ctr"/>
-          </a:p>
-        </p:txBody>
-      </p:sp>
-      <p:sp>
-        <p:nvSpPr>
-          <p:cNvPr id="17" name="Rounded Rectangle 16"/>
-          <p:cNvSpPr/>
-          <p:nvPr/>
-        </p:nvSpPr>
-        <p:spPr>
-          <a:xfrm>
-            <a:off x="8010144" y="2011680"/>
-            <a:ext cx="1755648" cy="1280160"/>
-          </a:xfrm>
-          <a:prstGeom prst="roundRect">
-            <a:avLst>
-              <a:gd name="adj" fmla="val 10000"/>
-            </a:avLst>
-          </a:prstGeom>
-          <a:solidFill>
-            <a:srgbClr val="221E42"/>
-          </a:solidFill>
-          <a:ln>
-            <a:noFill/>
-          </a:ln>
-          <a:effectLst/>
-        </p:spPr>
-        <p:style>
-          <a:lnRef idx="1">
-            <a:schemeClr val="accent1"/>
-          </a:lnRef>
-          <a:fillRef idx="3">
-            <a:schemeClr val="accent1"/>
-          </a:fillRef>
-          <a:effectRef idx="2">
-            <a:schemeClr val="accent1"/>
-          </a:effectRef>
-          <a:fontRef idx="minor">
-            <a:schemeClr val="lt1"/>
-          </a:fontRef>
-        </p:style>
-        <p:txBody>
-          <a:bodyPr rtlCol="0" anchor="ctr"/>
-          <a:lstStyle/>
-          <a:p>
-            <a:pPr algn="ctr"/>
-          </a:p>
-        </p:txBody>
-      </p:sp>
-      <p:sp>
-        <p:nvSpPr>
-          <p:cNvPr id="18" name="TextBox 17"/>
-          <p:cNvSpPr txBox="1"/>
-          <p:nvPr/>
-        </p:nvSpPr>
-        <p:spPr>
-          <a:xfrm>
-            <a:off x="8010144" y="2103120"/>
-            <a:ext cx="1755648" cy="1097280"/>
-          </a:xfrm>
-          <a:prstGeom prst="rect">
-            <a:avLst/>
-          </a:prstGeom>
-          <a:noFill/>
-        </p:spPr>
-        <p:txBody>
-          <a:bodyPr wrap="square" lIns="36576" tIns="18288" rIns="36576" bIns="18288" anchor="ctr">
-            <a:spAutoFit/>
-          </a:bodyPr>
-          <a:lstStyle/>
-          <a:p>
-            <a:pPr algn="ctr">
-              <a:lnSpc>
-                <a:spcPct val="115000"/>
-              </a:lnSpc>
-            </a:pPr>
-            <a:r>
-              <a:rPr sz="1500" b="1">
-                <a:solidFill>
-                  <a:srgbClr val="FFFFFF"/>
-                </a:solidFill>
-                <a:latin typeface="微软雅黑" panose="020B0503020204020204" charset="-122"/>
-              </a:rPr>
-              <a:t>⑤ 签名广播</a:t>
-            </a:r>
-            <a:endParaRPr sz="1500" b="1">
-              <a:solidFill>
-                <a:srgbClr val="FFFFFF"/>
-              </a:solidFill>
-              <a:latin typeface="微软雅黑" panose="020B0503020204020204" charset="-122"/>
-            </a:endParaRPr>
-          </a:p>
-        </p:txBody>
-      </p:sp>
-      <p:sp>
-        <p:nvSpPr>
-          <p:cNvPr id="19" name="Chevron 18"/>
-          <p:cNvSpPr/>
-          <p:nvPr/>
-        </p:nvSpPr>
-        <p:spPr>
-          <a:xfrm>
-            <a:off x="9747504" y="2423160"/>
-            <a:ext cx="146304" cy="457200"/>
-          </a:xfrm>
-          <a:prstGeom prst="chevron">
-            <a:avLst/>
-          </a:prstGeom>
-          <a:solidFill>
-            <a:srgbClr val="8B5CF6"/>
-          </a:solidFill>
-          <a:ln>
-            <a:noFill/>
-          </a:ln>
-        </p:spPr>
-        <p:style>
-          <a:lnRef idx="1">
-            <a:schemeClr val="accent1"/>
-          </a:lnRef>
-          <a:fillRef idx="3">
-            <a:schemeClr val="accent1"/>
-          </a:fillRef>
-          <a:effectRef idx="2">
-            <a:schemeClr val="accent1"/>
-          </a:effectRef>
-          <a:fontRef idx="minor">
-            <a:schemeClr val="lt1"/>
-          </a:fontRef>
-        </p:style>
-        <p:txBody>
-          <a:bodyPr rtlCol="0" anchor="ctr"/>
-          <a:lstStyle/>
-          <a:p>
-            <a:pPr algn="ctr"/>
-          </a:p>
-        </p:txBody>
-      </p:sp>
-      <p:sp>
-        <p:nvSpPr>
-          <p:cNvPr id="20" name="Rounded Rectangle 19"/>
-          <p:cNvSpPr/>
-          <p:nvPr/>
-        </p:nvSpPr>
-        <p:spPr>
-          <a:xfrm>
-            <a:off x="9875520" y="2011680"/>
-            <a:ext cx="1755648" cy="1280160"/>
-          </a:xfrm>
-          <a:prstGeom prst="roundRect">
-            <a:avLst>
-              <a:gd name="adj" fmla="val 10000"/>
-            </a:avLst>
-          </a:prstGeom>
-          <a:solidFill>
-            <a:srgbClr val="221E42"/>
-          </a:solidFill>
-          <a:ln>
-            <a:noFill/>
-          </a:ln>
-          <a:effectLst/>
-        </p:spPr>
-        <p:style>
-          <a:lnRef idx="1">
-            <a:schemeClr val="accent1"/>
-          </a:lnRef>
-          <a:fillRef idx="3">
-            <a:schemeClr val="accent1"/>
-          </a:fillRef>
-          <a:effectRef idx="2">
-            <a:schemeClr val="accent1"/>
-          </a:effectRef>
-          <a:fontRef idx="minor">
-            <a:schemeClr val="lt1"/>
-          </a:fontRef>
-        </p:style>
-        <p:txBody>
-          <a:bodyPr rtlCol="0" anchor="ctr"/>
-          <a:lstStyle/>
-          <a:p>
-            <a:pPr algn="ctr"/>
+              <a:rPr sz="1400" b="0">
+                <a:solidFill>
+                  <a:srgbClr val="E9E9F2"/>
+                </a:solidFill>
+                <a:latin typeface="Microsoft YaHei"/>
+              </a:rPr>
+              <a:t>EIP-2612 permit 攻击的危险在离链签名；Moss 只见 permit + transferFrom calldata，MonadLens 标出其 provenance 盲区。</a:t>
+            </a:r>
+          </a:p>
+        </p:txBody>
+      </p:sp>
+      <p:sp>
+        <p:nvSpPr>
+          <p:cNvPr id="20" name="TextBox 19"/>
+          <p:cNvSpPr txBox="1"/>
+          <p:nvPr/>
+        </p:nvSpPr>
+        <p:spPr>
+          <a:xfrm>
+            <a:off x="548640" y="5897880"/>
+            <a:ext cx="11064240" cy="365760"/>
+          </a:xfrm>
+          <a:prstGeom prst="rect">
+            <a:avLst/>
+          </a:prstGeom>
+          <a:noFill/>
+        </p:spPr>
+        <p:txBody>
+          <a:bodyPr wrap="square" anchor="t" lIns="36576" rIns="36576" tIns="18288" bIns="18288">
+            <a:spAutoFit/>
+          </a:bodyPr>
+          <a:lstStyle/>
+          <a:p>
+            <a:pPr algn="ctr"/>
+            <a:r>
+              <a:rPr sz="1300" b="0">
+                <a:solidFill>
+                  <a:srgbClr val="9CA3B8"/>
+                </a:solidFill>
+                <a:latin typeface="Microsoft YaHei"/>
+              </a:rPr>
+              <a:t>这三类是 Moss 原生看不到、只有应用层才知道的信息 —— 评委视角的核心创新点。</a:t>
+            </a:r>
           </a:p>
         </p:txBody>
       </p:sp>
       <p:sp>
         <p:nvSpPr>
           <p:cNvPr id="21" name="TextBox 20"/>
-          <p:cNvSpPr txBox="1"/>
-          <p:nvPr/>
-        </p:nvSpPr>
-        <p:spPr>
-          <a:xfrm>
-            <a:off x="9875520" y="2103120"/>
-            <a:ext cx="1755648" cy="1097280"/>
-          </a:xfrm>
-          <a:prstGeom prst="rect">
-            <a:avLst/>
-          </a:prstGeom>
-          <a:noFill/>
-        </p:spPr>
-        <p:txBody>
-          <a:bodyPr wrap="square" lIns="36576" tIns="18288" rIns="36576" bIns="18288" anchor="ctr">
-            <a:spAutoFit/>
-          </a:bodyPr>
-          <a:lstStyle/>
-          <a:p>
-            <a:pPr algn="ctr">
-              <a:lnSpc>
-                <a:spcPct val="115000"/>
-              </a:lnSpc>
-            </a:pPr>
-            <a:r>
-              <a:rPr sz="1500" b="1">
-                <a:solidFill>
-                  <a:srgbClr val="FFFFFF"/>
-                </a:solidFill>
-                <a:latin typeface="微软雅黑" panose="020B0503020204020204" charset="-122"/>
-              </a:rPr>
-              <a:t>⑥ 链上验证</a:t>
-            </a:r>
-            <a:endParaRPr sz="1500" b="1">
-              <a:solidFill>
-                <a:srgbClr val="FFFFFF"/>
-              </a:solidFill>
-              <a:latin typeface="微软雅黑" panose="020B0503020204020204" charset="-122"/>
-            </a:endParaRPr>
-          </a:p>
-        </p:txBody>
-      </p:sp>
-      <p:sp>
-        <p:nvSpPr>
-          <p:cNvPr id="22" name="Rounded Rectangle 21"/>
-          <p:cNvSpPr/>
-          <p:nvPr/>
-        </p:nvSpPr>
-        <p:spPr>
-          <a:xfrm>
-            <a:off x="548640" y="3749039"/>
-            <a:ext cx="11064240" cy="2011680"/>
-          </a:xfrm>
-          <a:prstGeom prst="roundRect">
-            <a:avLst>
-              <a:gd name="adj" fmla="val 10000"/>
-            </a:avLst>
-          </a:prstGeom>
-          <a:solidFill>
-            <a:srgbClr val="221E42"/>
-          </a:solidFill>
-          <a:ln w="15875">
-            <a:solidFill>
-              <a:srgbClr val="22D3EE"/>
-            </a:solidFill>
-          </a:ln>
-          <a:effectLst/>
-        </p:spPr>
-        <p:style>
-          <a:lnRef idx="1">
-            <a:schemeClr val="accent1"/>
-          </a:lnRef>
-          <a:fillRef idx="3">
-            <a:schemeClr val="accent1"/>
-          </a:fillRef>
-          <a:effectRef idx="2">
-            <a:schemeClr val="accent1"/>
-          </a:effectRef>
-          <a:fontRef idx="minor">
-            <a:schemeClr val="lt1"/>
-          </a:fontRef>
-        </p:style>
-        <p:txBody>
-          <a:bodyPr rtlCol="0" anchor="ctr"/>
-          <a:lstStyle/>
-          <a:p>
-            <a:pPr algn="ctr"/>
-          </a:p>
-        </p:txBody>
-      </p:sp>
-      <p:sp>
-        <p:nvSpPr>
-          <p:cNvPr id="23" name="Rectangle 22"/>
-          <p:cNvSpPr/>
-          <p:nvPr/>
-        </p:nvSpPr>
-        <p:spPr>
-          <a:xfrm>
-            <a:off x="548640" y="3749039"/>
-            <a:ext cx="82296" cy="2011680"/>
-          </a:xfrm>
-          <a:prstGeom prst="rect">
-            <a:avLst/>
-          </a:prstGeom>
-          <a:solidFill>
-            <a:srgbClr val="22D3EE"/>
-          </a:solidFill>
-          <a:ln>
-            <a:noFill/>
-          </a:ln>
-          <a:effectLst/>
-        </p:spPr>
-        <p:style>
-          <a:lnRef idx="1">
-            <a:schemeClr val="accent1"/>
-          </a:lnRef>
-          <a:fillRef idx="3">
-            <a:schemeClr val="accent1"/>
-          </a:fillRef>
-          <a:effectRef idx="2">
-            <a:schemeClr val="accent1"/>
-          </a:effectRef>
-          <a:fontRef idx="minor">
-            <a:schemeClr val="lt1"/>
-          </a:fontRef>
-        </p:style>
-        <p:txBody>
-          <a:bodyPr rtlCol="0" anchor="ctr"/>
-          <a:lstStyle/>
-          <a:p>
-            <a:pPr algn="ctr"/>
-          </a:p>
-        </p:txBody>
-      </p:sp>
-      <p:sp>
-        <p:nvSpPr>
-          <p:cNvPr id="24" name="TextBox 23"/>
-          <p:cNvSpPr txBox="1"/>
-          <p:nvPr/>
-        </p:nvSpPr>
-        <p:spPr>
-          <a:xfrm>
-            <a:off x="822960" y="3931920"/>
-            <a:ext cx="10515600" cy="548640"/>
-          </a:xfrm>
-          <a:prstGeom prst="rect">
-            <a:avLst/>
-          </a:prstGeom>
-          <a:noFill/>
-        </p:spPr>
-        <p:txBody>
-          <a:bodyPr wrap="square" lIns="36576" tIns="18288" rIns="36576" bIns="18288" anchor="t">
-            <a:spAutoFit/>
-          </a:bodyPr>
-          <a:lstStyle/>
-          <a:p>
-            <a:pPr algn="l"/>
-            <a:r>
-              <a:rPr sz="1800" b="1">
-                <a:solidFill>
-                  <a:srgbClr val="22D3EE"/>
-                </a:solidFill>
-                <a:latin typeface="微软雅黑" panose="020B0503020204020204" charset="-122"/>
-              </a:rPr>
-              <a:t>✅ 已实测：在 Monad 测试网真实签名并上链成功</a:t>
-            </a:r>
-            <a:endParaRPr sz="1800" b="1">
-              <a:solidFill>
-                <a:srgbClr val="22D3EE"/>
-              </a:solidFill>
-              <a:latin typeface="微软雅黑" panose="020B0503020204020204" charset="-122"/>
-            </a:endParaRPr>
-          </a:p>
-        </p:txBody>
-      </p:sp>
-      <p:sp>
-        <p:nvSpPr>
-          <p:cNvPr id="25" name="TextBox 24"/>
-          <p:cNvSpPr txBox="1"/>
-          <p:nvPr/>
-        </p:nvSpPr>
-        <p:spPr>
-          <a:xfrm>
-            <a:off x="822960" y="4572000"/>
-            <a:ext cx="10515600" cy="1005840"/>
-          </a:xfrm>
-          <a:prstGeom prst="rect">
-            <a:avLst/>
-          </a:prstGeom>
-          <a:noFill/>
-        </p:spPr>
-        <p:txBody>
-          <a:bodyPr wrap="square" lIns="36576" tIns="18288" rIns="36576" bIns="18288" anchor="t">
-            <a:spAutoFit/>
-          </a:bodyPr>
-          <a:lstStyle/>
-          <a:p>
-            <a:pPr algn="l">
-              <a:lnSpc>
-                <a:spcPct val="130000"/>
-              </a:lnSpc>
-            </a:pPr>
-            <a:r>
-              <a:rPr sz="1500" b="0">
-                <a:solidFill>
-                  <a:srgbClr val="9CA3B8"/>
-                </a:solidFill>
-                <a:latin typeface="微软雅黑" panose="020B0503020204020204" charset="-122"/>
-              </a:rPr>
-              <a:t>交易哈希已在 MonadScan 验证通过 —— 模拟、签名、广播、验证全链路跑通，不是 Demo 截图，是真上链。</a:t>
-            </a:r>
-            <a:endParaRPr sz="1500" b="0">
-              <a:solidFill>
-                <a:srgbClr val="9CA3B8"/>
-              </a:solidFill>
-              <a:latin typeface="微软雅黑" panose="020B0503020204020204" charset="-122"/>
-            </a:endParaRPr>
-          </a:p>
-        </p:txBody>
-      </p:sp>
-      <p:sp>
-        <p:nvSpPr>
-          <p:cNvPr id="26" name="TextBox 25"/>
           <p:cNvSpPr txBox="1"/>
           <p:nvPr/>
         </p:nvSpPr>
@@ -13457,7 +13638,7 @@
           <a:noFill/>
         </p:spPr>
         <p:txBody>
-          <a:bodyPr wrap="square" lIns="36576" tIns="18288" rIns="36576" bIns="18288" anchor="t">
+          <a:bodyPr wrap="square" anchor="t" lIns="36576" rIns="36576" tIns="18288" bIns="18288">
             <a:spAutoFit/>
           </a:bodyPr>
           <a:lstStyle/>
@@ -13468,22 +13649,16 @@
                 <a:solidFill>
                   <a:srgbClr val="9CA3B8"/>
                 </a:solidFill>
-                <a:latin typeface="微软雅黑" panose="020B0503020204020204" charset="-122"/>
+                <a:latin typeface="Microsoft YaHei"/>
               </a:rPr>
               <a:t>MonadLens · 看清网络，看清后果</a:t>
             </a:r>
-            <a:endParaRPr sz="1000" b="0">
-              <a:solidFill>
-                <a:srgbClr val="9CA3B8"/>
-              </a:solidFill>
-              <a:latin typeface="微软雅黑" panose="020B0503020204020204" charset="-122"/>
-            </a:endParaRPr>
-          </a:p>
-        </p:txBody>
-      </p:sp>
-      <p:sp>
-        <p:nvSpPr>
-          <p:cNvPr id="27" name="TextBox 26"/>
+          </a:p>
+        </p:txBody>
+      </p:sp>
+      <p:sp>
+        <p:nvSpPr>
+          <p:cNvPr id="22" name="TextBox 21"/>
           <p:cNvSpPr txBox="1"/>
           <p:nvPr/>
         </p:nvSpPr>
@@ -13498,7 +13673,7 @@
           <a:noFill/>
         </p:spPr>
         <p:txBody>
-          <a:bodyPr wrap="square" lIns="36576" tIns="18288" rIns="36576" bIns="18288" anchor="t">
+          <a:bodyPr wrap="square" anchor="t" lIns="36576" rIns="36576" tIns="18288" bIns="18288">
             <a:spAutoFit/>
           </a:bodyPr>
           <a:lstStyle/>
@@ -13509,16 +13684,10 @@
                 <a:solidFill>
                   <a:srgbClr val="9CA3B8"/>
                 </a:solidFill>
-                <a:latin typeface="微软雅黑" panose="020B0503020204020204" charset="-122"/>
+                <a:latin typeface="Microsoft YaHei"/>
               </a:rPr>
               <a:t>9</a:t>
             </a:r>
-            <a:endParaRPr sz="1000" b="0">
-              <a:solidFill>
-                <a:srgbClr val="9CA3B8"/>
-              </a:solidFill>
-              <a:latin typeface="微软雅黑" panose="020B0503020204020204" charset="-122"/>
-            </a:endParaRPr>
           </a:p>
         </p:txBody>
       </p:sp>
@@ -13846,10 +14015,6 @@
       </a:style>
     </a:lnDef>
   </a:objectDefaults>
-  <a:extLst>
-    <a:ext uri="{05A4C25C-085E-4340-85A3-A5531E510DB2}">
-      <thm15:themeFamily xmlns:thm15="http://schemas.microsoft.com/office/thememl/2012/main" name="Office Theme" id="{62F939B6-93AF-4DB8-9C6B-D6C7DFDC589F}" vid="{4A3C46E8-61CC-4603-A589-7422A47A8E4A}"/>
-    </a:ext>
-  </a:extLst>
+  <a:extraClrSchemeLst/>
 </a:theme>
 </file>
--- a/MonadLens演示 · 透视链.pptx
+++ b/MonadLens演示 · 透视链.pptx
@@ -12061,7 +12061,7 @@
                 </a:solidFill>
                 <a:latin typeface="Microsoft YaHei"/>
               </a:rPr>
-              <a:t>篡改后签名</a:t>
+              <a:t>封印后篡改</a:t>
             </a:r>
           </a:p>
         </p:txBody>
